--- a/Fido2_Demo介紹.pptx
+++ b/Fido2_Demo介紹.pptx
@@ -11,7 +11,14 @@
     <p:sldId id="265" r:id="rId5"/>
     <p:sldId id="266" r:id="rId6"/>
     <p:sldId id="267" r:id="rId7"/>
-    <p:sldId id="260" r:id="rId8"/>
+    <p:sldId id="269" r:id="rId8"/>
+    <p:sldId id="268" r:id="rId9"/>
+    <p:sldId id="272" r:id="rId10"/>
+    <p:sldId id="273" r:id="rId11"/>
+    <p:sldId id="271" r:id="rId12"/>
+    <p:sldId id="275" r:id="rId13"/>
+    <p:sldId id="274" r:id="rId14"/>
+    <p:sldId id="270" r:id="rId15"/>
   </p:sldIdLst>
   <p:sldSz cx="12192000" cy="6858000"/>
   <p:notesSz cx="6858000" cy="9144000"/>
@@ -110,6 +117,11 @@
       </a:defRPr>
     </a:lvl9pPr>
   </p:defaultTextStyle>
+  <p:extLst>
+    <p:ext uri="{EFAFB233-063F-42B5-8137-9DF3F51BA10A}">
+      <p15:sldGuideLst xmlns:p15="http://schemas.microsoft.com/office/powerpoint/2012/main"/>
+    </p:ext>
+  </p:extLst>
 </p:presentation>
 </file>
 
@@ -933,30 +945,30 @@
             </a:lnSpc>
           </a:pPr>
           <a:r>
-            <a:rPr lang="zh-TW" b="0" i="0"/>
+            <a:rPr lang="zh-TW" b="0" i="0" dirty="0"/>
             <a:t>後端 </a:t>
           </a:r>
           <a:r>
-            <a:rPr lang="en-US" b="0" i="0"/>
+            <a:rPr lang="en-US" b="0" i="0" dirty="0"/>
             <a:t>Python </a:t>
           </a:r>
           <a:r>
-            <a:rPr lang="zh-TW" b="0" i="0"/>
+            <a:rPr lang="zh-TW" b="0" i="0" dirty="0"/>
             <a:t>套件 </a:t>
           </a:r>
           <a:r>
-            <a:rPr lang="en-US" b="0" i="0"/>
+            <a:rPr lang="en-US" b="0" i="0" dirty="0"/>
             <a:t>Flask </a:t>
           </a:r>
           <a:r>
-            <a:rPr lang="zh-TW" b="0" i="0"/>
+            <a:rPr lang="zh-TW" b="0" i="0" dirty="0"/>
             <a:t>、</a:t>
           </a:r>
           <a:r>
-            <a:rPr lang="en-US" b="0" i="0"/>
+            <a:rPr lang="en-US" b="0" i="0" dirty="0" err="1"/>
             <a:t>webauthn</a:t>
           </a:r>
-          <a:endParaRPr lang="en-US"/>
+          <a:endParaRPr lang="en-US" dirty="0"/>
         </a:p>
       </dgm:t>
     </dgm:pt>
@@ -1437,30 +1449,30 @@
             <a:buNone/>
           </a:pPr>
           <a:r>
-            <a:rPr lang="zh-TW" sz="2500" b="0" i="0" kern="1200"/>
+            <a:rPr lang="zh-TW" sz="2500" b="0" i="0" kern="1200" dirty="0"/>
             <a:t>後端 </a:t>
           </a:r>
           <a:r>
-            <a:rPr lang="en-US" sz="2500" b="0" i="0" kern="1200"/>
+            <a:rPr lang="en-US" sz="2500" b="0" i="0" kern="1200" dirty="0"/>
             <a:t>Python </a:t>
           </a:r>
           <a:r>
-            <a:rPr lang="zh-TW" sz="2500" b="0" i="0" kern="1200"/>
+            <a:rPr lang="zh-TW" sz="2500" b="0" i="0" kern="1200" dirty="0"/>
             <a:t>套件 </a:t>
           </a:r>
           <a:r>
-            <a:rPr lang="en-US" sz="2500" b="0" i="0" kern="1200"/>
+            <a:rPr lang="en-US" sz="2500" b="0" i="0" kern="1200" dirty="0"/>
             <a:t>Flask </a:t>
           </a:r>
           <a:r>
-            <a:rPr lang="zh-TW" sz="2500" b="0" i="0" kern="1200"/>
+            <a:rPr lang="zh-TW" sz="2500" b="0" i="0" kern="1200" dirty="0"/>
             <a:t>、</a:t>
           </a:r>
           <a:r>
-            <a:rPr lang="en-US" sz="2500" b="0" i="0" kern="1200"/>
+            <a:rPr lang="en-US" sz="2500" b="0" i="0" kern="1200" dirty="0" err="1"/>
             <a:t>webauthn</a:t>
           </a:r>
-          <a:endParaRPr lang="en-US" sz="2500" kern="1200"/>
+          <a:endParaRPr lang="en-US" sz="2500" kern="1200" dirty="0"/>
         </a:p>
       </dsp:txBody>
       <dsp:txXfrm>
@@ -18827,102 +18839,7 @@
 </p:sld>
 </file>
 
-<file path=ppt/slides/slide2.xml><?xml version="1.0" encoding="utf-8"?>
-<p:sld xmlns:a="http://schemas.openxmlformats.org/drawingml/2006/main" xmlns:r="http://schemas.openxmlformats.org/officeDocument/2006/relationships" xmlns:p="http://schemas.openxmlformats.org/presentationml/2006/main">
-  <p:cSld>
-    <p:spTree>
-      <p:nvGrpSpPr>
-        <p:cNvPr id="1" name=""/>
-        <p:cNvGrpSpPr/>
-        <p:nvPr/>
-      </p:nvGrpSpPr>
-      <p:grpSpPr>
-        <a:xfrm>
-          <a:off x="0" y="0"/>
-          <a:ext cx="0" cy="0"/>
-          <a:chOff x="0" y="0"/>
-          <a:chExt cx="0" cy="0"/>
-        </a:xfrm>
-      </p:grpSpPr>
-      <p:sp>
-        <p:nvSpPr>
-          <p:cNvPr id="2" name="標題 1">
-            <a:extLst>
-              <a:ext uri="{FF2B5EF4-FFF2-40B4-BE49-F238E27FC236}">
-                <a16:creationId xmlns:a16="http://schemas.microsoft.com/office/drawing/2014/main" id="{4DDD207D-46E0-F6F6-740A-F1D279CB7088}"/>
-              </a:ext>
-            </a:extLst>
-          </p:cNvPr>
-          <p:cNvSpPr>
-            <a:spLocks noGrp="1"/>
-          </p:cNvSpPr>
-          <p:nvPr>
-            <p:ph type="title"/>
-          </p:nvPr>
-        </p:nvSpPr>
-        <p:spPr/>
-        <p:txBody>
-          <a:bodyPr/>
-          <a:lstStyle/>
-          <a:p>
-            <a:r>
-              <a:rPr lang="en-US" altLang="zh-TW" dirty="0">
-                <a:latin typeface="Fira Code" pitchFamily="1" charset="0"/>
-                <a:ea typeface="Fira Code" pitchFamily="1" charset="0"/>
-                <a:cs typeface="Fira Code" pitchFamily="1" charset="0"/>
-              </a:rPr>
-              <a:t>Demo </a:t>
-            </a:r>
-            <a:r>
-              <a:rPr lang="zh-TW" altLang="en-US" dirty="0">
-                <a:latin typeface="Fira Code" pitchFamily="1" charset="0"/>
-                <a:cs typeface="Fira Code" pitchFamily="1" charset="0"/>
-              </a:rPr>
-              <a:t>架構簡述</a:t>
-            </a:r>
-          </a:p>
-        </p:txBody>
-      </p:sp>
-      <p:graphicFrame>
-        <p:nvGraphicFramePr>
-          <p:cNvPr id="5" name="內容版面配置區 2">
-            <a:extLst>
-              <a:ext uri="{FF2B5EF4-FFF2-40B4-BE49-F238E27FC236}">
-                <a16:creationId xmlns:a16="http://schemas.microsoft.com/office/drawing/2014/main" id="{9E27B6A2-1180-1FC8-44FB-1B3EB6DCBF02}"/>
-              </a:ext>
-            </a:extLst>
-          </p:cNvPr>
-          <p:cNvGraphicFramePr>
-            <a:graphicFrameLocks noGrp="1"/>
-          </p:cNvGraphicFramePr>
-          <p:nvPr>
-            <p:ph idx="1"/>
-          </p:nvPr>
-        </p:nvGraphicFramePr>
-        <p:xfrm>
-          <a:off x="565150" y="2160016"/>
-          <a:ext cx="7335835" cy="3601212"/>
-        </p:xfrm>
-        <a:graphic>
-          <a:graphicData uri="http://schemas.openxmlformats.org/drawingml/2006/diagram">
-            <dgm:relIds xmlns:dgm="http://schemas.openxmlformats.org/drawingml/2006/diagram" xmlns:r="http://schemas.openxmlformats.org/officeDocument/2006/relationships" r:dm="rId2" r:lo="rId3" r:qs="rId4" r:cs="rId5"/>
-          </a:graphicData>
-        </a:graphic>
-      </p:graphicFrame>
-    </p:spTree>
-    <p:extLst>
-      <p:ext uri="{BB962C8B-B14F-4D97-AF65-F5344CB8AC3E}">
-        <p14:creationId xmlns:p14="http://schemas.microsoft.com/office/powerpoint/2010/main" val="633164858"/>
-      </p:ext>
-    </p:extLst>
-  </p:cSld>
-  <p:clrMapOvr>
-    <a:masterClrMapping/>
-  </p:clrMapOvr>
-</p:sld>
-</file>
-
-<file path=ppt/slides/slide3.xml><?xml version="1.0" encoding="utf-8"?>
+<file path=ppt/slides/slide10.xml><?xml version="1.0" encoding="utf-8"?>
 <p:sld xmlns:a="http://schemas.openxmlformats.org/drawingml/2006/main" xmlns:r="http://schemas.openxmlformats.org/officeDocument/2006/relationships" xmlns:p="http://schemas.openxmlformats.org/presentationml/2006/main">
   <p:cSld>
     <p:spTree>
@@ -18955,9 +18872,16 @@
             <p:ph type="title"/>
           </p:nvPr>
         </p:nvSpPr>
-        <p:spPr/>
+        <p:spPr>
+          <a:xfrm>
+            <a:off x="565150" y="770890"/>
+            <a:ext cx="10240521" cy="1268984"/>
+          </a:xfrm>
+        </p:spPr>
         <p:txBody>
-          <a:bodyPr/>
+          <a:bodyPr>
+            <a:normAutofit/>
+          </a:bodyPr>
           <a:lstStyle/>
           <a:p>
             <a:r>
@@ -18970,8 +18894,19 @@
             </a:r>
             <a:r>
               <a:rPr lang="zh-TW" altLang="en-US" dirty="0"/>
-              <a:t> 註冊</a:t>
-            </a:r>
+              <a:t> 登入</a:t>
+            </a:r>
+            <a:r>
+              <a:rPr lang="en-US" altLang="zh-TW" b="0" dirty="0">
+                <a:solidFill>
+                  <a:srgbClr val="CE9178"/>
+                </a:solidFill>
+                <a:effectLst/>
+                <a:latin typeface="Fira code" pitchFamily="1" charset="0"/>
+              </a:rPr>
+              <a:t>/verify-register</a:t>
+            </a:r>
+            <a:endParaRPr lang="zh-TW" altLang="en-US" dirty="0"/>
           </a:p>
         </p:txBody>
       </p:sp>
@@ -19018,6 +18953,53 @@
             <a:r>
               <a:rPr lang="zh-TW" altLang="en-US" dirty="0"/>
               <a:t>前端</a:t>
+            </a:r>
+          </a:p>
+        </p:txBody>
+      </p:sp>
+      <p:sp>
+        <p:nvSpPr>
+          <p:cNvPr id="8" name="矩形 7">
+            <a:extLst>
+              <a:ext uri="{FF2B5EF4-FFF2-40B4-BE49-F238E27FC236}">
+                <a16:creationId xmlns:a16="http://schemas.microsoft.com/office/drawing/2014/main" id="{56AF1438-E8A1-25D1-F4BA-0D6DAF74CEF9}"/>
+              </a:ext>
+            </a:extLst>
+          </p:cNvPr>
+          <p:cNvSpPr/>
+          <p:nvPr/>
+        </p:nvSpPr>
+        <p:spPr>
+          <a:xfrm>
+            <a:off x="8282164" y="1965350"/>
+            <a:ext cx="340012" cy="2701636"/>
+          </a:xfrm>
+          <a:prstGeom prst="rect">
+            <a:avLst/>
+          </a:prstGeom>
+        </p:spPr>
+        <p:style>
+          <a:lnRef idx="2">
+            <a:schemeClr val="dk1"/>
+          </a:lnRef>
+          <a:fillRef idx="1">
+            <a:schemeClr val="lt1"/>
+          </a:fillRef>
+          <a:effectRef idx="0">
+            <a:schemeClr val="dk1"/>
+          </a:effectRef>
+          <a:fontRef idx="minor">
+            <a:schemeClr val="dk1"/>
+          </a:fontRef>
+        </p:style>
+        <p:txBody>
+          <a:bodyPr rtlCol="0" anchor="ctr"/>
+          <a:lstStyle/>
+          <a:p>
+            <a:pPr algn="ctr"/>
+            <a:r>
+              <a:rPr lang="zh-TW" altLang="en-US" dirty="0"/>
+              <a:t>後端</a:t>
             </a:r>
           </a:p>
         </p:txBody>
@@ -19152,6 +19134,4227 @@
           </a:p>
         </p:txBody>
       </p:sp>
+      <p:sp>
+        <p:nvSpPr>
+          <p:cNvPr id="15" name="文字方塊 14">
+            <a:extLst>
+              <a:ext uri="{FF2B5EF4-FFF2-40B4-BE49-F238E27FC236}">
+                <a16:creationId xmlns:a16="http://schemas.microsoft.com/office/drawing/2014/main" id="{63936D2B-CFEE-9B24-59B8-90E7BDCD3D85}"/>
+              </a:ext>
+            </a:extLst>
+          </p:cNvPr>
+          <p:cNvSpPr txBox="1"/>
+          <p:nvPr/>
+        </p:nvSpPr>
+        <p:spPr>
+          <a:xfrm>
+            <a:off x="4413389" y="2054403"/>
+            <a:ext cx="3914578" cy="369332"/>
+          </a:xfrm>
+          <a:prstGeom prst="rect">
+            <a:avLst/>
+          </a:prstGeom>
+          <a:noFill/>
+        </p:spPr>
+        <p:txBody>
+          <a:bodyPr wrap="square" rtlCol="0">
+            <a:spAutoFit/>
+          </a:bodyPr>
+          <a:lstStyle/>
+          <a:p>
+            <a:r>
+              <a:rPr lang="en-US" altLang="zh-TW" dirty="0"/>
+              <a:t>Post </a:t>
+            </a:r>
+            <a:r>
+              <a:rPr lang="en-US" altLang="zh-TW" dirty="0">
+                <a:solidFill>
+                  <a:srgbClr val="FF0000"/>
+                </a:solidFill>
+              </a:rPr>
+              <a:t>/verify-register </a:t>
+            </a:r>
+            <a:r>
+              <a:rPr lang="en-US" altLang="zh-TW" dirty="0"/>
+              <a:t>{username}</a:t>
+            </a:r>
+            <a:endParaRPr lang="zh-TW" altLang="en-US" dirty="0"/>
+          </a:p>
+        </p:txBody>
+      </p:sp>
+      <p:cxnSp>
+        <p:nvCxnSpPr>
+          <p:cNvPr id="17" name="直線單箭頭接點 16">
+            <a:extLst>
+              <a:ext uri="{FF2B5EF4-FFF2-40B4-BE49-F238E27FC236}">
+                <a16:creationId xmlns:a16="http://schemas.microsoft.com/office/drawing/2014/main" id="{29EB607A-316C-F61E-CE68-8EABCEE17DE7}"/>
+              </a:ext>
+            </a:extLst>
+          </p:cNvPr>
+          <p:cNvCxnSpPr>
+            <a:cxnSpLocks/>
+          </p:cNvCxnSpPr>
+          <p:nvPr/>
+        </p:nvCxnSpPr>
+        <p:spPr>
+          <a:xfrm>
+            <a:off x="4326371" y="2409207"/>
+            <a:ext cx="3759401" cy="0"/>
+          </a:xfrm>
+          <a:prstGeom prst="straightConnector1">
+            <a:avLst/>
+          </a:prstGeom>
+          <a:ln w="19050" cap="flat" cmpd="sng" algn="ctr">
+            <a:solidFill>
+              <a:schemeClr val="dk1"/>
+            </a:solidFill>
+            <a:prstDash val="solid"/>
+            <a:round/>
+            <a:headEnd type="none" w="med" len="med"/>
+            <a:tailEnd type="arrow" w="med" len="med"/>
+          </a:ln>
+        </p:spPr>
+        <p:style>
+          <a:lnRef idx="0">
+            <a:scrgbClr r="0" g="0" b="0"/>
+          </a:lnRef>
+          <a:fillRef idx="0">
+            <a:scrgbClr r="0" g="0" b="0"/>
+          </a:fillRef>
+          <a:effectRef idx="0">
+            <a:scrgbClr r="0" g="0" b="0"/>
+          </a:effectRef>
+          <a:fontRef idx="minor">
+            <a:schemeClr val="tx1"/>
+          </a:fontRef>
+        </p:style>
+      </p:cxnSp>
+      <p:cxnSp>
+        <p:nvCxnSpPr>
+          <p:cNvPr id="19" name="直線單箭頭接點 18">
+            <a:extLst>
+              <a:ext uri="{FF2B5EF4-FFF2-40B4-BE49-F238E27FC236}">
+                <a16:creationId xmlns:a16="http://schemas.microsoft.com/office/drawing/2014/main" id="{D2A2F7C8-4C2F-2CDC-3154-00F8F9971D2A}"/>
+              </a:ext>
+            </a:extLst>
+          </p:cNvPr>
+          <p:cNvCxnSpPr>
+            <a:cxnSpLocks/>
+          </p:cNvCxnSpPr>
+          <p:nvPr/>
+        </p:nvCxnSpPr>
+        <p:spPr>
+          <a:xfrm flipH="1">
+            <a:off x="4326371" y="3045709"/>
+            <a:ext cx="3759401" cy="0"/>
+          </a:xfrm>
+          <a:prstGeom prst="straightConnector1">
+            <a:avLst/>
+          </a:prstGeom>
+          <a:ln w="19050" cap="flat" cmpd="sng" algn="ctr">
+            <a:solidFill>
+              <a:schemeClr val="dk1"/>
+            </a:solidFill>
+            <a:prstDash val="solid"/>
+            <a:round/>
+            <a:headEnd type="none" w="med" len="med"/>
+            <a:tailEnd type="arrow" w="med" len="med"/>
+          </a:ln>
+        </p:spPr>
+        <p:style>
+          <a:lnRef idx="0">
+            <a:scrgbClr r="0" g="0" b="0"/>
+          </a:lnRef>
+          <a:fillRef idx="0">
+            <a:scrgbClr r="0" g="0" b="0"/>
+          </a:fillRef>
+          <a:effectRef idx="0">
+            <a:scrgbClr r="0" g="0" b="0"/>
+          </a:effectRef>
+          <a:fontRef idx="minor">
+            <a:schemeClr val="tx1"/>
+          </a:fontRef>
+        </p:style>
+      </p:cxnSp>
+      <p:sp>
+        <p:nvSpPr>
+          <p:cNvPr id="22" name="文字方塊 21">
+            <a:extLst>
+              <a:ext uri="{FF2B5EF4-FFF2-40B4-BE49-F238E27FC236}">
+                <a16:creationId xmlns:a16="http://schemas.microsoft.com/office/drawing/2014/main" id="{A5C21DC1-6848-1443-F317-51816D1424CF}"/>
+              </a:ext>
+            </a:extLst>
+          </p:cNvPr>
+          <p:cNvSpPr txBox="1"/>
+          <p:nvPr/>
+        </p:nvSpPr>
+        <p:spPr>
+          <a:xfrm>
+            <a:off x="4399044" y="2669511"/>
+            <a:ext cx="3543253" cy="369332"/>
+          </a:xfrm>
+          <a:prstGeom prst="rect">
+            <a:avLst/>
+          </a:prstGeom>
+          <a:noFill/>
+        </p:spPr>
+        <p:txBody>
+          <a:bodyPr wrap="square" rtlCol="0">
+            <a:spAutoFit/>
+          </a:bodyPr>
+          <a:lstStyle/>
+          <a:p>
+            <a:r>
+              <a:rPr lang="en-US" altLang="zh-TW" dirty="0"/>
+              <a:t>Return {challenge &amp; </a:t>
+            </a:r>
+            <a:r>
+              <a:rPr lang="en-US" altLang="zh-TW" dirty="0" err="1"/>
+              <a:t>WebAuthn</a:t>
+            </a:r>
+            <a:r>
+              <a:rPr lang="en-US" altLang="zh-TW" dirty="0"/>
+              <a:t>}</a:t>
+            </a:r>
+            <a:endParaRPr lang="zh-TW" altLang="en-US" dirty="0"/>
+          </a:p>
+        </p:txBody>
+      </p:sp>
+      <p:sp>
+        <p:nvSpPr>
+          <p:cNvPr id="29" name="矩形 28">
+            <a:extLst>
+              <a:ext uri="{FF2B5EF4-FFF2-40B4-BE49-F238E27FC236}">
+                <a16:creationId xmlns:a16="http://schemas.microsoft.com/office/drawing/2014/main" id="{A5E5DEEA-DC72-25AE-6F35-14531CF21846}"/>
+              </a:ext>
+            </a:extLst>
+          </p:cNvPr>
+          <p:cNvSpPr/>
+          <p:nvPr/>
+        </p:nvSpPr>
+        <p:spPr>
+          <a:xfrm>
+            <a:off x="8622176" y="2416073"/>
+            <a:ext cx="2145254" cy="629636"/>
+          </a:xfrm>
+          <a:prstGeom prst="rect">
+            <a:avLst/>
+          </a:prstGeom>
+        </p:spPr>
+        <p:style>
+          <a:lnRef idx="2">
+            <a:schemeClr val="accent6"/>
+          </a:lnRef>
+          <a:fillRef idx="1">
+            <a:schemeClr val="lt1"/>
+          </a:fillRef>
+          <a:effectRef idx="0">
+            <a:schemeClr val="accent6"/>
+          </a:effectRef>
+          <a:fontRef idx="minor">
+            <a:schemeClr val="dk1"/>
+          </a:fontRef>
+        </p:style>
+        <p:txBody>
+          <a:bodyPr rtlCol="0" anchor="ctr"/>
+          <a:lstStyle/>
+          <a:p>
+            <a:pPr algn="ctr"/>
+            <a:r>
+              <a:rPr lang="zh-TW" altLang="en-US" dirty="0"/>
+              <a:t>判斷有無使用者</a:t>
+            </a:r>
+          </a:p>
+        </p:txBody>
+      </p:sp>
+    </p:spTree>
+    <p:extLst>
+      <p:ext uri="{BB962C8B-B14F-4D97-AF65-F5344CB8AC3E}">
+        <p14:creationId xmlns:p14="http://schemas.microsoft.com/office/powerpoint/2010/main" val="1494402552"/>
+      </p:ext>
+    </p:extLst>
+  </p:cSld>
+  <p:clrMapOvr>
+    <a:masterClrMapping/>
+  </p:clrMapOvr>
+</p:sld>
+</file>
+
+<file path=ppt/slides/slide11.xml><?xml version="1.0" encoding="utf-8"?>
+<p:sld xmlns:a="http://schemas.openxmlformats.org/drawingml/2006/main" xmlns:r="http://schemas.openxmlformats.org/officeDocument/2006/relationships" xmlns:p="http://schemas.openxmlformats.org/presentationml/2006/main">
+  <p:cSld>
+    <p:spTree>
+      <p:nvGrpSpPr>
+        <p:cNvPr id="1" name=""/>
+        <p:cNvGrpSpPr/>
+        <p:nvPr/>
+      </p:nvGrpSpPr>
+      <p:grpSpPr>
+        <a:xfrm>
+          <a:off x="0" y="0"/>
+          <a:ext cx="0" cy="0"/>
+          <a:chOff x="0" y="0"/>
+          <a:chExt cx="0" cy="0"/>
+        </a:xfrm>
+      </p:grpSpPr>
+      <p:sp>
+        <p:nvSpPr>
+          <p:cNvPr id="2" name="標題 1">
+            <a:extLst>
+              <a:ext uri="{FF2B5EF4-FFF2-40B4-BE49-F238E27FC236}">
+                <a16:creationId xmlns:a16="http://schemas.microsoft.com/office/drawing/2014/main" id="{DA93D216-982B-81FF-80B8-E8D993811653}"/>
+              </a:ext>
+            </a:extLst>
+          </p:cNvPr>
+          <p:cNvSpPr>
+            <a:spLocks noGrp="1"/>
+          </p:cNvSpPr>
+          <p:nvPr>
+            <p:ph type="title"/>
+          </p:nvPr>
+        </p:nvSpPr>
+        <p:spPr>
+          <a:xfrm>
+            <a:off x="565150" y="770890"/>
+            <a:ext cx="10240521" cy="1268984"/>
+          </a:xfrm>
+        </p:spPr>
+        <p:txBody>
+          <a:bodyPr>
+            <a:normAutofit/>
+          </a:bodyPr>
+          <a:lstStyle/>
+          <a:p>
+            <a:r>
+              <a:rPr lang="zh-TW" altLang="en-US" dirty="0"/>
+              <a:t>網頁驗證流程 </a:t>
+            </a:r>
+            <a:r>
+              <a:rPr lang="en-US" altLang="zh-TW" dirty="0"/>
+              <a:t>–</a:t>
+            </a:r>
+            <a:r>
+              <a:rPr lang="zh-TW" altLang="en-US" dirty="0"/>
+              <a:t> 登入</a:t>
+            </a:r>
+            <a:r>
+              <a:rPr lang="en-US" altLang="zh-TW" b="0" dirty="0">
+                <a:solidFill>
+                  <a:srgbClr val="CE9178"/>
+                </a:solidFill>
+                <a:effectLst/>
+                <a:latin typeface="Fira code" pitchFamily="1" charset="0"/>
+              </a:rPr>
+              <a:t>/verify-register</a:t>
+            </a:r>
+            <a:endParaRPr lang="zh-TW" altLang="en-US" dirty="0"/>
+          </a:p>
+        </p:txBody>
+      </p:sp>
+      <p:sp>
+        <p:nvSpPr>
+          <p:cNvPr id="6" name="矩形 5">
+            <a:extLst>
+              <a:ext uri="{FF2B5EF4-FFF2-40B4-BE49-F238E27FC236}">
+                <a16:creationId xmlns:a16="http://schemas.microsoft.com/office/drawing/2014/main" id="{F74207E8-3458-1C88-03EB-F43ABC311208}"/>
+              </a:ext>
+            </a:extLst>
+          </p:cNvPr>
+          <p:cNvSpPr/>
+          <p:nvPr/>
+        </p:nvSpPr>
+        <p:spPr>
+          <a:xfrm>
+            <a:off x="1596655" y="3045709"/>
+            <a:ext cx="340011" cy="1191123"/>
+          </a:xfrm>
+          <a:prstGeom prst="rect">
+            <a:avLst/>
+          </a:prstGeom>
+        </p:spPr>
+        <p:style>
+          <a:lnRef idx="2">
+            <a:schemeClr val="dk1"/>
+          </a:lnRef>
+          <a:fillRef idx="1">
+            <a:schemeClr val="lt1"/>
+          </a:fillRef>
+          <a:effectRef idx="0">
+            <a:schemeClr val="dk1"/>
+          </a:effectRef>
+          <a:fontRef idx="minor">
+            <a:schemeClr val="dk1"/>
+          </a:fontRef>
+        </p:style>
+        <p:txBody>
+          <a:bodyPr rtlCol="0" anchor="ctr"/>
+          <a:lstStyle/>
+          <a:p>
+            <a:pPr algn="ctr"/>
+            <a:r>
+              <a:rPr lang="zh-TW" altLang="en-US" dirty="0"/>
+              <a:t>瀏覽器</a:t>
+            </a:r>
+          </a:p>
+        </p:txBody>
+      </p:sp>
+      <p:sp>
+        <p:nvSpPr>
+          <p:cNvPr id="7" name="矩形 6">
+            <a:extLst>
+              <a:ext uri="{FF2B5EF4-FFF2-40B4-BE49-F238E27FC236}">
+                <a16:creationId xmlns:a16="http://schemas.microsoft.com/office/drawing/2014/main" id="{8227CAC6-BD1F-CFBF-C549-82BC31837819}"/>
+              </a:ext>
+            </a:extLst>
+          </p:cNvPr>
+          <p:cNvSpPr/>
+          <p:nvPr/>
+        </p:nvSpPr>
+        <p:spPr>
+          <a:xfrm>
+            <a:off x="3766219" y="1965350"/>
+            <a:ext cx="340011" cy="2701625"/>
+          </a:xfrm>
+          <a:prstGeom prst="rect">
+            <a:avLst/>
+          </a:prstGeom>
+        </p:spPr>
+        <p:style>
+          <a:lnRef idx="2">
+            <a:schemeClr val="dk1"/>
+          </a:lnRef>
+          <a:fillRef idx="1">
+            <a:schemeClr val="lt1"/>
+          </a:fillRef>
+          <a:effectRef idx="0">
+            <a:schemeClr val="dk1"/>
+          </a:effectRef>
+          <a:fontRef idx="minor">
+            <a:schemeClr val="dk1"/>
+          </a:fontRef>
+        </p:style>
+        <p:txBody>
+          <a:bodyPr rtlCol="0" anchor="ctr"/>
+          <a:lstStyle/>
+          <a:p>
+            <a:pPr algn="ctr"/>
+            <a:r>
+              <a:rPr lang="zh-TW" altLang="en-US" dirty="0"/>
+              <a:t>前端</a:t>
+            </a:r>
+          </a:p>
+        </p:txBody>
+      </p:sp>
+      <p:sp>
+        <p:nvSpPr>
+          <p:cNvPr id="8" name="矩形 7">
+            <a:extLst>
+              <a:ext uri="{FF2B5EF4-FFF2-40B4-BE49-F238E27FC236}">
+                <a16:creationId xmlns:a16="http://schemas.microsoft.com/office/drawing/2014/main" id="{56AF1438-E8A1-25D1-F4BA-0D6DAF74CEF9}"/>
+              </a:ext>
+            </a:extLst>
+          </p:cNvPr>
+          <p:cNvSpPr/>
+          <p:nvPr/>
+        </p:nvSpPr>
+        <p:spPr>
+          <a:xfrm>
+            <a:off x="8282164" y="1965350"/>
+            <a:ext cx="340012" cy="2701636"/>
+          </a:xfrm>
+          <a:prstGeom prst="rect">
+            <a:avLst/>
+          </a:prstGeom>
+        </p:spPr>
+        <p:style>
+          <a:lnRef idx="2">
+            <a:schemeClr val="dk1"/>
+          </a:lnRef>
+          <a:fillRef idx="1">
+            <a:schemeClr val="lt1"/>
+          </a:fillRef>
+          <a:effectRef idx="0">
+            <a:schemeClr val="dk1"/>
+          </a:effectRef>
+          <a:fontRef idx="minor">
+            <a:schemeClr val="dk1"/>
+          </a:fontRef>
+        </p:style>
+        <p:txBody>
+          <a:bodyPr rtlCol="0" anchor="ctr"/>
+          <a:lstStyle/>
+          <a:p>
+            <a:pPr algn="ctr"/>
+            <a:r>
+              <a:rPr lang="zh-TW" altLang="en-US" dirty="0"/>
+              <a:t>後端</a:t>
+            </a:r>
+          </a:p>
+        </p:txBody>
+      </p:sp>
+      <p:cxnSp>
+        <p:nvCxnSpPr>
+          <p:cNvPr id="11" name="直線單箭頭接點 10">
+            <a:extLst>
+              <a:ext uri="{FF2B5EF4-FFF2-40B4-BE49-F238E27FC236}">
+                <a16:creationId xmlns:a16="http://schemas.microsoft.com/office/drawing/2014/main" id="{897F46BA-70CA-0F4A-EBD9-D4EFDB962C04}"/>
+              </a:ext>
+            </a:extLst>
+          </p:cNvPr>
+          <p:cNvCxnSpPr>
+            <a:cxnSpLocks/>
+          </p:cNvCxnSpPr>
+          <p:nvPr/>
+        </p:nvCxnSpPr>
+        <p:spPr>
+          <a:xfrm>
+            <a:off x="2342382" y="2409206"/>
+            <a:ext cx="1323347" cy="1"/>
+          </a:xfrm>
+          <a:prstGeom prst="straightConnector1">
+            <a:avLst/>
+          </a:prstGeom>
+          <a:ln w="19050" cap="flat" cmpd="sng" algn="ctr">
+            <a:solidFill>
+              <a:schemeClr val="dk1"/>
+            </a:solidFill>
+            <a:prstDash val="solid"/>
+            <a:round/>
+            <a:headEnd type="none" w="med" len="med"/>
+            <a:tailEnd type="arrow" w="med" len="med"/>
+          </a:ln>
+        </p:spPr>
+        <p:style>
+          <a:lnRef idx="0">
+            <a:scrgbClr r="0" g="0" b="0"/>
+          </a:lnRef>
+          <a:fillRef idx="0">
+            <a:scrgbClr r="0" g="0" b="0"/>
+          </a:fillRef>
+          <a:effectRef idx="0">
+            <a:scrgbClr r="0" g="0" b="0"/>
+          </a:effectRef>
+          <a:fontRef idx="minor">
+            <a:schemeClr val="tx1"/>
+          </a:fontRef>
+        </p:style>
+      </p:cxnSp>
+      <p:sp>
+        <p:nvSpPr>
+          <p:cNvPr id="13" name="文字方塊 12">
+            <a:extLst>
+              <a:ext uri="{FF2B5EF4-FFF2-40B4-BE49-F238E27FC236}">
+                <a16:creationId xmlns:a16="http://schemas.microsoft.com/office/drawing/2014/main" id="{70ED5A8E-1E7B-7555-6B38-81FB669E4B71}"/>
+              </a:ext>
+            </a:extLst>
+          </p:cNvPr>
+          <p:cNvSpPr txBox="1"/>
+          <p:nvPr/>
+        </p:nvSpPr>
+        <p:spPr>
+          <a:xfrm>
+            <a:off x="2317001" y="2039874"/>
+            <a:ext cx="1284964" cy="369332"/>
+          </a:xfrm>
+          <a:prstGeom prst="rect">
+            <a:avLst/>
+          </a:prstGeom>
+          <a:noFill/>
+        </p:spPr>
+        <p:txBody>
+          <a:bodyPr wrap="square" rtlCol="0">
+            <a:spAutoFit/>
+          </a:bodyPr>
+          <a:lstStyle/>
+          <a:p>
+            <a:r>
+              <a:rPr lang="en-US" altLang="zh-TW" dirty="0"/>
+              <a:t>username</a:t>
+            </a:r>
+            <a:endParaRPr lang="zh-TW" altLang="en-US" dirty="0"/>
+          </a:p>
+        </p:txBody>
+      </p:sp>
+      <p:sp>
+        <p:nvSpPr>
+          <p:cNvPr id="14" name="橢圓 13">
+            <a:extLst>
+              <a:ext uri="{FF2B5EF4-FFF2-40B4-BE49-F238E27FC236}">
+                <a16:creationId xmlns:a16="http://schemas.microsoft.com/office/drawing/2014/main" id="{3A6B441E-E8D4-E360-E3FF-70D2E5F6844D}"/>
+              </a:ext>
+            </a:extLst>
+          </p:cNvPr>
+          <p:cNvSpPr/>
+          <p:nvPr/>
+        </p:nvSpPr>
+        <p:spPr>
+          <a:xfrm>
+            <a:off x="1386329" y="1972216"/>
+            <a:ext cx="748146" cy="887713"/>
+          </a:xfrm>
+          <a:prstGeom prst="ellipse">
+            <a:avLst/>
+          </a:prstGeom>
+        </p:spPr>
+        <p:style>
+          <a:lnRef idx="2">
+            <a:schemeClr val="dk1"/>
+          </a:lnRef>
+          <a:fillRef idx="1">
+            <a:schemeClr val="lt1"/>
+          </a:fillRef>
+          <a:effectRef idx="0">
+            <a:schemeClr val="dk1"/>
+          </a:effectRef>
+          <a:fontRef idx="minor">
+            <a:schemeClr val="dk1"/>
+          </a:fontRef>
+        </p:style>
+        <p:txBody>
+          <a:bodyPr rtlCol="0" anchor="ctr"/>
+          <a:lstStyle/>
+          <a:p>
+            <a:pPr algn="ctr"/>
+            <a:r>
+              <a:rPr lang="zh-TW" altLang="en-US" dirty="0"/>
+              <a:t>使用者</a:t>
+            </a:r>
+          </a:p>
+        </p:txBody>
+      </p:sp>
+      <p:sp>
+        <p:nvSpPr>
+          <p:cNvPr id="15" name="文字方塊 14">
+            <a:extLst>
+              <a:ext uri="{FF2B5EF4-FFF2-40B4-BE49-F238E27FC236}">
+                <a16:creationId xmlns:a16="http://schemas.microsoft.com/office/drawing/2014/main" id="{63936D2B-CFEE-9B24-59B8-90E7BDCD3D85}"/>
+              </a:ext>
+            </a:extLst>
+          </p:cNvPr>
+          <p:cNvSpPr txBox="1"/>
+          <p:nvPr/>
+        </p:nvSpPr>
+        <p:spPr>
+          <a:xfrm>
+            <a:off x="4413389" y="2054403"/>
+            <a:ext cx="3914578" cy="369332"/>
+          </a:xfrm>
+          <a:prstGeom prst="rect">
+            <a:avLst/>
+          </a:prstGeom>
+          <a:noFill/>
+        </p:spPr>
+        <p:txBody>
+          <a:bodyPr wrap="square" rtlCol="0">
+            <a:spAutoFit/>
+          </a:bodyPr>
+          <a:lstStyle/>
+          <a:p>
+            <a:r>
+              <a:rPr lang="en-US" altLang="zh-TW" dirty="0"/>
+              <a:t>Post </a:t>
+            </a:r>
+            <a:r>
+              <a:rPr lang="en-US" altLang="zh-TW" dirty="0">
+                <a:solidFill>
+                  <a:srgbClr val="FF0000"/>
+                </a:solidFill>
+              </a:rPr>
+              <a:t>/verify-register </a:t>
+            </a:r>
+            <a:r>
+              <a:rPr lang="en-US" altLang="zh-TW" dirty="0"/>
+              <a:t>{username}</a:t>
+            </a:r>
+            <a:endParaRPr lang="zh-TW" altLang="en-US" dirty="0"/>
+          </a:p>
+        </p:txBody>
+      </p:sp>
+      <p:cxnSp>
+        <p:nvCxnSpPr>
+          <p:cNvPr id="17" name="直線單箭頭接點 16">
+            <a:extLst>
+              <a:ext uri="{FF2B5EF4-FFF2-40B4-BE49-F238E27FC236}">
+                <a16:creationId xmlns:a16="http://schemas.microsoft.com/office/drawing/2014/main" id="{29EB607A-316C-F61E-CE68-8EABCEE17DE7}"/>
+              </a:ext>
+            </a:extLst>
+          </p:cNvPr>
+          <p:cNvCxnSpPr>
+            <a:cxnSpLocks/>
+          </p:cNvCxnSpPr>
+          <p:nvPr/>
+        </p:nvCxnSpPr>
+        <p:spPr>
+          <a:xfrm>
+            <a:off x="4326371" y="2409207"/>
+            <a:ext cx="3759401" cy="0"/>
+          </a:xfrm>
+          <a:prstGeom prst="straightConnector1">
+            <a:avLst/>
+          </a:prstGeom>
+          <a:ln w="19050" cap="flat" cmpd="sng" algn="ctr">
+            <a:solidFill>
+              <a:schemeClr val="dk1"/>
+            </a:solidFill>
+            <a:prstDash val="solid"/>
+            <a:round/>
+            <a:headEnd type="none" w="med" len="med"/>
+            <a:tailEnd type="arrow" w="med" len="med"/>
+          </a:ln>
+        </p:spPr>
+        <p:style>
+          <a:lnRef idx="0">
+            <a:scrgbClr r="0" g="0" b="0"/>
+          </a:lnRef>
+          <a:fillRef idx="0">
+            <a:scrgbClr r="0" g="0" b="0"/>
+          </a:fillRef>
+          <a:effectRef idx="0">
+            <a:scrgbClr r="0" g="0" b="0"/>
+          </a:effectRef>
+          <a:fontRef idx="minor">
+            <a:schemeClr val="tx1"/>
+          </a:fontRef>
+        </p:style>
+      </p:cxnSp>
+      <p:cxnSp>
+        <p:nvCxnSpPr>
+          <p:cNvPr id="19" name="直線單箭頭接點 18">
+            <a:extLst>
+              <a:ext uri="{FF2B5EF4-FFF2-40B4-BE49-F238E27FC236}">
+                <a16:creationId xmlns:a16="http://schemas.microsoft.com/office/drawing/2014/main" id="{D2A2F7C8-4C2F-2CDC-3154-00F8F9971D2A}"/>
+              </a:ext>
+            </a:extLst>
+          </p:cNvPr>
+          <p:cNvCxnSpPr>
+            <a:cxnSpLocks/>
+          </p:cNvCxnSpPr>
+          <p:nvPr/>
+        </p:nvCxnSpPr>
+        <p:spPr>
+          <a:xfrm flipH="1">
+            <a:off x="4326371" y="3045709"/>
+            <a:ext cx="3759401" cy="0"/>
+          </a:xfrm>
+          <a:prstGeom prst="straightConnector1">
+            <a:avLst/>
+          </a:prstGeom>
+          <a:ln w="19050" cap="flat" cmpd="sng" algn="ctr">
+            <a:solidFill>
+              <a:schemeClr val="dk1"/>
+            </a:solidFill>
+            <a:prstDash val="solid"/>
+            <a:round/>
+            <a:headEnd type="none" w="med" len="med"/>
+            <a:tailEnd type="arrow" w="med" len="med"/>
+          </a:ln>
+        </p:spPr>
+        <p:style>
+          <a:lnRef idx="0">
+            <a:scrgbClr r="0" g="0" b="0"/>
+          </a:lnRef>
+          <a:fillRef idx="0">
+            <a:scrgbClr r="0" g="0" b="0"/>
+          </a:fillRef>
+          <a:effectRef idx="0">
+            <a:scrgbClr r="0" g="0" b="0"/>
+          </a:effectRef>
+          <a:fontRef idx="minor">
+            <a:schemeClr val="tx1"/>
+          </a:fontRef>
+        </p:style>
+      </p:cxnSp>
+      <p:sp>
+        <p:nvSpPr>
+          <p:cNvPr id="22" name="文字方塊 21">
+            <a:extLst>
+              <a:ext uri="{FF2B5EF4-FFF2-40B4-BE49-F238E27FC236}">
+                <a16:creationId xmlns:a16="http://schemas.microsoft.com/office/drawing/2014/main" id="{A5C21DC1-6848-1443-F317-51816D1424CF}"/>
+              </a:ext>
+            </a:extLst>
+          </p:cNvPr>
+          <p:cNvSpPr txBox="1"/>
+          <p:nvPr/>
+        </p:nvSpPr>
+        <p:spPr>
+          <a:xfrm>
+            <a:off x="4399044" y="2669511"/>
+            <a:ext cx="3543253" cy="369332"/>
+          </a:xfrm>
+          <a:prstGeom prst="rect">
+            <a:avLst/>
+          </a:prstGeom>
+          <a:noFill/>
+        </p:spPr>
+        <p:txBody>
+          <a:bodyPr wrap="square" rtlCol="0">
+            <a:spAutoFit/>
+          </a:bodyPr>
+          <a:lstStyle/>
+          <a:p>
+            <a:r>
+              <a:rPr lang="en-US" altLang="zh-TW" dirty="0"/>
+              <a:t>Return {challenge &amp; </a:t>
+            </a:r>
+            <a:r>
+              <a:rPr lang="en-US" altLang="zh-TW" dirty="0" err="1"/>
+              <a:t>WebAuthn</a:t>
+            </a:r>
+            <a:r>
+              <a:rPr lang="en-US" altLang="zh-TW" dirty="0"/>
+              <a:t>}</a:t>
+            </a:r>
+            <a:endParaRPr lang="zh-TW" altLang="en-US" dirty="0"/>
+          </a:p>
+        </p:txBody>
+      </p:sp>
+      <p:cxnSp>
+        <p:nvCxnSpPr>
+          <p:cNvPr id="3" name="直線單箭頭接點 2">
+            <a:extLst>
+              <a:ext uri="{FF2B5EF4-FFF2-40B4-BE49-F238E27FC236}">
+                <a16:creationId xmlns:a16="http://schemas.microsoft.com/office/drawing/2014/main" id="{4ECEE5A6-694F-B9B1-2CD2-E50A2E7599E5}"/>
+              </a:ext>
+            </a:extLst>
+          </p:cNvPr>
+          <p:cNvCxnSpPr>
+            <a:cxnSpLocks/>
+          </p:cNvCxnSpPr>
+          <p:nvPr/>
+        </p:nvCxnSpPr>
+        <p:spPr>
+          <a:xfrm flipH="1">
+            <a:off x="2023780" y="3316162"/>
+            <a:ext cx="1641949" cy="0"/>
+          </a:xfrm>
+          <a:prstGeom prst="straightConnector1">
+            <a:avLst/>
+          </a:prstGeom>
+          <a:ln w="19050" cap="flat" cmpd="sng" algn="ctr">
+            <a:solidFill>
+              <a:schemeClr val="dk1"/>
+            </a:solidFill>
+            <a:prstDash val="solid"/>
+            <a:round/>
+            <a:headEnd type="none" w="med" len="med"/>
+            <a:tailEnd type="arrow" w="med" len="med"/>
+          </a:ln>
+        </p:spPr>
+        <p:style>
+          <a:lnRef idx="0">
+            <a:scrgbClr r="0" g="0" b="0"/>
+          </a:lnRef>
+          <a:fillRef idx="0">
+            <a:scrgbClr r="0" g="0" b="0"/>
+          </a:fillRef>
+          <a:effectRef idx="0">
+            <a:scrgbClr r="0" g="0" b="0"/>
+          </a:effectRef>
+          <a:fontRef idx="minor">
+            <a:schemeClr val="tx1"/>
+          </a:fontRef>
+        </p:style>
+      </p:cxnSp>
+      <p:sp>
+        <p:nvSpPr>
+          <p:cNvPr id="9" name="文字方塊 8">
+            <a:extLst>
+              <a:ext uri="{FF2B5EF4-FFF2-40B4-BE49-F238E27FC236}">
+                <a16:creationId xmlns:a16="http://schemas.microsoft.com/office/drawing/2014/main" id="{B09AD9AF-448E-0BAB-155A-077AB324EBFE}"/>
+              </a:ext>
+            </a:extLst>
+          </p:cNvPr>
+          <p:cNvSpPr txBox="1"/>
+          <p:nvPr/>
+        </p:nvSpPr>
+        <p:spPr>
+          <a:xfrm>
+            <a:off x="2261114" y="2913510"/>
+            <a:ext cx="1284964" cy="369332"/>
+          </a:xfrm>
+          <a:prstGeom prst="rect">
+            <a:avLst/>
+          </a:prstGeom>
+          <a:noFill/>
+        </p:spPr>
+        <p:txBody>
+          <a:bodyPr wrap="square" rtlCol="0">
+            <a:spAutoFit/>
+          </a:bodyPr>
+          <a:lstStyle/>
+          <a:p>
+            <a:r>
+              <a:rPr lang="zh-TW" altLang="en-US" dirty="0"/>
+              <a:t>調用 </a:t>
+            </a:r>
+            <a:r>
+              <a:rPr lang="en-US" altLang="zh-TW" dirty="0"/>
+              <a:t>API</a:t>
+            </a:r>
+            <a:endParaRPr lang="zh-TW" altLang="en-US" dirty="0"/>
+          </a:p>
+        </p:txBody>
+      </p:sp>
+      <p:cxnSp>
+        <p:nvCxnSpPr>
+          <p:cNvPr id="16" name="直線單箭頭接點 15">
+            <a:extLst>
+              <a:ext uri="{FF2B5EF4-FFF2-40B4-BE49-F238E27FC236}">
+                <a16:creationId xmlns:a16="http://schemas.microsoft.com/office/drawing/2014/main" id="{E6B85DB3-E92E-B067-1FB0-735E6A92018D}"/>
+              </a:ext>
+            </a:extLst>
+          </p:cNvPr>
+          <p:cNvCxnSpPr>
+            <a:cxnSpLocks/>
+          </p:cNvCxnSpPr>
+          <p:nvPr/>
+        </p:nvCxnSpPr>
+        <p:spPr>
+          <a:xfrm>
+            <a:off x="2046737" y="3787147"/>
+            <a:ext cx="1658800" cy="0"/>
+          </a:xfrm>
+          <a:prstGeom prst="straightConnector1">
+            <a:avLst/>
+          </a:prstGeom>
+          <a:ln w="19050" cap="flat" cmpd="sng" algn="ctr">
+            <a:solidFill>
+              <a:schemeClr val="dk1"/>
+            </a:solidFill>
+            <a:prstDash val="solid"/>
+            <a:round/>
+            <a:headEnd type="none" w="med" len="med"/>
+            <a:tailEnd type="arrow" w="med" len="med"/>
+          </a:ln>
+        </p:spPr>
+        <p:style>
+          <a:lnRef idx="0">
+            <a:scrgbClr r="0" g="0" b="0"/>
+          </a:lnRef>
+          <a:fillRef idx="0">
+            <a:scrgbClr r="0" g="0" b="0"/>
+          </a:fillRef>
+          <a:effectRef idx="0">
+            <a:scrgbClr r="0" g="0" b="0"/>
+          </a:effectRef>
+          <a:fontRef idx="minor">
+            <a:schemeClr val="tx1"/>
+          </a:fontRef>
+        </p:style>
+      </p:cxnSp>
+      <p:sp>
+        <p:nvSpPr>
+          <p:cNvPr id="18" name="文字方塊 17">
+            <a:extLst>
+              <a:ext uri="{FF2B5EF4-FFF2-40B4-BE49-F238E27FC236}">
+                <a16:creationId xmlns:a16="http://schemas.microsoft.com/office/drawing/2014/main" id="{9D9EB68C-8871-4A17-8133-9B6914273DBF}"/>
+              </a:ext>
+            </a:extLst>
+          </p:cNvPr>
+          <p:cNvSpPr txBox="1"/>
+          <p:nvPr/>
+        </p:nvSpPr>
+        <p:spPr>
+          <a:xfrm>
+            <a:off x="2078182" y="3462056"/>
+            <a:ext cx="1732044" cy="325089"/>
+          </a:xfrm>
+          <a:prstGeom prst="rect">
+            <a:avLst/>
+          </a:prstGeom>
+          <a:noFill/>
+        </p:spPr>
+        <p:txBody>
+          <a:bodyPr wrap="square" rtlCol="0">
+            <a:spAutoFit/>
+          </a:bodyPr>
+          <a:lstStyle/>
+          <a:p>
+            <a:pPr>
+              <a:lnSpc>
+                <a:spcPts val="1650"/>
+              </a:lnSpc>
+            </a:pPr>
+            <a:r>
+              <a:rPr lang="en-US" altLang="zh-TW" b="0" dirty="0">
+                <a:solidFill>
+                  <a:srgbClr val="4FC1FF"/>
+                </a:solidFill>
+                <a:effectLst/>
+                <a:latin typeface="Fira code" pitchFamily="1" charset="0"/>
+              </a:rPr>
+              <a:t>credential</a:t>
+            </a:r>
+            <a:endParaRPr lang="en-US" altLang="zh-TW" b="0" dirty="0">
+              <a:solidFill>
+                <a:srgbClr val="CCCCCC"/>
+              </a:solidFill>
+              <a:effectLst/>
+              <a:latin typeface="Fira code" pitchFamily="1" charset="0"/>
+            </a:endParaRPr>
+          </a:p>
+        </p:txBody>
+      </p:sp>
+      <p:sp>
+        <p:nvSpPr>
+          <p:cNvPr id="29" name="矩形 28">
+            <a:extLst>
+              <a:ext uri="{FF2B5EF4-FFF2-40B4-BE49-F238E27FC236}">
+                <a16:creationId xmlns:a16="http://schemas.microsoft.com/office/drawing/2014/main" id="{A5E5DEEA-DC72-25AE-6F35-14531CF21846}"/>
+              </a:ext>
+            </a:extLst>
+          </p:cNvPr>
+          <p:cNvSpPr/>
+          <p:nvPr/>
+        </p:nvSpPr>
+        <p:spPr>
+          <a:xfrm>
+            <a:off x="8622176" y="2416073"/>
+            <a:ext cx="2145254" cy="629636"/>
+          </a:xfrm>
+          <a:prstGeom prst="rect">
+            <a:avLst/>
+          </a:prstGeom>
+        </p:spPr>
+        <p:style>
+          <a:lnRef idx="2">
+            <a:schemeClr val="accent6"/>
+          </a:lnRef>
+          <a:fillRef idx="1">
+            <a:schemeClr val="lt1"/>
+          </a:fillRef>
+          <a:effectRef idx="0">
+            <a:schemeClr val="accent6"/>
+          </a:effectRef>
+          <a:fontRef idx="minor">
+            <a:schemeClr val="dk1"/>
+          </a:fontRef>
+        </p:style>
+        <p:txBody>
+          <a:bodyPr rtlCol="0" anchor="ctr"/>
+          <a:lstStyle/>
+          <a:p>
+            <a:pPr algn="ctr"/>
+            <a:r>
+              <a:rPr lang="zh-TW" altLang="en-US" dirty="0"/>
+              <a:t>判斷有無使用者</a:t>
+            </a:r>
+          </a:p>
+        </p:txBody>
+      </p:sp>
+    </p:spTree>
+    <p:extLst>
+      <p:ext uri="{BB962C8B-B14F-4D97-AF65-F5344CB8AC3E}">
+        <p14:creationId xmlns:p14="http://schemas.microsoft.com/office/powerpoint/2010/main" val="3669685446"/>
+      </p:ext>
+    </p:extLst>
+  </p:cSld>
+  <p:clrMapOvr>
+    <a:masterClrMapping/>
+  </p:clrMapOvr>
+</p:sld>
+</file>
+
+<file path=ppt/slides/slide12.xml><?xml version="1.0" encoding="utf-8"?>
+<p:sld xmlns:a="http://schemas.openxmlformats.org/drawingml/2006/main" xmlns:r="http://schemas.openxmlformats.org/officeDocument/2006/relationships" xmlns:p="http://schemas.openxmlformats.org/presentationml/2006/main">
+  <p:cSld>
+    <p:spTree>
+      <p:nvGrpSpPr>
+        <p:cNvPr id="1" name=""/>
+        <p:cNvGrpSpPr/>
+        <p:nvPr/>
+      </p:nvGrpSpPr>
+      <p:grpSpPr>
+        <a:xfrm>
+          <a:off x="0" y="0"/>
+          <a:ext cx="0" cy="0"/>
+          <a:chOff x="0" y="0"/>
+          <a:chExt cx="0" cy="0"/>
+        </a:xfrm>
+      </p:grpSpPr>
+      <p:sp>
+        <p:nvSpPr>
+          <p:cNvPr id="2" name="標題 1">
+            <a:extLst>
+              <a:ext uri="{FF2B5EF4-FFF2-40B4-BE49-F238E27FC236}">
+                <a16:creationId xmlns:a16="http://schemas.microsoft.com/office/drawing/2014/main" id="{DA93D216-982B-81FF-80B8-E8D993811653}"/>
+              </a:ext>
+            </a:extLst>
+          </p:cNvPr>
+          <p:cNvSpPr>
+            <a:spLocks noGrp="1"/>
+          </p:cNvSpPr>
+          <p:nvPr>
+            <p:ph type="title"/>
+          </p:nvPr>
+        </p:nvSpPr>
+        <p:spPr>
+          <a:xfrm>
+            <a:off x="565150" y="770890"/>
+            <a:ext cx="10240521" cy="1268984"/>
+          </a:xfrm>
+        </p:spPr>
+        <p:txBody>
+          <a:bodyPr>
+            <a:normAutofit fontScale="90000"/>
+          </a:bodyPr>
+          <a:lstStyle/>
+          <a:p>
+            <a:r>
+              <a:rPr lang="zh-TW" altLang="en-US" dirty="0"/>
+              <a:t>網頁驗證流程 </a:t>
+            </a:r>
+            <a:r>
+              <a:rPr lang="en-US" altLang="zh-TW" dirty="0"/>
+              <a:t>–</a:t>
+            </a:r>
+            <a:r>
+              <a:rPr lang="zh-TW" altLang="en-US" dirty="0"/>
+              <a:t> 登入</a:t>
+            </a:r>
+            <a:r>
+              <a:rPr lang="en-US" altLang="zh-TW" b="0" dirty="0">
+                <a:solidFill>
+                  <a:srgbClr val="CE9178"/>
+                </a:solidFill>
+                <a:effectLst/>
+                <a:latin typeface="Fira code" pitchFamily="1" charset="0"/>
+              </a:rPr>
+              <a:t>/verify-credential</a:t>
+            </a:r>
+            <a:endParaRPr lang="zh-TW" altLang="en-US" dirty="0"/>
+          </a:p>
+        </p:txBody>
+      </p:sp>
+      <p:sp>
+        <p:nvSpPr>
+          <p:cNvPr id="6" name="矩形 5">
+            <a:extLst>
+              <a:ext uri="{FF2B5EF4-FFF2-40B4-BE49-F238E27FC236}">
+                <a16:creationId xmlns:a16="http://schemas.microsoft.com/office/drawing/2014/main" id="{F74207E8-3458-1C88-03EB-F43ABC311208}"/>
+              </a:ext>
+            </a:extLst>
+          </p:cNvPr>
+          <p:cNvSpPr/>
+          <p:nvPr/>
+        </p:nvSpPr>
+        <p:spPr>
+          <a:xfrm>
+            <a:off x="1596655" y="3045709"/>
+            <a:ext cx="340011" cy="1191123"/>
+          </a:xfrm>
+          <a:prstGeom prst="rect">
+            <a:avLst/>
+          </a:prstGeom>
+        </p:spPr>
+        <p:style>
+          <a:lnRef idx="2">
+            <a:schemeClr val="dk1"/>
+          </a:lnRef>
+          <a:fillRef idx="1">
+            <a:schemeClr val="lt1"/>
+          </a:fillRef>
+          <a:effectRef idx="0">
+            <a:schemeClr val="dk1"/>
+          </a:effectRef>
+          <a:fontRef idx="minor">
+            <a:schemeClr val="dk1"/>
+          </a:fontRef>
+        </p:style>
+        <p:txBody>
+          <a:bodyPr rtlCol="0" anchor="ctr"/>
+          <a:lstStyle/>
+          <a:p>
+            <a:pPr algn="ctr"/>
+            <a:r>
+              <a:rPr lang="zh-TW" altLang="en-US" dirty="0"/>
+              <a:t>瀏覽器</a:t>
+            </a:r>
+          </a:p>
+        </p:txBody>
+      </p:sp>
+      <p:sp>
+        <p:nvSpPr>
+          <p:cNvPr id="7" name="矩形 6">
+            <a:extLst>
+              <a:ext uri="{FF2B5EF4-FFF2-40B4-BE49-F238E27FC236}">
+                <a16:creationId xmlns:a16="http://schemas.microsoft.com/office/drawing/2014/main" id="{8227CAC6-BD1F-CFBF-C549-82BC31837819}"/>
+              </a:ext>
+            </a:extLst>
+          </p:cNvPr>
+          <p:cNvSpPr/>
+          <p:nvPr/>
+        </p:nvSpPr>
+        <p:spPr>
+          <a:xfrm>
+            <a:off x="3766219" y="1965350"/>
+            <a:ext cx="340011" cy="2701625"/>
+          </a:xfrm>
+          <a:prstGeom prst="rect">
+            <a:avLst/>
+          </a:prstGeom>
+        </p:spPr>
+        <p:style>
+          <a:lnRef idx="2">
+            <a:schemeClr val="dk1"/>
+          </a:lnRef>
+          <a:fillRef idx="1">
+            <a:schemeClr val="lt1"/>
+          </a:fillRef>
+          <a:effectRef idx="0">
+            <a:schemeClr val="dk1"/>
+          </a:effectRef>
+          <a:fontRef idx="minor">
+            <a:schemeClr val="dk1"/>
+          </a:fontRef>
+        </p:style>
+        <p:txBody>
+          <a:bodyPr rtlCol="0" anchor="ctr"/>
+          <a:lstStyle/>
+          <a:p>
+            <a:pPr algn="ctr"/>
+            <a:r>
+              <a:rPr lang="zh-TW" altLang="en-US" dirty="0"/>
+              <a:t>前端</a:t>
+            </a:r>
+          </a:p>
+        </p:txBody>
+      </p:sp>
+      <p:sp>
+        <p:nvSpPr>
+          <p:cNvPr id="8" name="矩形 7">
+            <a:extLst>
+              <a:ext uri="{FF2B5EF4-FFF2-40B4-BE49-F238E27FC236}">
+                <a16:creationId xmlns:a16="http://schemas.microsoft.com/office/drawing/2014/main" id="{56AF1438-E8A1-25D1-F4BA-0D6DAF74CEF9}"/>
+              </a:ext>
+            </a:extLst>
+          </p:cNvPr>
+          <p:cNvSpPr/>
+          <p:nvPr/>
+        </p:nvSpPr>
+        <p:spPr>
+          <a:xfrm>
+            <a:off x="8282164" y="1965350"/>
+            <a:ext cx="340012" cy="2701636"/>
+          </a:xfrm>
+          <a:prstGeom prst="rect">
+            <a:avLst/>
+          </a:prstGeom>
+        </p:spPr>
+        <p:style>
+          <a:lnRef idx="2">
+            <a:schemeClr val="dk1"/>
+          </a:lnRef>
+          <a:fillRef idx="1">
+            <a:schemeClr val="lt1"/>
+          </a:fillRef>
+          <a:effectRef idx="0">
+            <a:schemeClr val="dk1"/>
+          </a:effectRef>
+          <a:fontRef idx="minor">
+            <a:schemeClr val="dk1"/>
+          </a:fontRef>
+        </p:style>
+        <p:txBody>
+          <a:bodyPr rtlCol="0" anchor="ctr"/>
+          <a:lstStyle/>
+          <a:p>
+            <a:pPr algn="ctr"/>
+            <a:r>
+              <a:rPr lang="zh-TW" altLang="en-US" dirty="0"/>
+              <a:t>後端</a:t>
+            </a:r>
+          </a:p>
+        </p:txBody>
+      </p:sp>
+      <p:cxnSp>
+        <p:nvCxnSpPr>
+          <p:cNvPr id="11" name="直線單箭頭接點 10">
+            <a:extLst>
+              <a:ext uri="{FF2B5EF4-FFF2-40B4-BE49-F238E27FC236}">
+                <a16:creationId xmlns:a16="http://schemas.microsoft.com/office/drawing/2014/main" id="{897F46BA-70CA-0F4A-EBD9-D4EFDB962C04}"/>
+              </a:ext>
+            </a:extLst>
+          </p:cNvPr>
+          <p:cNvCxnSpPr>
+            <a:cxnSpLocks/>
+          </p:cNvCxnSpPr>
+          <p:nvPr/>
+        </p:nvCxnSpPr>
+        <p:spPr>
+          <a:xfrm>
+            <a:off x="2342382" y="2409206"/>
+            <a:ext cx="1323347" cy="1"/>
+          </a:xfrm>
+          <a:prstGeom prst="straightConnector1">
+            <a:avLst/>
+          </a:prstGeom>
+          <a:ln w="19050" cap="flat" cmpd="sng" algn="ctr">
+            <a:solidFill>
+              <a:schemeClr val="dk1"/>
+            </a:solidFill>
+            <a:prstDash val="solid"/>
+            <a:round/>
+            <a:headEnd type="none" w="med" len="med"/>
+            <a:tailEnd type="arrow" w="med" len="med"/>
+          </a:ln>
+        </p:spPr>
+        <p:style>
+          <a:lnRef idx="0">
+            <a:scrgbClr r="0" g="0" b="0"/>
+          </a:lnRef>
+          <a:fillRef idx="0">
+            <a:scrgbClr r="0" g="0" b="0"/>
+          </a:fillRef>
+          <a:effectRef idx="0">
+            <a:scrgbClr r="0" g="0" b="0"/>
+          </a:effectRef>
+          <a:fontRef idx="minor">
+            <a:schemeClr val="tx1"/>
+          </a:fontRef>
+        </p:style>
+      </p:cxnSp>
+      <p:sp>
+        <p:nvSpPr>
+          <p:cNvPr id="13" name="文字方塊 12">
+            <a:extLst>
+              <a:ext uri="{FF2B5EF4-FFF2-40B4-BE49-F238E27FC236}">
+                <a16:creationId xmlns:a16="http://schemas.microsoft.com/office/drawing/2014/main" id="{70ED5A8E-1E7B-7555-6B38-81FB669E4B71}"/>
+              </a:ext>
+            </a:extLst>
+          </p:cNvPr>
+          <p:cNvSpPr txBox="1"/>
+          <p:nvPr/>
+        </p:nvSpPr>
+        <p:spPr>
+          <a:xfrm>
+            <a:off x="2317001" y="2039874"/>
+            <a:ext cx="1284964" cy="369332"/>
+          </a:xfrm>
+          <a:prstGeom prst="rect">
+            <a:avLst/>
+          </a:prstGeom>
+          <a:noFill/>
+        </p:spPr>
+        <p:txBody>
+          <a:bodyPr wrap="square" rtlCol="0">
+            <a:spAutoFit/>
+          </a:bodyPr>
+          <a:lstStyle/>
+          <a:p>
+            <a:r>
+              <a:rPr lang="en-US" altLang="zh-TW" dirty="0"/>
+              <a:t>username</a:t>
+            </a:r>
+            <a:endParaRPr lang="zh-TW" altLang="en-US" dirty="0"/>
+          </a:p>
+        </p:txBody>
+      </p:sp>
+      <p:sp>
+        <p:nvSpPr>
+          <p:cNvPr id="14" name="橢圓 13">
+            <a:extLst>
+              <a:ext uri="{FF2B5EF4-FFF2-40B4-BE49-F238E27FC236}">
+                <a16:creationId xmlns:a16="http://schemas.microsoft.com/office/drawing/2014/main" id="{3A6B441E-E8D4-E360-E3FF-70D2E5F6844D}"/>
+              </a:ext>
+            </a:extLst>
+          </p:cNvPr>
+          <p:cNvSpPr/>
+          <p:nvPr/>
+        </p:nvSpPr>
+        <p:spPr>
+          <a:xfrm>
+            <a:off x="1386329" y="1972216"/>
+            <a:ext cx="748146" cy="887713"/>
+          </a:xfrm>
+          <a:prstGeom prst="ellipse">
+            <a:avLst/>
+          </a:prstGeom>
+        </p:spPr>
+        <p:style>
+          <a:lnRef idx="2">
+            <a:schemeClr val="dk1"/>
+          </a:lnRef>
+          <a:fillRef idx="1">
+            <a:schemeClr val="lt1"/>
+          </a:fillRef>
+          <a:effectRef idx="0">
+            <a:schemeClr val="dk1"/>
+          </a:effectRef>
+          <a:fontRef idx="minor">
+            <a:schemeClr val="dk1"/>
+          </a:fontRef>
+        </p:style>
+        <p:txBody>
+          <a:bodyPr rtlCol="0" anchor="ctr"/>
+          <a:lstStyle/>
+          <a:p>
+            <a:pPr algn="ctr"/>
+            <a:r>
+              <a:rPr lang="zh-TW" altLang="en-US" dirty="0"/>
+              <a:t>使用者</a:t>
+            </a:r>
+          </a:p>
+        </p:txBody>
+      </p:sp>
+      <p:sp>
+        <p:nvSpPr>
+          <p:cNvPr id="15" name="文字方塊 14">
+            <a:extLst>
+              <a:ext uri="{FF2B5EF4-FFF2-40B4-BE49-F238E27FC236}">
+                <a16:creationId xmlns:a16="http://schemas.microsoft.com/office/drawing/2014/main" id="{63936D2B-CFEE-9B24-59B8-90E7BDCD3D85}"/>
+              </a:ext>
+            </a:extLst>
+          </p:cNvPr>
+          <p:cNvSpPr txBox="1"/>
+          <p:nvPr/>
+        </p:nvSpPr>
+        <p:spPr>
+          <a:xfrm>
+            <a:off x="4413389" y="2054403"/>
+            <a:ext cx="3914578" cy="369332"/>
+          </a:xfrm>
+          <a:prstGeom prst="rect">
+            <a:avLst/>
+          </a:prstGeom>
+          <a:noFill/>
+        </p:spPr>
+        <p:txBody>
+          <a:bodyPr wrap="square" rtlCol="0">
+            <a:spAutoFit/>
+          </a:bodyPr>
+          <a:lstStyle/>
+          <a:p>
+            <a:r>
+              <a:rPr lang="en-US" altLang="zh-TW" dirty="0"/>
+              <a:t>Post </a:t>
+            </a:r>
+            <a:r>
+              <a:rPr lang="en-US" altLang="zh-TW" dirty="0">
+                <a:solidFill>
+                  <a:srgbClr val="FF0000"/>
+                </a:solidFill>
+              </a:rPr>
+              <a:t>/verify-register </a:t>
+            </a:r>
+            <a:r>
+              <a:rPr lang="en-US" altLang="zh-TW" dirty="0"/>
+              <a:t>{username}</a:t>
+            </a:r>
+            <a:endParaRPr lang="zh-TW" altLang="en-US" dirty="0"/>
+          </a:p>
+        </p:txBody>
+      </p:sp>
+      <p:cxnSp>
+        <p:nvCxnSpPr>
+          <p:cNvPr id="17" name="直線單箭頭接點 16">
+            <a:extLst>
+              <a:ext uri="{FF2B5EF4-FFF2-40B4-BE49-F238E27FC236}">
+                <a16:creationId xmlns:a16="http://schemas.microsoft.com/office/drawing/2014/main" id="{29EB607A-316C-F61E-CE68-8EABCEE17DE7}"/>
+              </a:ext>
+            </a:extLst>
+          </p:cNvPr>
+          <p:cNvCxnSpPr>
+            <a:cxnSpLocks/>
+          </p:cNvCxnSpPr>
+          <p:nvPr/>
+        </p:nvCxnSpPr>
+        <p:spPr>
+          <a:xfrm>
+            <a:off x="4326371" y="2409207"/>
+            <a:ext cx="3759401" cy="0"/>
+          </a:xfrm>
+          <a:prstGeom prst="straightConnector1">
+            <a:avLst/>
+          </a:prstGeom>
+          <a:ln w="19050" cap="flat" cmpd="sng" algn="ctr">
+            <a:solidFill>
+              <a:schemeClr val="dk1"/>
+            </a:solidFill>
+            <a:prstDash val="solid"/>
+            <a:round/>
+            <a:headEnd type="none" w="med" len="med"/>
+            <a:tailEnd type="arrow" w="med" len="med"/>
+          </a:ln>
+        </p:spPr>
+        <p:style>
+          <a:lnRef idx="0">
+            <a:scrgbClr r="0" g="0" b="0"/>
+          </a:lnRef>
+          <a:fillRef idx="0">
+            <a:scrgbClr r="0" g="0" b="0"/>
+          </a:fillRef>
+          <a:effectRef idx="0">
+            <a:scrgbClr r="0" g="0" b="0"/>
+          </a:effectRef>
+          <a:fontRef idx="minor">
+            <a:schemeClr val="tx1"/>
+          </a:fontRef>
+        </p:style>
+      </p:cxnSp>
+      <p:cxnSp>
+        <p:nvCxnSpPr>
+          <p:cNvPr id="19" name="直線單箭頭接點 18">
+            <a:extLst>
+              <a:ext uri="{FF2B5EF4-FFF2-40B4-BE49-F238E27FC236}">
+                <a16:creationId xmlns:a16="http://schemas.microsoft.com/office/drawing/2014/main" id="{D2A2F7C8-4C2F-2CDC-3154-00F8F9971D2A}"/>
+              </a:ext>
+            </a:extLst>
+          </p:cNvPr>
+          <p:cNvCxnSpPr>
+            <a:cxnSpLocks/>
+          </p:cNvCxnSpPr>
+          <p:nvPr/>
+        </p:nvCxnSpPr>
+        <p:spPr>
+          <a:xfrm flipH="1">
+            <a:off x="4326371" y="3045709"/>
+            <a:ext cx="3759401" cy="0"/>
+          </a:xfrm>
+          <a:prstGeom prst="straightConnector1">
+            <a:avLst/>
+          </a:prstGeom>
+          <a:ln w="19050" cap="flat" cmpd="sng" algn="ctr">
+            <a:solidFill>
+              <a:schemeClr val="dk1"/>
+            </a:solidFill>
+            <a:prstDash val="solid"/>
+            <a:round/>
+            <a:headEnd type="none" w="med" len="med"/>
+            <a:tailEnd type="arrow" w="med" len="med"/>
+          </a:ln>
+        </p:spPr>
+        <p:style>
+          <a:lnRef idx="0">
+            <a:scrgbClr r="0" g="0" b="0"/>
+          </a:lnRef>
+          <a:fillRef idx="0">
+            <a:scrgbClr r="0" g="0" b="0"/>
+          </a:fillRef>
+          <a:effectRef idx="0">
+            <a:scrgbClr r="0" g="0" b="0"/>
+          </a:effectRef>
+          <a:fontRef idx="minor">
+            <a:schemeClr val="tx1"/>
+          </a:fontRef>
+        </p:style>
+      </p:cxnSp>
+      <p:sp>
+        <p:nvSpPr>
+          <p:cNvPr id="22" name="文字方塊 21">
+            <a:extLst>
+              <a:ext uri="{FF2B5EF4-FFF2-40B4-BE49-F238E27FC236}">
+                <a16:creationId xmlns:a16="http://schemas.microsoft.com/office/drawing/2014/main" id="{A5C21DC1-6848-1443-F317-51816D1424CF}"/>
+              </a:ext>
+            </a:extLst>
+          </p:cNvPr>
+          <p:cNvSpPr txBox="1"/>
+          <p:nvPr/>
+        </p:nvSpPr>
+        <p:spPr>
+          <a:xfrm>
+            <a:off x="4399044" y="2669511"/>
+            <a:ext cx="3543253" cy="369332"/>
+          </a:xfrm>
+          <a:prstGeom prst="rect">
+            <a:avLst/>
+          </a:prstGeom>
+          <a:noFill/>
+        </p:spPr>
+        <p:txBody>
+          <a:bodyPr wrap="square" rtlCol="0">
+            <a:spAutoFit/>
+          </a:bodyPr>
+          <a:lstStyle/>
+          <a:p>
+            <a:r>
+              <a:rPr lang="en-US" altLang="zh-TW" dirty="0"/>
+              <a:t>Return {challenge &amp; </a:t>
+            </a:r>
+            <a:r>
+              <a:rPr lang="en-US" altLang="zh-TW" dirty="0" err="1"/>
+              <a:t>WebAuthn</a:t>
+            </a:r>
+            <a:r>
+              <a:rPr lang="en-US" altLang="zh-TW" dirty="0"/>
+              <a:t>}</a:t>
+            </a:r>
+            <a:endParaRPr lang="zh-TW" altLang="en-US" dirty="0"/>
+          </a:p>
+        </p:txBody>
+      </p:sp>
+      <p:cxnSp>
+        <p:nvCxnSpPr>
+          <p:cNvPr id="3" name="直線單箭頭接點 2">
+            <a:extLst>
+              <a:ext uri="{FF2B5EF4-FFF2-40B4-BE49-F238E27FC236}">
+                <a16:creationId xmlns:a16="http://schemas.microsoft.com/office/drawing/2014/main" id="{4ECEE5A6-694F-B9B1-2CD2-E50A2E7599E5}"/>
+              </a:ext>
+            </a:extLst>
+          </p:cNvPr>
+          <p:cNvCxnSpPr>
+            <a:cxnSpLocks/>
+          </p:cNvCxnSpPr>
+          <p:nvPr/>
+        </p:nvCxnSpPr>
+        <p:spPr>
+          <a:xfrm flipH="1">
+            <a:off x="2023780" y="3316162"/>
+            <a:ext cx="1641949" cy="0"/>
+          </a:xfrm>
+          <a:prstGeom prst="straightConnector1">
+            <a:avLst/>
+          </a:prstGeom>
+          <a:ln w="19050" cap="flat" cmpd="sng" algn="ctr">
+            <a:solidFill>
+              <a:schemeClr val="dk1"/>
+            </a:solidFill>
+            <a:prstDash val="solid"/>
+            <a:round/>
+            <a:headEnd type="none" w="med" len="med"/>
+            <a:tailEnd type="arrow" w="med" len="med"/>
+          </a:ln>
+        </p:spPr>
+        <p:style>
+          <a:lnRef idx="0">
+            <a:scrgbClr r="0" g="0" b="0"/>
+          </a:lnRef>
+          <a:fillRef idx="0">
+            <a:scrgbClr r="0" g="0" b="0"/>
+          </a:fillRef>
+          <a:effectRef idx="0">
+            <a:scrgbClr r="0" g="0" b="0"/>
+          </a:effectRef>
+          <a:fontRef idx="minor">
+            <a:schemeClr val="tx1"/>
+          </a:fontRef>
+        </p:style>
+      </p:cxnSp>
+      <p:sp>
+        <p:nvSpPr>
+          <p:cNvPr id="9" name="文字方塊 8">
+            <a:extLst>
+              <a:ext uri="{FF2B5EF4-FFF2-40B4-BE49-F238E27FC236}">
+                <a16:creationId xmlns:a16="http://schemas.microsoft.com/office/drawing/2014/main" id="{B09AD9AF-448E-0BAB-155A-077AB324EBFE}"/>
+              </a:ext>
+            </a:extLst>
+          </p:cNvPr>
+          <p:cNvSpPr txBox="1"/>
+          <p:nvPr/>
+        </p:nvSpPr>
+        <p:spPr>
+          <a:xfrm>
+            <a:off x="2261114" y="2913510"/>
+            <a:ext cx="1284964" cy="369332"/>
+          </a:xfrm>
+          <a:prstGeom prst="rect">
+            <a:avLst/>
+          </a:prstGeom>
+          <a:noFill/>
+        </p:spPr>
+        <p:txBody>
+          <a:bodyPr wrap="square" rtlCol="0">
+            <a:spAutoFit/>
+          </a:bodyPr>
+          <a:lstStyle/>
+          <a:p>
+            <a:r>
+              <a:rPr lang="zh-TW" altLang="en-US" dirty="0"/>
+              <a:t>調用 </a:t>
+            </a:r>
+            <a:r>
+              <a:rPr lang="en-US" altLang="zh-TW" dirty="0"/>
+              <a:t>API</a:t>
+            </a:r>
+            <a:endParaRPr lang="zh-TW" altLang="en-US" dirty="0"/>
+          </a:p>
+        </p:txBody>
+      </p:sp>
+      <p:cxnSp>
+        <p:nvCxnSpPr>
+          <p:cNvPr id="16" name="直線單箭頭接點 15">
+            <a:extLst>
+              <a:ext uri="{FF2B5EF4-FFF2-40B4-BE49-F238E27FC236}">
+                <a16:creationId xmlns:a16="http://schemas.microsoft.com/office/drawing/2014/main" id="{E6B85DB3-E92E-B067-1FB0-735E6A92018D}"/>
+              </a:ext>
+            </a:extLst>
+          </p:cNvPr>
+          <p:cNvCxnSpPr>
+            <a:cxnSpLocks/>
+          </p:cNvCxnSpPr>
+          <p:nvPr/>
+        </p:nvCxnSpPr>
+        <p:spPr>
+          <a:xfrm>
+            <a:off x="2046737" y="3787147"/>
+            <a:ext cx="1658800" cy="0"/>
+          </a:xfrm>
+          <a:prstGeom prst="straightConnector1">
+            <a:avLst/>
+          </a:prstGeom>
+          <a:ln w="19050" cap="flat" cmpd="sng" algn="ctr">
+            <a:solidFill>
+              <a:schemeClr val="dk1"/>
+            </a:solidFill>
+            <a:prstDash val="solid"/>
+            <a:round/>
+            <a:headEnd type="none" w="med" len="med"/>
+            <a:tailEnd type="arrow" w="med" len="med"/>
+          </a:ln>
+        </p:spPr>
+        <p:style>
+          <a:lnRef idx="0">
+            <a:scrgbClr r="0" g="0" b="0"/>
+          </a:lnRef>
+          <a:fillRef idx="0">
+            <a:scrgbClr r="0" g="0" b="0"/>
+          </a:fillRef>
+          <a:effectRef idx="0">
+            <a:scrgbClr r="0" g="0" b="0"/>
+          </a:effectRef>
+          <a:fontRef idx="minor">
+            <a:schemeClr val="tx1"/>
+          </a:fontRef>
+        </p:style>
+      </p:cxnSp>
+      <p:sp>
+        <p:nvSpPr>
+          <p:cNvPr id="18" name="文字方塊 17">
+            <a:extLst>
+              <a:ext uri="{FF2B5EF4-FFF2-40B4-BE49-F238E27FC236}">
+                <a16:creationId xmlns:a16="http://schemas.microsoft.com/office/drawing/2014/main" id="{9D9EB68C-8871-4A17-8133-9B6914273DBF}"/>
+              </a:ext>
+            </a:extLst>
+          </p:cNvPr>
+          <p:cNvSpPr txBox="1"/>
+          <p:nvPr/>
+        </p:nvSpPr>
+        <p:spPr>
+          <a:xfrm>
+            <a:off x="2078182" y="3462056"/>
+            <a:ext cx="1732044" cy="325089"/>
+          </a:xfrm>
+          <a:prstGeom prst="rect">
+            <a:avLst/>
+          </a:prstGeom>
+          <a:noFill/>
+        </p:spPr>
+        <p:txBody>
+          <a:bodyPr wrap="square" rtlCol="0">
+            <a:spAutoFit/>
+          </a:bodyPr>
+          <a:lstStyle/>
+          <a:p>
+            <a:pPr>
+              <a:lnSpc>
+                <a:spcPts val="1650"/>
+              </a:lnSpc>
+            </a:pPr>
+            <a:r>
+              <a:rPr lang="en-US" altLang="zh-TW" b="0" dirty="0">
+                <a:solidFill>
+                  <a:srgbClr val="4FC1FF"/>
+                </a:solidFill>
+                <a:effectLst/>
+                <a:latin typeface="Fira code" pitchFamily="1" charset="0"/>
+              </a:rPr>
+              <a:t>credential</a:t>
+            </a:r>
+            <a:endParaRPr lang="en-US" altLang="zh-TW" b="0" dirty="0">
+              <a:solidFill>
+                <a:srgbClr val="CCCCCC"/>
+              </a:solidFill>
+              <a:effectLst/>
+              <a:latin typeface="Fira code" pitchFamily="1" charset="0"/>
+            </a:endParaRPr>
+          </a:p>
+        </p:txBody>
+      </p:sp>
+      <p:sp>
+        <p:nvSpPr>
+          <p:cNvPr id="23" name="文字方塊 22">
+            <a:extLst>
+              <a:ext uri="{FF2B5EF4-FFF2-40B4-BE49-F238E27FC236}">
+                <a16:creationId xmlns:a16="http://schemas.microsoft.com/office/drawing/2014/main" id="{9861815D-E619-7F1A-9F0E-5F4DC18968B2}"/>
+              </a:ext>
+            </a:extLst>
+          </p:cNvPr>
+          <p:cNvSpPr txBox="1"/>
+          <p:nvPr/>
+        </p:nvSpPr>
+        <p:spPr>
+          <a:xfrm>
+            <a:off x="4413389" y="3641270"/>
+            <a:ext cx="3637081" cy="646331"/>
+          </a:xfrm>
+          <a:prstGeom prst="rect">
+            <a:avLst/>
+          </a:prstGeom>
+          <a:noFill/>
+        </p:spPr>
+        <p:txBody>
+          <a:bodyPr wrap="square" rtlCol="0">
+            <a:spAutoFit/>
+          </a:bodyPr>
+          <a:lstStyle/>
+          <a:p>
+            <a:r>
+              <a:rPr lang="en-US" altLang="zh-TW" dirty="0"/>
+              <a:t>Post </a:t>
+            </a:r>
+            <a:r>
+              <a:rPr lang="en-US" altLang="zh-TW" dirty="0">
+                <a:solidFill>
+                  <a:srgbClr val="FF0000"/>
+                </a:solidFill>
+              </a:rPr>
+              <a:t>/</a:t>
+            </a:r>
+            <a:r>
+              <a:rPr lang="en-US" altLang="zh-TW" b="0" dirty="0">
+                <a:solidFill>
+                  <a:srgbClr val="FF0000"/>
+                </a:solidFill>
+                <a:effectLst/>
+                <a:latin typeface="Fira code" pitchFamily="1" charset="0"/>
+              </a:rPr>
+              <a:t>verify-credential</a:t>
+            </a:r>
+          </a:p>
+          <a:p>
+            <a:endParaRPr lang="zh-TW" altLang="en-US" dirty="0"/>
+          </a:p>
+        </p:txBody>
+      </p:sp>
+      <p:cxnSp>
+        <p:nvCxnSpPr>
+          <p:cNvPr id="24" name="直線單箭頭接點 23">
+            <a:extLst>
+              <a:ext uri="{FF2B5EF4-FFF2-40B4-BE49-F238E27FC236}">
+                <a16:creationId xmlns:a16="http://schemas.microsoft.com/office/drawing/2014/main" id="{9937A7F5-FF55-15A8-0DBA-31B47E3903E2}"/>
+              </a:ext>
+            </a:extLst>
+          </p:cNvPr>
+          <p:cNvCxnSpPr>
+            <a:cxnSpLocks/>
+          </p:cNvCxnSpPr>
+          <p:nvPr/>
+        </p:nvCxnSpPr>
+        <p:spPr>
+          <a:xfrm>
+            <a:off x="4326371" y="4021800"/>
+            <a:ext cx="3759401" cy="0"/>
+          </a:xfrm>
+          <a:prstGeom prst="straightConnector1">
+            <a:avLst/>
+          </a:prstGeom>
+          <a:ln w="19050" cap="flat" cmpd="sng" algn="ctr">
+            <a:solidFill>
+              <a:schemeClr val="dk1"/>
+            </a:solidFill>
+            <a:prstDash val="solid"/>
+            <a:round/>
+            <a:headEnd type="none" w="med" len="med"/>
+            <a:tailEnd type="arrow" w="med" len="med"/>
+          </a:ln>
+        </p:spPr>
+        <p:style>
+          <a:lnRef idx="0">
+            <a:scrgbClr r="0" g="0" b="0"/>
+          </a:lnRef>
+          <a:fillRef idx="0">
+            <a:scrgbClr r="0" g="0" b="0"/>
+          </a:fillRef>
+          <a:effectRef idx="0">
+            <a:scrgbClr r="0" g="0" b="0"/>
+          </a:effectRef>
+          <a:fontRef idx="minor">
+            <a:schemeClr val="tx1"/>
+          </a:fontRef>
+        </p:style>
+      </p:cxnSp>
+      <p:sp>
+        <p:nvSpPr>
+          <p:cNvPr id="29" name="矩形 28">
+            <a:extLst>
+              <a:ext uri="{FF2B5EF4-FFF2-40B4-BE49-F238E27FC236}">
+                <a16:creationId xmlns:a16="http://schemas.microsoft.com/office/drawing/2014/main" id="{A5E5DEEA-DC72-25AE-6F35-14531CF21846}"/>
+              </a:ext>
+            </a:extLst>
+          </p:cNvPr>
+          <p:cNvSpPr/>
+          <p:nvPr/>
+        </p:nvSpPr>
+        <p:spPr>
+          <a:xfrm>
+            <a:off x="8622176" y="2416073"/>
+            <a:ext cx="2145254" cy="629636"/>
+          </a:xfrm>
+          <a:prstGeom prst="rect">
+            <a:avLst/>
+          </a:prstGeom>
+        </p:spPr>
+        <p:style>
+          <a:lnRef idx="2">
+            <a:schemeClr val="accent6"/>
+          </a:lnRef>
+          <a:fillRef idx="1">
+            <a:schemeClr val="lt1"/>
+          </a:fillRef>
+          <a:effectRef idx="0">
+            <a:schemeClr val="accent6"/>
+          </a:effectRef>
+          <a:fontRef idx="minor">
+            <a:schemeClr val="dk1"/>
+          </a:fontRef>
+        </p:style>
+        <p:txBody>
+          <a:bodyPr rtlCol="0" anchor="ctr"/>
+          <a:lstStyle/>
+          <a:p>
+            <a:pPr algn="ctr"/>
+            <a:r>
+              <a:rPr lang="zh-TW" altLang="en-US" dirty="0"/>
+              <a:t>判斷有無使用者</a:t>
+            </a:r>
+          </a:p>
+        </p:txBody>
+      </p:sp>
+    </p:spTree>
+    <p:extLst>
+      <p:ext uri="{BB962C8B-B14F-4D97-AF65-F5344CB8AC3E}">
+        <p14:creationId xmlns:p14="http://schemas.microsoft.com/office/powerpoint/2010/main" val="2574165772"/>
+      </p:ext>
+    </p:extLst>
+  </p:cSld>
+  <p:clrMapOvr>
+    <a:masterClrMapping/>
+  </p:clrMapOvr>
+</p:sld>
+</file>
+
+<file path=ppt/slides/slide13.xml><?xml version="1.0" encoding="utf-8"?>
+<p:sld xmlns:a="http://schemas.openxmlformats.org/drawingml/2006/main" xmlns:r="http://schemas.openxmlformats.org/officeDocument/2006/relationships" xmlns:p="http://schemas.openxmlformats.org/presentationml/2006/main">
+  <p:cSld>
+    <p:spTree>
+      <p:nvGrpSpPr>
+        <p:cNvPr id="1" name=""/>
+        <p:cNvGrpSpPr/>
+        <p:nvPr/>
+      </p:nvGrpSpPr>
+      <p:grpSpPr>
+        <a:xfrm>
+          <a:off x="0" y="0"/>
+          <a:ext cx="0" cy="0"/>
+          <a:chOff x="0" y="0"/>
+          <a:chExt cx="0" cy="0"/>
+        </a:xfrm>
+      </p:grpSpPr>
+      <p:sp>
+        <p:nvSpPr>
+          <p:cNvPr id="2" name="標題 1">
+            <a:extLst>
+              <a:ext uri="{FF2B5EF4-FFF2-40B4-BE49-F238E27FC236}">
+                <a16:creationId xmlns:a16="http://schemas.microsoft.com/office/drawing/2014/main" id="{DA93D216-982B-81FF-80B8-E8D993811653}"/>
+              </a:ext>
+            </a:extLst>
+          </p:cNvPr>
+          <p:cNvSpPr>
+            <a:spLocks noGrp="1"/>
+          </p:cNvSpPr>
+          <p:nvPr>
+            <p:ph type="title"/>
+          </p:nvPr>
+        </p:nvSpPr>
+        <p:spPr>
+          <a:xfrm>
+            <a:off x="565150" y="770890"/>
+            <a:ext cx="10240521" cy="1268984"/>
+          </a:xfrm>
+        </p:spPr>
+        <p:txBody>
+          <a:bodyPr>
+            <a:normAutofit fontScale="90000"/>
+          </a:bodyPr>
+          <a:lstStyle/>
+          <a:p>
+            <a:r>
+              <a:rPr lang="zh-TW" altLang="en-US" dirty="0"/>
+              <a:t>網頁驗證流程 </a:t>
+            </a:r>
+            <a:r>
+              <a:rPr lang="en-US" altLang="zh-TW" dirty="0"/>
+              <a:t>–</a:t>
+            </a:r>
+            <a:r>
+              <a:rPr lang="zh-TW" altLang="en-US" dirty="0"/>
+              <a:t> 登入</a:t>
+            </a:r>
+            <a:r>
+              <a:rPr lang="en-US" altLang="zh-TW" b="0" dirty="0">
+                <a:solidFill>
+                  <a:srgbClr val="CE9178"/>
+                </a:solidFill>
+                <a:effectLst/>
+                <a:latin typeface="Fira code" pitchFamily="1" charset="0"/>
+              </a:rPr>
+              <a:t>/verify-credential</a:t>
+            </a:r>
+            <a:endParaRPr lang="zh-TW" altLang="en-US" dirty="0"/>
+          </a:p>
+        </p:txBody>
+      </p:sp>
+      <p:sp>
+        <p:nvSpPr>
+          <p:cNvPr id="6" name="矩形 5">
+            <a:extLst>
+              <a:ext uri="{FF2B5EF4-FFF2-40B4-BE49-F238E27FC236}">
+                <a16:creationId xmlns:a16="http://schemas.microsoft.com/office/drawing/2014/main" id="{F74207E8-3458-1C88-03EB-F43ABC311208}"/>
+              </a:ext>
+            </a:extLst>
+          </p:cNvPr>
+          <p:cNvSpPr/>
+          <p:nvPr/>
+        </p:nvSpPr>
+        <p:spPr>
+          <a:xfrm>
+            <a:off x="1596655" y="3045709"/>
+            <a:ext cx="340011" cy="1191123"/>
+          </a:xfrm>
+          <a:prstGeom prst="rect">
+            <a:avLst/>
+          </a:prstGeom>
+        </p:spPr>
+        <p:style>
+          <a:lnRef idx="2">
+            <a:schemeClr val="dk1"/>
+          </a:lnRef>
+          <a:fillRef idx="1">
+            <a:schemeClr val="lt1"/>
+          </a:fillRef>
+          <a:effectRef idx="0">
+            <a:schemeClr val="dk1"/>
+          </a:effectRef>
+          <a:fontRef idx="minor">
+            <a:schemeClr val="dk1"/>
+          </a:fontRef>
+        </p:style>
+        <p:txBody>
+          <a:bodyPr rtlCol="0" anchor="ctr"/>
+          <a:lstStyle/>
+          <a:p>
+            <a:pPr algn="ctr"/>
+            <a:r>
+              <a:rPr lang="zh-TW" altLang="en-US" dirty="0"/>
+              <a:t>瀏覽器</a:t>
+            </a:r>
+          </a:p>
+        </p:txBody>
+      </p:sp>
+      <p:sp>
+        <p:nvSpPr>
+          <p:cNvPr id="7" name="矩形 6">
+            <a:extLst>
+              <a:ext uri="{FF2B5EF4-FFF2-40B4-BE49-F238E27FC236}">
+                <a16:creationId xmlns:a16="http://schemas.microsoft.com/office/drawing/2014/main" id="{8227CAC6-BD1F-CFBF-C549-82BC31837819}"/>
+              </a:ext>
+            </a:extLst>
+          </p:cNvPr>
+          <p:cNvSpPr/>
+          <p:nvPr/>
+        </p:nvSpPr>
+        <p:spPr>
+          <a:xfrm>
+            <a:off x="3766219" y="1965350"/>
+            <a:ext cx="340011" cy="2701625"/>
+          </a:xfrm>
+          <a:prstGeom prst="rect">
+            <a:avLst/>
+          </a:prstGeom>
+        </p:spPr>
+        <p:style>
+          <a:lnRef idx="2">
+            <a:schemeClr val="dk1"/>
+          </a:lnRef>
+          <a:fillRef idx="1">
+            <a:schemeClr val="lt1"/>
+          </a:fillRef>
+          <a:effectRef idx="0">
+            <a:schemeClr val="dk1"/>
+          </a:effectRef>
+          <a:fontRef idx="minor">
+            <a:schemeClr val="dk1"/>
+          </a:fontRef>
+        </p:style>
+        <p:txBody>
+          <a:bodyPr rtlCol="0" anchor="ctr"/>
+          <a:lstStyle/>
+          <a:p>
+            <a:pPr algn="ctr"/>
+            <a:r>
+              <a:rPr lang="zh-TW" altLang="en-US" dirty="0"/>
+              <a:t>前端</a:t>
+            </a:r>
+          </a:p>
+        </p:txBody>
+      </p:sp>
+      <p:sp>
+        <p:nvSpPr>
+          <p:cNvPr id="8" name="矩形 7">
+            <a:extLst>
+              <a:ext uri="{FF2B5EF4-FFF2-40B4-BE49-F238E27FC236}">
+                <a16:creationId xmlns:a16="http://schemas.microsoft.com/office/drawing/2014/main" id="{56AF1438-E8A1-25D1-F4BA-0D6DAF74CEF9}"/>
+              </a:ext>
+            </a:extLst>
+          </p:cNvPr>
+          <p:cNvSpPr/>
+          <p:nvPr/>
+        </p:nvSpPr>
+        <p:spPr>
+          <a:xfrm>
+            <a:off x="8282164" y="1965350"/>
+            <a:ext cx="340012" cy="2701636"/>
+          </a:xfrm>
+          <a:prstGeom prst="rect">
+            <a:avLst/>
+          </a:prstGeom>
+        </p:spPr>
+        <p:style>
+          <a:lnRef idx="2">
+            <a:schemeClr val="dk1"/>
+          </a:lnRef>
+          <a:fillRef idx="1">
+            <a:schemeClr val="lt1"/>
+          </a:fillRef>
+          <a:effectRef idx="0">
+            <a:schemeClr val="dk1"/>
+          </a:effectRef>
+          <a:fontRef idx="minor">
+            <a:schemeClr val="dk1"/>
+          </a:fontRef>
+        </p:style>
+        <p:txBody>
+          <a:bodyPr rtlCol="0" anchor="ctr"/>
+          <a:lstStyle/>
+          <a:p>
+            <a:pPr algn="ctr"/>
+            <a:r>
+              <a:rPr lang="zh-TW" altLang="en-US" dirty="0"/>
+              <a:t>後端</a:t>
+            </a:r>
+          </a:p>
+        </p:txBody>
+      </p:sp>
+      <p:cxnSp>
+        <p:nvCxnSpPr>
+          <p:cNvPr id="11" name="直線單箭頭接點 10">
+            <a:extLst>
+              <a:ext uri="{FF2B5EF4-FFF2-40B4-BE49-F238E27FC236}">
+                <a16:creationId xmlns:a16="http://schemas.microsoft.com/office/drawing/2014/main" id="{897F46BA-70CA-0F4A-EBD9-D4EFDB962C04}"/>
+              </a:ext>
+            </a:extLst>
+          </p:cNvPr>
+          <p:cNvCxnSpPr>
+            <a:cxnSpLocks/>
+          </p:cNvCxnSpPr>
+          <p:nvPr/>
+        </p:nvCxnSpPr>
+        <p:spPr>
+          <a:xfrm>
+            <a:off x="2342382" y="2409206"/>
+            <a:ext cx="1323347" cy="1"/>
+          </a:xfrm>
+          <a:prstGeom prst="straightConnector1">
+            <a:avLst/>
+          </a:prstGeom>
+          <a:ln w="19050" cap="flat" cmpd="sng" algn="ctr">
+            <a:solidFill>
+              <a:schemeClr val="dk1"/>
+            </a:solidFill>
+            <a:prstDash val="solid"/>
+            <a:round/>
+            <a:headEnd type="none" w="med" len="med"/>
+            <a:tailEnd type="arrow" w="med" len="med"/>
+          </a:ln>
+        </p:spPr>
+        <p:style>
+          <a:lnRef idx="0">
+            <a:scrgbClr r="0" g="0" b="0"/>
+          </a:lnRef>
+          <a:fillRef idx="0">
+            <a:scrgbClr r="0" g="0" b="0"/>
+          </a:fillRef>
+          <a:effectRef idx="0">
+            <a:scrgbClr r="0" g="0" b="0"/>
+          </a:effectRef>
+          <a:fontRef idx="minor">
+            <a:schemeClr val="tx1"/>
+          </a:fontRef>
+        </p:style>
+      </p:cxnSp>
+      <p:sp>
+        <p:nvSpPr>
+          <p:cNvPr id="13" name="文字方塊 12">
+            <a:extLst>
+              <a:ext uri="{FF2B5EF4-FFF2-40B4-BE49-F238E27FC236}">
+                <a16:creationId xmlns:a16="http://schemas.microsoft.com/office/drawing/2014/main" id="{70ED5A8E-1E7B-7555-6B38-81FB669E4B71}"/>
+              </a:ext>
+            </a:extLst>
+          </p:cNvPr>
+          <p:cNvSpPr txBox="1"/>
+          <p:nvPr/>
+        </p:nvSpPr>
+        <p:spPr>
+          <a:xfrm>
+            <a:off x="2317001" y="2039874"/>
+            <a:ext cx="1284964" cy="369332"/>
+          </a:xfrm>
+          <a:prstGeom prst="rect">
+            <a:avLst/>
+          </a:prstGeom>
+          <a:noFill/>
+        </p:spPr>
+        <p:txBody>
+          <a:bodyPr wrap="square" rtlCol="0">
+            <a:spAutoFit/>
+          </a:bodyPr>
+          <a:lstStyle/>
+          <a:p>
+            <a:r>
+              <a:rPr lang="en-US" altLang="zh-TW" dirty="0"/>
+              <a:t>username</a:t>
+            </a:r>
+            <a:endParaRPr lang="zh-TW" altLang="en-US" dirty="0"/>
+          </a:p>
+        </p:txBody>
+      </p:sp>
+      <p:sp>
+        <p:nvSpPr>
+          <p:cNvPr id="14" name="橢圓 13">
+            <a:extLst>
+              <a:ext uri="{FF2B5EF4-FFF2-40B4-BE49-F238E27FC236}">
+                <a16:creationId xmlns:a16="http://schemas.microsoft.com/office/drawing/2014/main" id="{3A6B441E-E8D4-E360-E3FF-70D2E5F6844D}"/>
+              </a:ext>
+            </a:extLst>
+          </p:cNvPr>
+          <p:cNvSpPr/>
+          <p:nvPr/>
+        </p:nvSpPr>
+        <p:spPr>
+          <a:xfrm>
+            <a:off x="1386329" y="1972216"/>
+            <a:ext cx="748146" cy="887713"/>
+          </a:xfrm>
+          <a:prstGeom prst="ellipse">
+            <a:avLst/>
+          </a:prstGeom>
+        </p:spPr>
+        <p:style>
+          <a:lnRef idx="2">
+            <a:schemeClr val="dk1"/>
+          </a:lnRef>
+          <a:fillRef idx="1">
+            <a:schemeClr val="lt1"/>
+          </a:fillRef>
+          <a:effectRef idx="0">
+            <a:schemeClr val="dk1"/>
+          </a:effectRef>
+          <a:fontRef idx="minor">
+            <a:schemeClr val="dk1"/>
+          </a:fontRef>
+        </p:style>
+        <p:txBody>
+          <a:bodyPr rtlCol="0" anchor="ctr"/>
+          <a:lstStyle/>
+          <a:p>
+            <a:pPr algn="ctr"/>
+            <a:r>
+              <a:rPr lang="zh-TW" altLang="en-US" dirty="0"/>
+              <a:t>使用者</a:t>
+            </a:r>
+          </a:p>
+        </p:txBody>
+      </p:sp>
+      <p:sp>
+        <p:nvSpPr>
+          <p:cNvPr id="15" name="文字方塊 14">
+            <a:extLst>
+              <a:ext uri="{FF2B5EF4-FFF2-40B4-BE49-F238E27FC236}">
+                <a16:creationId xmlns:a16="http://schemas.microsoft.com/office/drawing/2014/main" id="{63936D2B-CFEE-9B24-59B8-90E7BDCD3D85}"/>
+              </a:ext>
+            </a:extLst>
+          </p:cNvPr>
+          <p:cNvSpPr txBox="1"/>
+          <p:nvPr/>
+        </p:nvSpPr>
+        <p:spPr>
+          <a:xfrm>
+            <a:off x="4413389" y="2054403"/>
+            <a:ext cx="3914578" cy="369332"/>
+          </a:xfrm>
+          <a:prstGeom prst="rect">
+            <a:avLst/>
+          </a:prstGeom>
+          <a:noFill/>
+        </p:spPr>
+        <p:txBody>
+          <a:bodyPr wrap="square" rtlCol="0">
+            <a:spAutoFit/>
+          </a:bodyPr>
+          <a:lstStyle/>
+          <a:p>
+            <a:r>
+              <a:rPr lang="en-US" altLang="zh-TW" dirty="0"/>
+              <a:t>Post </a:t>
+            </a:r>
+            <a:r>
+              <a:rPr lang="en-US" altLang="zh-TW" dirty="0">
+                <a:solidFill>
+                  <a:srgbClr val="FF0000"/>
+                </a:solidFill>
+              </a:rPr>
+              <a:t>/verify-register </a:t>
+            </a:r>
+            <a:r>
+              <a:rPr lang="en-US" altLang="zh-TW" dirty="0"/>
+              <a:t>{username}</a:t>
+            </a:r>
+            <a:endParaRPr lang="zh-TW" altLang="en-US" dirty="0"/>
+          </a:p>
+        </p:txBody>
+      </p:sp>
+      <p:cxnSp>
+        <p:nvCxnSpPr>
+          <p:cNvPr id="17" name="直線單箭頭接點 16">
+            <a:extLst>
+              <a:ext uri="{FF2B5EF4-FFF2-40B4-BE49-F238E27FC236}">
+                <a16:creationId xmlns:a16="http://schemas.microsoft.com/office/drawing/2014/main" id="{29EB607A-316C-F61E-CE68-8EABCEE17DE7}"/>
+              </a:ext>
+            </a:extLst>
+          </p:cNvPr>
+          <p:cNvCxnSpPr>
+            <a:cxnSpLocks/>
+          </p:cNvCxnSpPr>
+          <p:nvPr/>
+        </p:nvCxnSpPr>
+        <p:spPr>
+          <a:xfrm>
+            <a:off x="4326371" y="2409207"/>
+            <a:ext cx="3759401" cy="0"/>
+          </a:xfrm>
+          <a:prstGeom prst="straightConnector1">
+            <a:avLst/>
+          </a:prstGeom>
+          <a:ln w="19050" cap="flat" cmpd="sng" algn="ctr">
+            <a:solidFill>
+              <a:schemeClr val="dk1"/>
+            </a:solidFill>
+            <a:prstDash val="solid"/>
+            <a:round/>
+            <a:headEnd type="none" w="med" len="med"/>
+            <a:tailEnd type="arrow" w="med" len="med"/>
+          </a:ln>
+        </p:spPr>
+        <p:style>
+          <a:lnRef idx="0">
+            <a:scrgbClr r="0" g="0" b="0"/>
+          </a:lnRef>
+          <a:fillRef idx="0">
+            <a:scrgbClr r="0" g="0" b="0"/>
+          </a:fillRef>
+          <a:effectRef idx="0">
+            <a:scrgbClr r="0" g="0" b="0"/>
+          </a:effectRef>
+          <a:fontRef idx="minor">
+            <a:schemeClr val="tx1"/>
+          </a:fontRef>
+        </p:style>
+      </p:cxnSp>
+      <p:cxnSp>
+        <p:nvCxnSpPr>
+          <p:cNvPr id="19" name="直線單箭頭接點 18">
+            <a:extLst>
+              <a:ext uri="{FF2B5EF4-FFF2-40B4-BE49-F238E27FC236}">
+                <a16:creationId xmlns:a16="http://schemas.microsoft.com/office/drawing/2014/main" id="{D2A2F7C8-4C2F-2CDC-3154-00F8F9971D2A}"/>
+              </a:ext>
+            </a:extLst>
+          </p:cNvPr>
+          <p:cNvCxnSpPr>
+            <a:cxnSpLocks/>
+          </p:cNvCxnSpPr>
+          <p:nvPr/>
+        </p:nvCxnSpPr>
+        <p:spPr>
+          <a:xfrm flipH="1">
+            <a:off x="4326371" y="3045709"/>
+            <a:ext cx="3759401" cy="0"/>
+          </a:xfrm>
+          <a:prstGeom prst="straightConnector1">
+            <a:avLst/>
+          </a:prstGeom>
+          <a:ln w="19050" cap="flat" cmpd="sng" algn="ctr">
+            <a:solidFill>
+              <a:schemeClr val="dk1"/>
+            </a:solidFill>
+            <a:prstDash val="solid"/>
+            <a:round/>
+            <a:headEnd type="none" w="med" len="med"/>
+            <a:tailEnd type="arrow" w="med" len="med"/>
+          </a:ln>
+        </p:spPr>
+        <p:style>
+          <a:lnRef idx="0">
+            <a:scrgbClr r="0" g="0" b="0"/>
+          </a:lnRef>
+          <a:fillRef idx="0">
+            <a:scrgbClr r="0" g="0" b="0"/>
+          </a:fillRef>
+          <a:effectRef idx="0">
+            <a:scrgbClr r="0" g="0" b="0"/>
+          </a:effectRef>
+          <a:fontRef idx="minor">
+            <a:schemeClr val="tx1"/>
+          </a:fontRef>
+        </p:style>
+      </p:cxnSp>
+      <p:sp>
+        <p:nvSpPr>
+          <p:cNvPr id="22" name="文字方塊 21">
+            <a:extLst>
+              <a:ext uri="{FF2B5EF4-FFF2-40B4-BE49-F238E27FC236}">
+                <a16:creationId xmlns:a16="http://schemas.microsoft.com/office/drawing/2014/main" id="{A5C21DC1-6848-1443-F317-51816D1424CF}"/>
+              </a:ext>
+            </a:extLst>
+          </p:cNvPr>
+          <p:cNvSpPr txBox="1"/>
+          <p:nvPr/>
+        </p:nvSpPr>
+        <p:spPr>
+          <a:xfrm>
+            <a:off x="4399044" y="2669511"/>
+            <a:ext cx="3543253" cy="369332"/>
+          </a:xfrm>
+          <a:prstGeom prst="rect">
+            <a:avLst/>
+          </a:prstGeom>
+          <a:noFill/>
+        </p:spPr>
+        <p:txBody>
+          <a:bodyPr wrap="square" rtlCol="0">
+            <a:spAutoFit/>
+          </a:bodyPr>
+          <a:lstStyle/>
+          <a:p>
+            <a:r>
+              <a:rPr lang="en-US" altLang="zh-TW" dirty="0"/>
+              <a:t>Return {challenge &amp; </a:t>
+            </a:r>
+            <a:r>
+              <a:rPr lang="en-US" altLang="zh-TW" dirty="0" err="1"/>
+              <a:t>WebAuthn</a:t>
+            </a:r>
+            <a:r>
+              <a:rPr lang="en-US" altLang="zh-TW" dirty="0"/>
+              <a:t>}</a:t>
+            </a:r>
+            <a:endParaRPr lang="zh-TW" altLang="en-US" dirty="0"/>
+          </a:p>
+        </p:txBody>
+      </p:sp>
+      <p:cxnSp>
+        <p:nvCxnSpPr>
+          <p:cNvPr id="3" name="直線單箭頭接點 2">
+            <a:extLst>
+              <a:ext uri="{FF2B5EF4-FFF2-40B4-BE49-F238E27FC236}">
+                <a16:creationId xmlns:a16="http://schemas.microsoft.com/office/drawing/2014/main" id="{4ECEE5A6-694F-B9B1-2CD2-E50A2E7599E5}"/>
+              </a:ext>
+            </a:extLst>
+          </p:cNvPr>
+          <p:cNvCxnSpPr>
+            <a:cxnSpLocks/>
+          </p:cNvCxnSpPr>
+          <p:nvPr/>
+        </p:nvCxnSpPr>
+        <p:spPr>
+          <a:xfrm flipH="1">
+            <a:off x="2023780" y="3316162"/>
+            <a:ext cx="1641949" cy="0"/>
+          </a:xfrm>
+          <a:prstGeom prst="straightConnector1">
+            <a:avLst/>
+          </a:prstGeom>
+          <a:ln w="19050" cap="flat" cmpd="sng" algn="ctr">
+            <a:solidFill>
+              <a:schemeClr val="dk1"/>
+            </a:solidFill>
+            <a:prstDash val="solid"/>
+            <a:round/>
+            <a:headEnd type="none" w="med" len="med"/>
+            <a:tailEnd type="arrow" w="med" len="med"/>
+          </a:ln>
+        </p:spPr>
+        <p:style>
+          <a:lnRef idx="0">
+            <a:scrgbClr r="0" g="0" b="0"/>
+          </a:lnRef>
+          <a:fillRef idx="0">
+            <a:scrgbClr r="0" g="0" b="0"/>
+          </a:fillRef>
+          <a:effectRef idx="0">
+            <a:scrgbClr r="0" g="0" b="0"/>
+          </a:effectRef>
+          <a:fontRef idx="minor">
+            <a:schemeClr val="tx1"/>
+          </a:fontRef>
+        </p:style>
+      </p:cxnSp>
+      <p:sp>
+        <p:nvSpPr>
+          <p:cNvPr id="9" name="文字方塊 8">
+            <a:extLst>
+              <a:ext uri="{FF2B5EF4-FFF2-40B4-BE49-F238E27FC236}">
+                <a16:creationId xmlns:a16="http://schemas.microsoft.com/office/drawing/2014/main" id="{B09AD9AF-448E-0BAB-155A-077AB324EBFE}"/>
+              </a:ext>
+            </a:extLst>
+          </p:cNvPr>
+          <p:cNvSpPr txBox="1"/>
+          <p:nvPr/>
+        </p:nvSpPr>
+        <p:spPr>
+          <a:xfrm>
+            <a:off x="2261114" y="2913510"/>
+            <a:ext cx="1284964" cy="369332"/>
+          </a:xfrm>
+          <a:prstGeom prst="rect">
+            <a:avLst/>
+          </a:prstGeom>
+          <a:noFill/>
+        </p:spPr>
+        <p:txBody>
+          <a:bodyPr wrap="square" rtlCol="0">
+            <a:spAutoFit/>
+          </a:bodyPr>
+          <a:lstStyle/>
+          <a:p>
+            <a:r>
+              <a:rPr lang="zh-TW" altLang="en-US" dirty="0"/>
+              <a:t>調用 </a:t>
+            </a:r>
+            <a:r>
+              <a:rPr lang="en-US" altLang="zh-TW" dirty="0"/>
+              <a:t>API</a:t>
+            </a:r>
+            <a:endParaRPr lang="zh-TW" altLang="en-US" dirty="0"/>
+          </a:p>
+        </p:txBody>
+      </p:sp>
+      <p:cxnSp>
+        <p:nvCxnSpPr>
+          <p:cNvPr id="16" name="直線單箭頭接點 15">
+            <a:extLst>
+              <a:ext uri="{FF2B5EF4-FFF2-40B4-BE49-F238E27FC236}">
+                <a16:creationId xmlns:a16="http://schemas.microsoft.com/office/drawing/2014/main" id="{E6B85DB3-E92E-B067-1FB0-735E6A92018D}"/>
+              </a:ext>
+            </a:extLst>
+          </p:cNvPr>
+          <p:cNvCxnSpPr>
+            <a:cxnSpLocks/>
+          </p:cNvCxnSpPr>
+          <p:nvPr/>
+        </p:nvCxnSpPr>
+        <p:spPr>
+          <a:xfrm>
+            <a:off x="2046737" y="3787147"/>
+            <a:ext cx="1658800" cy="0"/>
+          </a:xfrm>
+          <a:prstGeom prst="straightConnector1">
+            <a:avLst/>
+          </a:prstGeom>
+          <a:ln w="19050" cap="flat" cmpd="sng" algn="ctr">
+            <a:solidFill>
+              <a:schemeClr val="dk1"/>
+            </a:solidFill>
+            <a:prstDash val="solid"/>
+            <a:round/>
+            <a:headEnd type="none" w="med" len="med"/>
+            <a:tailEnd type="arrow" w="med" len="med"/>
+          </a:ln>
+        </p:spPr>
+        <p:style>
+          <a:lnRef idx="0">
+            <a:scrgbClr r="0" g="0" b="0"/>
+          </a:lnRef>
+          <a:fillRef idx="0">
+            <a:scrgbClr r="0" g="0" b="0"/>
+          </a:fillRef>
+          <a:effectRef idx="0">
+            <a:scrgbClr r="0" g="0" b="0"/>
+          </a:effectRef>
+          <a:fontRef idx="minor">
+            <a:schemeClr val="tx1"/>
+          </a:fontRef>
+        </p:style>
+      </p:cxnSp>
+      <p:sp>
+        <p:nvSpPr>
+          <p:cNvPr id="18" name="文字方塊 17">
+            <a:extLst>
+              <a:ext uri="{FF2B5EF4-FFF2-40B4-BE49-F238E27FC236}">
+                <a16:creationId xmlns:a16="http://schemas.microsoft.com/office/drawing/2014/main" id="{9D9EB68C-8871-4A17-8133-9B6914273DBF}"/>
+              </a:ext>
+            </a:extLst>
+          </p:cNvPr>
+          <p:cNvSpPr txBox="1"/>
+          <p:nvPr/>
+        </p:nvSpPr>
+        <p:spPr>
+          <a:xfrm>
+            <a:off x="2078182" y="3462056"/>
+            <a:ext cx="1732044" cy="325089"/>
+          </a:xfrm>
+          <a:prstGeom prst="rect">
+            <a:avLst/>
+          </a:prstGeom>
+          <a:noFill/>
+        </p:spPr>
+        <p:txBody>
+          <a:bodyPr wrap="square" rtlCol="0">
+            <a:spAutoFit/>
+          </a:bodyPr>
+          <a:lstStyle/>
+          <a:p>
+            <a:pPr>
+              <a:lnSpc>
+                <a:spcPts val="1650"/>
+              </a:lnSpc>
+            </a:pPr>
+            <a:r>
+              <a:rPr lang="en-US" altLang="zh-TW" b="0" dirty="0">
+                <a:solidFill>
+                  <a:srgbClr val="4FC1FF"/>
+                </a:solidFill>
+                <a:effectLst/>
+                <a:latin typeface="Fira code" pitchFamily="1" charset="0"/>
+              </a:rPr>
+              <a:t>credential</a:t>
+            </a:r>
+            <a:endParaRPr lang="en-US" altLang="zh-TW" b="0" dirty="0">
+              <a:solidFill>
+                <a:srgbClr val="CCCCCC"/>
+              </a:solidFill>
+              <a:effectLst/>
+              <a:latin typeface="Fira code" pitchFamily="1" charset="0"/>
+            </a:endParaRPr>
+          </a:p>
+        </p:txBody>
+      </p:sp>
+      <p:sp>
+        <p:nvSpPr>
+          <p:cNvPr id="23" name="文字方塊 22">
+            <a:extLst>
+              <a:ext uri="{FF2B5EF4-FFF2-40B4-BE49-F238E27FC236}">
+                <a16:creationId xmlns:a16="http://schemas.microsoft.com/office/drawing/2014/main" id="{9861815D-E619-7F1A-9F0E-5F4DC18968B2}"/>
+              </a:ext>
+            </a:extLst>
+          </p:cNvPr>
+          <p:cNvSpPr txBox="1"/>
+          <p:nvPr/>
+        </p:nvSpPr>
+        <p:spPr>
+          <a:xfrm>
+            <a:off x="4413389" y="3641270"/>
+            <a:ext cx="3637081" cy="646331"/>
+          </a:xfrm>
+          <a:prstGeom prst="rect">
+            <a:avLst/>
+          </a:prstGeom>
+          <a:noFill/>
+        </p:spPr>
+        <p:txBody>
+          <a:bodyPr wrap="square" rtlCol="0">
+            <a:spAutoFit/>
+          </a:bodyPr>
+          <a:lstStyle/>
+          <a:p>
+            <a:r>
+              <a:rPr lang="en-US" altLang="zh-TW" dirty="0"/>
+              <a:t>Post </a:t>
+            </a:r>
+            <a:r>
+              <a:rPr lang="en-US" altLang="zh-TW" dirty="0">
+                <a:solidFill>
+                  <a:srgbClr val="FF0000"/>
+                </a:solidFill>
+              </a:rPr>
+              <a:t>/</a:t>
+            </a:r>
+            <a:r>
+              <a:rPr lang="en-US" altLang="zh-TW" b="0" dirty="0">
+                <a:solidFill>
+                  <a:srgbClr val="FF0000"/>
+                </a:solidFill>
+                <a:effectLst/>
+                <a:latin typeface="Fira code" pitchFamily="1" charset="0"/>
+              </a:rPr>
+              <a:t>verify-credential</a:t>
+            </a:r>
+          </a:p>
+          <a:p>
+            <a:endParaRPr lang="zh-TW" altLang="en-US" dirty="0"/>
+          </a:p>
+        </p:txBody>
+      </p:sp>
+      <p:cxnSp>
+        <p:nvCxnSpPr>
+          <p:cNvPr id="24" name="直線單箭頭接點 23">
+            <a:extLst>
+              <a:ext uri="{FF2B5EF4-FFF2-40B4-BE49-F238E27FC236}">
+                <a16:creationId xmlns:a16="http://schemas.microsoft.com/office/drawing/2014/main" id="{9937A7F5-FF55-15A8-0DBA-31B47E3903E2}"/>
+              </a:ext>
+            </a:extLst>
+          </p:cNvPr>
+          <p:cNvCxnSpPr>
+            <a:cxnSpLocks/>
+          </p:cNvCxnSpPr>
+          <p:nvPr/>
+        </p:nvCxnSpPr>
+        <p:spPr>
+          <a:xfrm>
+            <a:off x="4326371" y="4021800"/>
+            <a:ext cx="3759401" cy="0"/>
+          </a:xfrm>
+          <a:prstGeom prst="straightConnector1">
+            <a:avLst/>
+          </a:prstGeom>
+          <a:ln w="19050" cap="flat" cmpd="sng" algn="ctr">
+            <a:solidFill>
+              <a:schemeClr val="dk1"/>
+            </a:solidFill>
+            <a:prstDash val="solid"/>
+            <a:round/>
+            <a:headEnd type="none" w="med" len="med"/>
+            <a:tailEnd type="arrow" w="med" len="med"/>
+          </a:ln>
+        </p:spPr>
+        <p:style>
+          <a:lnRef idx="0">
+            <a:scrgbClr r="0" g="0" b="0"/>
+          </a:lnRef>
+          <a:fillRef idx="0">
+            <a:scrgbClr r="0" g="0" b="0"/>
+          </a:fillRef>
+          <a:effectRef idx="0">
+            <a:scrgbClr r="0" g="0" b="0"/>
+          </a:effectRef>
+          <a:fontRef idx="minor">
+            <a:schemeClr val="tx1"/>
+          </a:fontRef>
+        </p:style>
+      </p:cxnSp>
+      <p:sp>
+        <p:nvSpPr>
+          <p:cNvPr id="29" name="矩形 28">
+            <a:extLst>
+              <a:ext uri="{FF2B5EF4-FFF2-40B4-BE49-F238E27FC236}">
+                <a16:creationId xmlns:a16="http://schemas.microsoft.com/office/drawing/2014/main" id="{A5E5DEEA-DC72-25AE-6F35-14531CF21846}"/>
+              </a:ext>
+            </a:extLst>
+          </p:cNvPr>
+          <p:cNvSpPr/>
+          <p:nvPr/>
+        </p:nvSpPr>
+        <p:spPr>
+          <a:xfrm>
+            <a:off x="8622176" y="2416073"/>
+            <a:ext cx="2145254" cy="629636"/>
+          </a:xfrm>
+          <a:prstGeom prst="rect">
+            <a:avLst/>
+          </a:prstGeom>
+        </p:spPr>
+        <p:style>
+          <a:lnRef idx="2">
+            <a:schemeClr val="accent6"/>
+          </a:lnRef>
+          <a:fillRef idx="1">
+            <a:schemeClr val="lt1"/>
+          </a:fillRef>
+          <a:effectRef idx="0">
+            <a:schemeClr val="accent6"/>
+          </a:effectRef>
+          <a:fontRef idx="minor">
+            <a:schemeClr val="dk1"/>
+          </a:fontRef>
+        </p:style>
+        <p:txBody>
+          <a:bodyPr rtlCol="0" anchor="ctr"/>
+          <a:lstStyle/>
+          <a:p>
+            <a:pPr algn="ctr"/>
+            <a:r>
+              <a:rPr lang="zh-TW" altLang="en-US" dirty="0"/>
+              <a:t>判斷有無使用者</a:t>
+            </a:r>
+          </a:p>
+        </p:txBody>
+      </p:sp>
+      <p:sp>
+        <p:nvSpPr>
+          <p:cNvPr id="31" name="矩形 30">
+            <a:extLst>
+              <a:ext uri="{FF2B5EF4-FFF2-40B4-BE49-F238E27FC236}">
+                <a16:creationId xmlns:a16="http://schemas.microsoft.com/office/drawing/2014/main" id="{C6281194-CFF6-4CF1-9EA9-53A48BC98850}"/>
+              </a:ext>
+            </a:extLst>
+          </p:cNvPr>
+          <p:cNvSpPr/>
+          <p:nvPr/>
+        </p:nvSpPr>
+        <p:spPr>
+          <a:xfrm>
+            <a:off x="8622176" y="4021800"/>
+            <a:ext cx="2145254" cy="629636"/>
+          </a:xfrm>
+          <a:prstGeom prst="rect">
+            <a:avLst/>
+          </a:prstGeom>
+        </p:spPr>
+        <p:style>
+          <a:lnRef idx="2">
+            <a:schemeClr val="accent6"/>
+          </a:lnRef>
+          <a:fillRef idx="1">
+            <a:schemeClr val="lt1"/>
+          </a:fillRef>
+          <a:effectRef idx="0">
+            <a:schemeClr val="accent6"/>
+          </a:effectRef>
+          <a:fontRef idx="minor">
+            <a:schemeClr val="dk1"/>
+          </a:fontRef>
+        </p:style>
+        <p:txBody>
+          <a:bodyPr rtlCol="0" anchor="ctr"/>
+          <a:lstStyle/>
+          <a:p>
+            <a:pPr algn="ctr"/>
+            <a:r>
+              <a:rPr lang="zh-TW" altLang="en-US" dirty="0"/>
+              <a:t>驗證使用者資料</a:t>
+            </a:r>
+          </a:p>
+        </p:txBody>
+      </p:sp>
+    </p:spTree>
+    <p:extLst>
+      <p:ext uri="{BB962C8B-B14F-4D97-AF65-F5344CB8AC3E}">
+        <p14:creationId xmlns:p14="http://schemas.microsoft.com/office/powerpoint/2010/main" val="3944798730"/>
+      </p:ext>
+    </p:extLst>
+  </p:cSld>
+  <p:clrMapOvr>
+    <a:masterClrMapping/>
+  </p:clrMapOvr>
+</p:sld>
+</file>
+
+<file path=ppt/slides/slide14.xml><?xml version="1.0" encoding="utf-8"?>
+<p:sld xmlns:a="http://schemas.openxmlformats.org/drawingml/2006/main" xmlns:r="http://schemas.openxmlformats.org/officeDocument/2006/relationships" xmlns:p="http://schemas.openxmlformats.org/presentationml/2006/main">
+  <p:cSld>
+    <p:spTree>
+      <p:nvGrpSpPr>
+        <p:cNvPr id="1" name=""/>
+        <p:cNvGrpSpPr/>
+        <p:nvPr/>
+      </p:nvGrpSpPr>
+      <p:grpSpPr>
+        <a:xfrm>
+          <a:off x="0" y="0"/>
+          <a:ext cx="0" cy="0"/>
+          <a:chOff x="0" y="0"/>
+          <a:chExt cx="0" cy="0"/>
+        </a:xfrm>
+      </p:grpSpPr>
+      <p:sp>
+        <p:nvSpPr>
+          <p:cNvPr id="2" name="標題 1">
+            <a:extLst>
+              <a:ext uri="{FF2B5EF4-FFF2-40B4-BE49-F238E27FC236}">
+                <a16:creationId xmlns:a16="http://schemas.microsoft.com/office/drawing/2014/main" id="{DA93D216-982B-81FF-80B8-E8D993811653}"/>
+              </a:ext>
+            </a:extLst>
+          </p:cNvPr>
+          <p:cNvSpPr>
+            <a:spLocks noGrp="1"/>
+          </p:cNvSpPr>
+          <p:nvPr>
+            <p:ph type="title"/>
+          </p:nvPr>
+        </p:nvSpPr>
+        <p:spPr>
+          <a:xfrm>
+            <a:off x="565150" y="770890"/>
+            <a:ext cx="10240521" cy="1268984"/>
+          </a:xfrm>
+        </p:spPr>
+        <p:txBody>
+          <a:bodyPr>
+            <a:normAutofit fontScale="90000"/>
+          </a:bodyPr>
+          <a:lstStyle/>
+          <a:p>
+            <a:r>
+              <a:rPr lang="zh-TW" altLang="en-US" dirty="0"/>
+              <a:t>網頁驗證流程 </a:t>
+            </a:r>
+            <a:r>
+              <a:rPr lang="en-US" altLang="zh-TW" dirty="0"/>
+              <a:t>–</a:t>
+            </a:r>
+            <a:r>
+              <a:rPr lang="zh-TW" altLang="en-US" dirty="0"/>
+              <a:t> 登入</a:t>
+            </a:r>
+            <a:r>
+              <a:rPr lang="en-US" altLang="zh-TW" b="0" dirty="0">
+                <a:solidFill>
+                  <a:srgbClr val="CE9178"/>
+                </a:solidFill>
+                <a:effectLst/>
+                <a:latin typeface="Fira code" pitchFamily="1" charset="0"/>
+              </a:rPr>
+              <a:t>/verify-credential</a:t>
+            </a:r>
+            <a:endParaRPr lang="zh-TW" altLang="en-US" dirty="0"/>
+          </a:p>
+        </p:txBody>
+      </p:sp>
+      <p:sp>
+        <p:nvSpPr>
+          <p:cNvPr id="6" name="矩形 5">
+            <a:extLst>
+              <a:ext uri="{FF2B5EF4-FFF2-40B4-BE49-F238E27FC236}">
+                <a16:creationId xmlns:a16="http://schemas.microsoft.com/office/drawing/2014/main" id="{F74207E8-3458-1C88-03EB-F43ABC311208}"/>
+              </a:ext>
+            </a:extLst>
+          </p:cNvPr>
+          <p:cNvSpPr/>
+          <p:nvPr/>
+        </p:nvSpPr>
+        <p:spPr>
+          <a:xfrm>
+            <a:off x="1596655" y="3045709"/>
+            <a:ext cx="340011" cy="1191123"/>
+          </a:xfrm>
+          <a:prstGeom prst="rect">
+            <a:avLst/>
+          </a:prstGeom>
+        </p:spPr>
+        <p:style>
+          <a:lnRef idx="2">
+            <a:schemeClr val="dk1"/>
+          </a:lnRef>
+          <a:fillRef idx="1">
+            <a:schemeClr val="lt1"/>
+          </a:fillRef>
+          <a:effectRef idx="0">
+            <a:schemeClr val="dk1"/>
+          </a:effectRef>
+          <a:fontRef idx="minor">
+            <a:schemeClr val="dk1"/>
+          </a:fontRef>
+        </p:style>
+        <p:txBody>
+          <a:bodyPr rtlCol="0" anchor="ctr"/>
+          <a:lstStyle/>
+          <a:p>
+            <a:pPr algn="ctr"/>
+            <a:r>
+              <a:rPr lang="zh-TW" altLang="en-US" dirty="0"/>
+              <a:t>瀏覽器</a:t>
+            </a:r>
+          </a:p>
+        </p:txBody>
+      </p:sp>
+      <p:sp>
+        <p:nvSpPr>
+          <p:cNvPr id="7" name="矩形 6">
+            <a:extLst>
+              <a:ext uri="{FF2B5EF4-FFF2-40B4-BE49-F238E27FC236}">
+                <a16:creationId xmlns:a16="http://schemas.microsoft.com/office/drawing/2014/main" id="{8227CAC6-BD1F-CFBF-C549-82BC31837819}"/>
+              </a:ext>
+            </a:extLst>
+          </p:cNvPr>
+          <p:cNvSpPr/>
+          <p:nvPr/>
+        </p:nvSpPr>
+        <p:spPr>
+          <a:xfrm>
+            <a:off x="3766219" y="1965350"/>
+            <a:ext cx="340011" cy="2701625"/>
+          </a:xfrm>
+          <a:prstGeom prst="rect">
+            <a:avLst/>
+          </a:prstGeom>
+        </p:spPr>
+        <p:style>
+          <a:lnRef idx="2">
+            <a:schemeClr val="dk1"/>
+          </a:lnRef>
+          <a:fillRef idx="1">
+            <a:schemeClr val="lt1"/>
+          </a:fillRef>
+          <a:effectRef idx="0">
+            <a:schemeClr val="dk1"/>
+          </a:effectRef>
+          <a:fontRef idx="minor">
+            <a:schemeClr val="dk1"/>
+          </a:fontRef>
+        </p:style>
+        <p:txBody>
+          <a:bodyPr rtlCol="0" anchor="ctr"/>
+          <a:lstStyle/>
+          <a:p>
+            <a:pPr algn="ctr"/>
+            <a:r>
+              <a:rPr lang="zh-TW" altLang="en-US" dirty="0"/>
+              <a:t>前端</a:t>
+            </a:r>
+          </a:p>
+        </p:txBody>
+      </p:sp>
+      <p:sp>
+        <p:nvSpPr>
+          <p:cNvPr id="8" name="矩形 7">
+            <a:extLst>
+              <a:ext uri="{FF2B5EF4-FFF2-40B4-BE49-F238E27FC236}">
+                <a16:creationId xmlns:a16="http://schemas.microsoft.com/office/drawing/2014/main" id="{56AF1438-E8A1-25D1-F4BA-0D6DAF74CEF9}"/>
+              </a:ext>
+            </a:extLst>
+          </p:cNvPr>
+          <p:cNvSpPr/>
+          <p:nvPr/>
+        </p:nvSpPr>
+        <p:spPr>
+          <a:xfrm>
+            <a:off x="8282164" y="1965350"/>
+            <a:ext cx="340012" cy="2701636"/>
+          </a:xfrm>
+          <a:prstGeom prst="rect">
+            <a:avLst/>
+          </a:prstGeom>
+        </p:spPr>
+        <p:style>
+          <a:lnRef idx="2">
+            <a:schemeClr val="dk1"/>
+          </a:lnRef>
+          <a:fillRef idx="1">
+            <a:schemeClr val="lt1"/>
+          </a:fillRef>
+          <a:effectRef idx="0">
+            <a:schemeClr val="dk1"/>
+          </a:effectRef>
+          <a:fontRef idx="minor">
+            <a:schemeClr val="dk1"/>
+          </a:fontRef>
+        </p:style>
+        <p:txBody>
+          <a:bodyPr rtlCol="0" anchor="ctr"/>
+          <a:lstStyle/>
+          <a:p>
+            <a:pPr algn="ctr"/>
+            <a:r>
+              <a:rPr lang="zh-TW" altLang="en-US" dirty="0"/>
+              <a:t>後端</a:t>
+            </a:r>
+          </a:p>
+        </p:txBody>
+      </p:sp>
+      <p:cxnSp>
+        <p:nvCxnSpPr>
+          <p:cNvPr id="11" name="直線單箭頭接點 10">
+            <a:extLst>
+              <a:ext uri="{FF2B5EF4-FFF2-40B4-BE49-F238E27FC236}">
+                <a16:creationId xmlns:a16="http://schemas.microsoft.com/office/drawing/2014/main" id="{897F46BA-70CA-0F4A-EBD9-D4EFDB962C04}"/>
+              </a:ext>
+            </a:extLst>
+          </p:cNvPr>
+          <p:cNvCxnSpPr>
+            <a:cxnSpLocks/>
+          </p:cNvCxnSpPr>
+          <p:nvPr/>
+        </p:nvCxnSpPr>
+        <p:spPr>
+          <a:xfrm>
+            <a:off x="2342382" y="2409206"/>
+            <a:ext cx="1323347" cy="1"/>
+          </a:xfrm>
+          <a:prstGeom prst="straightConnector1">
+            <a:avLst/>
+          </a:prstGeom>
+          <a:ln w="19050" cap="flat" cmpd="sng" algn="ctr">
+            <a:solidFill>
+              <a:schemeClr val="dk1"/>
+            </a:solidFill>
+            <a:prstDash val="solid"/>
+            <a:round/>
+            <a:headEnd type="none" w="med" len="med"/>
+            <a:tailEnd type="arrow" w="med" len="med"/>
+          </a:ln>
+        </p:spPr>
+        <p:style>
+          <a:lnRef idx="0">
+            <a:scrgbClr r="0" g="0" b="0"/>
+          </a:lnRef>
+          <a:fillRef idx="0">
+            <a:scrgbClr r="0" g="0" b="0"/>
+          </a:fillRef>
+          <a:effectRef idx="0">
+            <a:scrgbClr r="0" g="0" b="0"/>
+          </a:effectRef>
+          <a:fontRef idx="minor">
+            <a:schemeClr val="tx1"/>
+          </a:fontRef>
+        </p:style>
+      </p:cxnSp>
+      <p:sp>
+        <p:nvSpPr>
+          <p:cNvPr id="13" name="文字方塊 12">
+            <a:extLst>
+              <a:ext uri="{FF2B5EF4-FFF2-40B4-BE49-F238E27FC236}">
+                <a16:creationId xmlns:a16="http://schemas.microsoft.com/office/drawing/2014/main" id="{70ED5A8E-1E7B-7555-6B38-81FB669E4B71}"/>
+              </a:ext>
+            </a:extLst>
+          </p:cNvPr>
+          <p:cNvSpPr txBox="1"/>
+          <p:nvPr/>
+        </p:nvSpPr>
+        <p:spPr>
+          <a:xfrm>
+            <a:off x="2317001" y="2039874"/>
+            <a:ext cx="1284964" cy="369332"/>
+          </a:xfrm>
+          <a:prstGeom prst="rect">
+            <a:avLst/>
+          </a:prstGeom>
+          <a:noFill/>
+        </p:spPr>
+        <p:txBody>
+          <a:bodyPr wrap="square" rtlCol="0">
+            <a:spAutoFit/>
+          </a:bodyPr>
+          <a:lstStyle/>
+          <a:p>
+            <a:r>
+              <a:rPr lang="en-US" altLang="zh-TW" dirty="0"/>
+              <a:t>username</a:t>
+            </a:r>
+            <a:endParaRPr lang="zh-TW" altLang="en-US" dirty="0"/>
+          </a:p>
+        </p:txBody>
+      </p:sp>
+      <p:sp>
+        <p:nvSpPr>
+          <p:cNvPr id="14" name="橢圓 13">
+            <a:extLst>
+              <a:ext uri="{FF2B5EF4-FFF2-40B4-BE49-F238E27FC236}">
+                <a16:creationId xmlns:a16="http://schemas.microsoft.com/office/drawing/2014/main" id="{3A6B441E-E8D4-E360-E3FF-70D2E5F6844D}"/>
+              </a:ext>
+            </a:extLst>
+          </p:cNvPr>
+          <p:cNvSpPr/>
+          <p:nvPr/>
+        </p:nvSpPr>
+        <p:spPr>
+          <a:xfrm>
+            <a:off x="1386329" y="1972216"/>
+            <a:ext cx="748146" cy="887713"/>
+          </a:xfrm>
+          <a:prstGeom prst="ellipse">
+            <a:avLst/>
+          </a:prstGeom>
+        </p:spPr>
+        <p:style>
+          <a:lnRef idx="2">
+            <a:schemeClr val="dk1"/>
+          </a:lnRef>
+          <a:fillRef idx="1">
+            <a:schemeClr val="lt1"/>
+          </a:fillRef>
+          <a:effectRef idx="0">
+            <a:schemeClr val="dk1"/>
+          </a:effectRef>
+          <a:fontRef idx="minor">
+            <a:schemeClr val="dk1"/>
+          </a:fontRef>
+        </p:style>
+        <p:txBody>
+          <a:bodyPr rtlCol="0" anchor="ctr"/>
+          <a:lstStyle/>
+          <a:p>
+            <a:pPr algn="ctr"/>
+            <a:r>
+              <a:rPr lang="zh-TW" altLang="en-US" dirty="0"/>
+              <a:t>使用者</a:t>
+            </a:r>
+          </a:p>
+        </p:txBody>
+      </p:sp>
+      <p:sp>
+        <p:nvSpPr>
+          <p:cNvPr id="15" name="文字方塊 14">
+            <a:extLst>
+              <a:ext uri="{FF2B5EF4-FFF2-40B4-BE49-F238E27FC236}">
+                <a16:creationId xmlns:a16="http://schemas.microsoft.com/office/drawing/2014/main" id="{63936D2B-CFEE-9B24-59B8-90E7BDCD3D85}"/>
+              </a:ext>
+            </a:extLst>
+          </p:cNvPr>
+          <p:cNvSpPr txBox="1"/>
+          <p:nvPr/>
+        </p:nvSpPr>
+        <p:spPr>
+          <a:xfrm>
+            <a:off x="4413389" y="2054403"/>
+            <a:ext cx="3914578" cy="369332"/>
+          </a:xfrm>
+          <a:prstGeom prst="rect">
+            <a:avLst/>
+          </a:prstGeom>
+          <a:noFill/>
+        </p:spPr>
+        <p:txBody>
+          <a:bodyPr wrap="square" rtlCol="0">
+            <a:spAutoFit/>
+          </a:bodyPr>
+          <a:lstStyle/>
+          <a:p>
+            <a:r>
+              <a:rPr lang="en-US" altLang="zh-TW" dirty="0"/>
+              <a:t>Post </a:t>
+            </a:r>
+            <a:r>
+              <a:rPr lang="en-US" altLang="zh-TW" dirty="0">
+                <a:solidFill>
+                  <a:srgbClr val="FF0000"/>
+                </a:solidFill>
+              </a:rPr>
+              <a:t>/verify-register </a:t>
+            </a:r>
+            <a:r>
+              <a:rPr lang="en-US" altLang="zh-TW" dirty="0"/>
+              <a:t>{username}</a:t>
+            </a:r>
+            <a:endParaRPr lang="zh-TW" altLang="en-US" dirty="0"/>
+          </a:p>
+        </p:txBody>
+      </p:sp>
+      <p:cxnSp>
+        <p:nvCxnSpPr>
+          <p:cNvPr id="17" name="直線單箭頭接點 16">
+            <a:extLst>
+              <a:ext uri="{FF2B5EF4-FFF2-40B4-BE49-F238E27FC236}">
+                <a16:creationId xmlns:a16="http://schemas.microsoft.com/office/drawing/2014/main" id="{29EB607A-316C-F61E-CE68-8EABCEE17DE7}"/>
+              </a:ext>
+            </a:extLst>
+          </p:cNvPr>
+          <p:cNvCxnSpPr>
+            <a:cxnSpLocks/>
+          </p:cNvCxnSpPr>
+          <p:nvPr/>
+        </p:nvCxnSpPr>
+        <p:spPr>
+          <a:xfrm>
+            <a:off x="4326371" y="2409207"/>
+            <a:ext cx="3759401" cy="0"/>
+          </a:xfrm>
+          <a:prstGeom prst="straightConnector1">
+            <a:avLst/>
+          </a:prstGeom>
+          <a:ln w="19050" cap="flat" cmpd="sng" algn="ctr">
+            <a:solidFill>
+              <a:schemeClr val="dk1"/>
+            </a:solidFill>
+            <a:prstDash val="solid"/>
+            <a:round/>
+            <a:headEnd type="none" w="med" len="med"/>
+            <a:tailEnd type="arrow" w="med" len="med"/>
+          </a:ln>
+        </p:spPr>
+        <p:style>
+          <a:lnRef idx="0">
+            <a:scrgbClr r="0" g="0" b="0"/>
+          </a:lnRef>
+          <a:fillRef idx="0">
+            <a:scrgbClr r="0" g="0" b="0"/>
+          </a:fillRef>
+          <a:effectRef idx="0">
+            <a:scrgbClr r="0" g="0" b="0"/>
+          </a:effectRef>
+          <a:fontRef idx="minor">
+            <a:schemeClr val="tx1"/>
+          </a:fontRef>
+        </p:style>
+      </p:cxnSp>
+      <p:cxnSp>
+        <p:nvCxnSpPr>
+          <p:cNvPr id="19" name="直線單箭頭接點 18">
+            <a:extLst>
+              <a:ext uri="{FF2B5EF4-FFF2-40B4-BE49-F238E27FC236}">
+                <a16:creationId xmlns:a16="http://schemas.microsoft.com/office/drawing/2014/main" id="{D2A2F7C8-4C2F-2CDC-3154-00F8F9971D2A}"/>
+              </a:ext>
+            </a:extLst>
+          </p:cNvPr>
+          <p:cNvCxnSpPr>
+            <a:cxnSpLocks/>
+          </p:cNvCxnSpPr>
+          <p:nvPr/>
+        </p:nvCxnSpPr>
+        <p:spPr>
+          <a:xfrm flipH="1">
+            <a:off x="4326371" y="3045709"/>
+            <a:ext cx="3759401" cy="0"/>
+          </a:xfrm>
+          <a:prstGeom prst="straightConnector1">
+            <a:avLst/>
+          </a:prstGeom>
+          <a:ln w="19050" cap="flat" cmpd="sng" algn="ctr">
+            <a:solidFill>
+              <a:schemeClr val="dk1"/>
+            </a:solidFill>
+            <a:prstDash val="solid"/>
+            <a:round/>
+            <a:headEnd type="none" w="med" len="med"/>
+            <a:tailEnd type="arrow" w="med" len="med"/>
+          </a:ln>
+        </p:spPr>
+        <p:style>
+          <a:lnRef idx="0">
+            <a:scrgbClr r="0" g="0" b="0"/>
+          </a:lnRef>
+          <a:fillRef idx="0">
+            <a:scrgbClr r="0" g="0" b="0"/>
+          </a:fillRef>
+          <a:effectRef idx="0">
+            <a:scrgbClr r="0" g="0" b="0"/>
+          </a:effectRef>
+          <a:fontRef idx="minor">
+            <a:schemeClr val="tx1"/>
+          </a:fontRef>
+        </p:style>
+      </p:cxnSp>
+      <p:sp>
+        <p:nvSpPr>
+          <p:cNvPr id="22" name="文字方塊 21">
+            <a:extLst>
+              <a:ext uri="{FF2B5EF4-FFF2-40B4-BE49-F238E27FC236}">
+                <a16:creationId xmlns:a16="http://schemas.microsoft.com/office/drawing/2014/main" id="{A5C21DC1-6848-1443-F317-51816D1424CF}"/>
+              </a:ext>
+            </a:extLst>
+          </p:cNvPr>
+          <p:cNvSpPr txBox="1"/>
+          <p:nvPr/>
+        </p:nvSpPr>
+        <p:spPr>
+          <a:xfrm>
+            <a:off x="4399044" y="2669511"/>
+            <a:ext cx="3543253" cy="369332"/>
+          </a:xfrm>
+          <a:prstGeom prst="rect">
+            <a:avLst/>
+          </a:prstGeom>
+          <a:noFill/>
+        </p:spPr>
+        <p:txBody>
+          <a:bodyPr wrap="square" rtlCol="0">
+            <a:spAutoFit/>
+          </a:bodyPr>
+          <a:lstStyle/>
+          <a:p>
+            <a:r>
+              <a:rPr lang="en-US" altLang="zh-TW" dirty="0"/>
+              <a:t>Return {challenge &amp; </a:t>
+            </a:r>
+            <a:r>
+              <a:rPr lang="en-US" altLang="zh-TW" dirty="0" err="1"/>
+              <a:t>WebAuthn</a:t>
+            </a:r>
+            <a:r>
+              <a:rPr lang="en-US" altLang="zh-TW" dirty="0"/>
+              <a:t>}</a:t>
+            </a:r>
+            <a:endParaRPr lang="zh-TW" altLang="en-US" dirty="0"/>
+          </a:p>
+        </p:txBody>
+      </p:sp>
+      <p:cxnSp>
+        <p:nvCxnSpPr>
+          <p:cNvPr id="3" name="直線單箭頭接點 2">
+            <a:extLst>
+              <a:ext uri="{FF2B5EF4-FFF2-40B4-BE49-F238E27FC236}">
+                <a16:creationId xmlns:a16="http://schemas.microsoft.com/office/drawing/2014/main" id="{4ECEE5A6-694F-B9B1-2CD2-E50A2E7599E5}"/>
+              </a:ext>
+            </a:extLst>
+          </p:cNvPr>
+          <p:cNvCxnSpPr>
+            <a:cxnSpLocks/>
+          </p:cNvCxnSpPr>
+          <p:nvPr/>
+        </p:nvCxnSpPr>
+        <p:spPr>
+          <a:xfrm flipH="1">
+            <a:off x="2023780" y="3316162"/>
+            <a:ext cx="1641949" cy="0"/>
+          </a:xfrm>
+          <a:prstGeom prst="straightConnector1">
+            <a:avLst/>
+          </a:prstGeom>
+          <a:ln w="19050" cap="flat" cmpd="sng" algn="ctr">
+            <a:solidFill>
+              <a:schemeClr val="dk1"/>
+            </a:solidFill>
+            <a:prstDash val="solid"/>
+            <a:round/>
+            <a:headEnd type="none" w="med" len="med"/>
+            <a:tailEnd type="arrow" w="med" len="med"/>
+          </a:ln>
+        </p:spPr>
+        <p:style>
+          <a:lnRef idx="0">
+            <a:scrgbClr r="0" g="0" b="0"/>
+          </a:lnRef>
+          <a:fillRef idx="0">
+            <a:scrgbClr r="0" g="0" b="0"/>
+          </a:fillRef>
+          <a:effectRef idx="0">
+            <a:scrgbClr r="0" g="0" b="0"/>
+          </a:effectRef>
+          <a:fontRef idx="minor">
+            <a:schemeClr val="tx1"/>
+          </a:fontRef>
+        </p:style>
+      </p:cxnSp>
+      <p:sp>
+        <p:nvSpPr>
+          <p:cNvPr id="9" name="文字方塊 8">
+            <a:extLst>
+              <a:ext uri="{FF2B5EF4-FFF2-40B4-BE49-F238E27FC236}">
+                <a16:creationId xmlns:a16="http://schemas.microsoft.com/office/drawing/2014/main" id="{B09AD9AF-448E-0BAB-155A-077AB324EBFE}"/>
+              </a:ext>
+            </a:extLst>
+          </p:cNvPr>
+          <p:cNvSpPr txBox="1"/>
+          <p:nvPr/>
+        </p:nvSpPr>
+        <p:spPr>
+          <a:xfrm>
+            <a:off x="2261114" y="2913510"/>
+            <a:ext cx="1284964" cy="369332"/>
+          </a:xfrm>
+          <a:prstGeom prst="rect">
+            <a:avLst/>
+          </a:prstGeom>
+          <a:noFill/>
+        </p:spPr>
+        <p:txBody>
+          <a:bodyPr wrap="square" rtlCol="0">
+            <a:spAutoFit/>
+          </a:bodyPr>
+          <a:lstStyle/>
+          <a:p>
+            <a:r>
+              <a:rPr lang="zh-TW" altLang="en-US" dirty="0"/>
+              <a:t>調用 </a:t>
+            </a:r>
+            <a:r>
+              <a:rPr lang="en-US" altLang="zh-TW" dirty="0"/>
+              <a:t>API</a:t>
+            </a:r>
+            <a:endParaRPr lang="zh-TW" altLang="en-US" dirty="0"/>
+          </a:p>
+        </p:txBody>
+      </p:sp>
+      <p:cxnSp>
+        <p:nvCxnSpPr>
+          <p:cNvPr id="16" name="直線單箭頭接點 15">
+            <a:extLst>
+              <a:ext uri="{FF2B5EF4-FFF2-40B4-BE49-F238E27FC236}">
+                <a16:creationId xmlns:a16="http://schemas.microsoft.com/office/drawing/2014/main" id="{E6B85DB3-E92E-B067-1FB0-735E6A92018D}"/>
+              </a:ext>
+            </a:extLst>
+          </p:cNvPr>
+          <p:cNvCxnSpPr>
+            <a:cxnSpLocks/>
+          </p:cNvCxnSpPr>
+          <p:nvPr/>
+        </p:nvCxnSpPr>
+        <p:spPr>
+          <a:xfrm>
+            <a:off x="2046737" y="3787147"/>
+            <a:ext cx="1658800" cy="0"/>
+          </a:xfrm>
+          <a:prstGeom prst="straightConnector1">
+            <a:avLst/>
+          </a:prstGeom>
+          <a:ln w="19050" cap="flat" cmpd="sng" algn="ctr">
+            <a:solidFill>
+              <a:schemeClr val="dk1"/>
+            </a:solidFill>
+            <a:prstDash val="solid"/>
+            <a:round/>
+            <a:headEnd type="none" w="med" len="med"/>
+            <a:tailEnd type="arrow" w="med" len="med"/>
+          </a:ln>
+        </p:spPr>
+        <p:style>
+          <a:lnRef idx="0">
+            <a:scrgbClr r="0" g="0" b="0"/>
+          </a:lnRef>
+          <a:fillRef idx="0">
+            <a:scrgbClr r="0" g="0" b="0"/>
+          </a:fillRef>
+          <a:effectRef idx="0">
+            <a:scrgbClr r="0" g="0" b="0"/>
+          </a:effectRef>
+          <a:fontRef idx="minor">
+            <a:schemeClr val="tx1"/>
+          </a:fontRef>
+        </p:style>
+      </p:cxnSp>
+      <p:sp>
+        <p:nvSpPr>
+          <p:cNvPr id="18" name="文字方塊 17">
+            <a:extLst>
+              <a:ext uri="{FF2B5EF4-FFF2-40B4-BE49-F238E27FC236}">
+                <a16:creationId xmlns:a16="http://schemas.microsoft.com/office/drawing/2014/main" id="{9D9EB68C-8871-4A17-8133-9B6914273DBF}"/>
+              </a:ext>
+            </a:extLst>
+          </p:cNvPr>
+          <p:cNvSpPr txBox="1"/>
+          <p:nvPr/>
+        </p:nvSpPr>
+        <p:spPr>
+          <a:xfrm>
+            <a:off x="2078182" y="3462056"/>
+            <a:ext cx="1732044" cy="325089"/>
+          </a:xfrm>
+          <a:prstGeom prst="rect">
+            <a:avLst/>
+          </a:prstGeom>
+          <a:noFill/>
+        </p:spPr>
+        <p:txBody>
+          <a:bodyPr wrap="square" rtlCol="0">
+            <a:spAutoFit/>
+          </a:bodyPr>
+          <a:lstStyle/>
+          <a:p>
+            <a:pPr>
+              <a:lnSpc>
+                <a:spcPts val="1650"/>
+              </a:lnSpc>
+            </a:pPr>
+            <a:r>
+              <a:rPr lang="en-US" altLang="zh-TW" b="0" dirty="0">
+                <a:solidFill>
+                  <a:srgbClr val="4FC1FF"/>
+                </a:solidFill>
+                <a:effectLst/>
+                <a:latin typeface="Fira code" pitchFamily="1" charset="0"/>
+              </a:rPr>
+              <a:t>credential</a:t>
+            </a:r>
+            <a:endParaRPr lang="en-US" altLang="zh-TW" b="0" dirty="0">
+              <a:solidFill>
+                <a:srgbClr val="CCCCCC"/>
+              </a:solidFill>
+              <a:effectLst/>
+              <a:latin typeface="Fira code" pitchFamily="1" charset="0"/>
+            </a:endParaRPr>
+          </a:p>
+        </p:txBody>
+      </p:sp>
+      <p:sp>
+        <p:nvSpPr>
+          <p:cNvPr id="23" name="文字方塊 22">
+            <a:extLst>
+              <a:ext uri="{FF2B5EF4-FFF2-40B4-BE49-F238E27FC236}">
+                <a16:creationId xmlns:a16="http://schemas.microsoft.com/office/drawing/2014/main" id="{9861815D-E619-7F1A-9F0E-5F4DC18968B2}"/>
+              </a:ext>
+            </a:extLst>
+          </p:cNvPr>
+          <p:cNvSpPr txBox="1"/>
+          <p:nvPr/>
+        </p:nvSpPr>
+        <p:spPr>
+          <a:xfrm>
+            <a:off x="4413389" y="3641270"/>
+            <a:ext cx="3637081" cy="646331"/>
+          </a:xfrm>
+          <a:prstGeom prst="rect">
+            <a:avLst/>
+          </a:prstGeom>
+          <a:noFill/>
+        </p:spPr>
+        <p:txBody>
+          <a:bodyPr wrap="square" rtlCol="0">
+            <a:spAutoFit/>
+          </a:bodyPr>
+          <a:lstStyle/>
+          <a:p>
+            <a:r>
+              <a:rPr lang="en-US" altLang="zh-TW" dirty="0"/>
+              <a:t>Post </a:t>
+            </a:r>
+            <a:r>
+              <a:rPr lang="en-US" altLang="zh-TW" dirty="0">
+                <a:solidFill>
+                  <a:srgbClr val="FF0000"/>
+                </a:solidFill>
+              </a:rPr>
+              <a:t>/</a:t>
+            </a:r>
+            <a:r>
+              <a:rPr lang="en-US" altLang="zh-TW" b="0" dirty="0">
+                <a:solidFill>
+                  <a:srgbClr val="FF0000"/>
+                </a:solidFill>
+                <a:effectLst/>
+                <a:latin typeface="Fira code" pitchFamily="1" charset="0"/>
+              </a:rPr>
+              <a:t>verify-credential</a:t>
+            </a:r>
+          </a:p>
+          <a:p>
+            <a:endParaRPr lang="zh-TW" altLang="en-US" dirty="0"/>
+          </a:p>
+        </p:txBody>
+      </p:sp>
+      <p:cxnSp>
+        <p:nvCxnSpPr>
+          <p:cNvPr id="24" name="直線單箭頭接點 23">
+            <a:extLst>
+              <a:ext uri="{FF2B5EF4-FFF2-40B4-BE49-F238E27FC236}">
+                <a16:creationId xmlns:a16="http://schemas.microsoft.com/office/drawing/2014/main" id="{9937A7F5-FF55-15A8-0DBA-31B47E3903E2}"/>
+              </a:ext>
+            </a:extLst>
+          </p:cNvPr>
+          <p:cNvCxnSpPr>
+            <a:cxnSpLocks/>
+          </p:cNvCxnSpPr>
+          <p:nvPr/>
+        </p:nvCxnSpPr>
+        <p:spPr>
+          <a:xfrm>
+            <a:off x="4326371" y="4021800"/>
+            <a:ext cx="3759401" cy="0"/>
+          </a:xfrm>
+          <a:prstGeom prst="straightConnector1">
+            <a:avLst/>
+          </a:prstGeom>
+          <a:ln w="19050" cap="flat" cmpd="sng" algn="ctr">
+            <a:solidFill>
+              <a:schemeClr val="dk1"/>
+            </a:solidFill>
+            <a:prstDash val="solid"/>
+            <a:round/>
+            <a:headEnd type="none" w="med" len="med"/>
+            <a:tailEnd type="arrow" w="med" len="med"/>
+          </a:ln>
+        </p:spPr>
+        <p:style>
+          <a:lnRef idx="0">
+            <a:scrgbClr r="0" g="0" b="0"/>
+          </a:lnRef>
+          <a:fillRef idx="0">
+            <a:scrgbClr r="0" g="0" b="0"/>
+          </a:fillRef>
+          <a:effectRef idx="0">
+            <a:scrgbClr r="0" g="0" b="0"/>
+          </a:effectRef>
+          <a:fontRef idx="minor">
+            <a:schemeClr val="tx1"/>
+          </a:fontRef>
+        </p:style>
+      </p:cxnSp>
+      <p:sp>
+        <p:nvSpPr>
+          <p:cNvPr id="29" name="矩形 28">
+            <a:extLst>
+              <a:ext uri="{FF2B5EF4-FFF2-40B4-BE49-F238E27FC236}">
+                <a16:creationId xmlns:a16="http://schemas.microsoft.com/office/drawing/2014/main" id="{A5E5DEEA-DC72-25AE-6F35-14531CF21846}"/>
+              </a:ext>
+            </a:extLst>
+          </p:cNvPr>
+          <p:cNvSpPr/>
+          <p:nvPr/>
+        </p:nvSpPr>
+        <p:spPr>
+          <a:xfrm>
+            <a:off x="8622176" y="2416073"/>
+            <a:ext cx="2145254" cy="629636"/>
+          </a:xfrm>
+          <a:prstGeom prst="rect">
+            <a:avLst/>
+          </a:prstGeom>
+        </p:spPr>
+        <p:style>
+          <a:lnRef idx="2">
+            <a:schemeClr val="accent6"/>
+          </a:lnRef>
+          <a:fillRef idx="1">
+            <a:schemeClr val="lt1"/>
+          </a:fillRef>
+          <a:effectRef idx="0">
+            <a:schemeClr val="accent6"/>
+          </a:effectRef>
+          <a:fontRef idx="minor">
+            <a:schemeClr val="dk1"/>
+          </a:fontRef>
+        </p:style>
+        <p:txBody>
+          <a:bodyPr rtlCol="0" anchor="ctr"/>
+          <a:lstStyle/>
+          <a:p>
+            <a:pPr algn="ctr"/>
+            <a:r>
+              <a:rPr lang="zh-TW" altLang="en-US" dirty="0"/>
+              <a:t>判斷有無使用者</a:t>
+            </a:r>
+          </a:p>
+        </p:txBody>
+      </p:sp>
+      <p:sp>
+        <p:nvSpPr>
+          <p:cNvPr id="31" name="矩形 30">
+            <a:extLst>
+              <a:ext uri="{FF2B5EF4-FFF2-40B4-BE49-F238E27FC236}">
+                <a16:creationId xmlns:a16="http://schemas.microsoft.com/office/drawing/2014/main" id="{C6281194-CFF6-4CF1-9EA9-53A48BC98850}"/>
+              </a:ext>
+            </a:extLst>
+          </p:cNvPr>
+          <p:cNvSpPr/>
+          <p:nvPr/>
+        </p:nvSpPr>
+        <p:spPr>
+          <a:xfrm>
+            <a:off x="8622176" y="4021800"/>
+            <a:ext cx="2145254" cy="629636"/>
+          </a:xfrm>
+          <a:prstGeom prst="rect">
+            <a:avLst/>
+          </a:prstGeom>
+        </p:spPr>
+        <p:style>
+          <a:lnRef idx="2">
+            <a:schemeClr val="accent6"/>
+          </a:lnRef>
+          <a:fillRef idx="1">
+            <a:schemeClr val="lt1"/>
+          </a:fillRef>
+          <a:effectRef idx="0">
+            <a:schemeClr val="accent6"/>
+          </a:effectRef>
+          <a:fontRef idx="minor">
+            <a:schemeClr val="dk1"/>
+          </a:fontRef>
+        </p:style>
+        <p:txBody>
+          <a:bodyPr rtlCol="0" anchor="ctr"/>
+          <a:lstStyle/>
+          <a:p>
+            <a:pPr algn="ctr"/>
+            <a:r>
+              <a:rPr lang="zh-TW" altLang="en-US" dirty="0"/>
+              <a:t>驗證使用者資料</a:t>
+            </a:r>
+          </a:p>
+        </p:txBody>
+      </p:sp>
+      <p:cxnSp>
+        <p:nvCxnSpPr>
+          <p:cNvPr id="4" name="直線單箭頭接點 3">
+            <a:extLst>
+              <a:ext uri="{FF2B5EF4-FFF2-40B4-BE49-F238E27FC236}">
+                <a16:creationId xmlns:a16="http://schemas.microsoft.com/office/drawing/2014/main" id="{D477A160-9BA4-0E72-435E-6F2C80797220}"/>
+              </a:ext>
+            </a:extLst>
+          </p:cNvPr>
+          <p:cNvCxnSpPr>
+            <a:cxnSpLocks/>
+          </p:cNvCxnSpPr>
+          <p:nvPr/>
+        </p:nvCxnSpPr>
+        <p:spPr>
+          <a:xfrm flipH="1">
+            <a:off x="4326371" y="4651436"/>
+            <a:ext cx="3759401" cy="0"/>
+          </a:xfrm>
+          <a:prstGeom prst="straightConnector1">
+            <a:avLst/>
+          </a:prstGeom>
+          <a:ln w="19050" cap="flat" cmpd="sng" algn="ctr">
+            <a:solidFill>
+              <a:schemeClr val="dk1"/>
+            </a:solidFill>
+            <a:prstDash val="solid"/>
+            <a:round/>
+            <a:headEnd type="none" w="med" len="med"/>
+            <a:tailEnd type="arrow" w="med" len="med"/>
+          </a:ln>
+        </p:spPr>
+        <p:style>
+          <a:lnRef idx="0">
+            <a:scrgbClr r="0" g="0" b="0"/>
+          </a:lnRef>
+          <a:fillRef idx="0">
+            <a:scrgbClr r="0" g="0" b="0"/>
+          </a:fillRef>
+          <a:effectRef idx="0">
+            <a:scrgbClr r="0" g="0" b="0"/>
+          </a:effectRef>
+          <a:fontRef idx="minor">
+            <a:schemeClr val="tx1"/>
+          </a:fontRef>
+        </p:style>
+      </p:cxnSp>
+      <p:sp>
+        <p:nvSpPr>
+          <p:cNvPr id="5" name="文字方塊 4">
+            <a:extLst>
+              <a:ext uri="{FF2B5EF4-FFF2-40B4-BE49-F238E27FC236}">
+                <a16:creationId xmlns:a16="http://schemas.microsoft.com/office/drawing/2014/main" id="{1216BEAE-054C-2A12-3523-1BA312D60E63}"/>
+              </a:ext>
+            </a:extLst>
+          </p:cNvPr>
+          <p:cNvSpPr txBox="1"/>
+          <p:nvPr/>
+        </p:nvSpPr>
+        <p:spPr>
+          <a:xfrm>
+            <a:off x="5574720" y="4282104"/>
+            <a:ext cx="1124380" cy="369332"/>
+          </a:xfrm>
+          <a:prstGeom prst="rect">
+            <a:avLst/>
+          </a:prstGeom>
+          <a:noFill/>
+        </p:spPr>
+        <p:txBody>
+          <a:bodyPr wrap="square" rtlCol="0">
+            <a:spAutoFit/>
+          </a:bodyPr>
+          <a:lstStyle/>
+          <a:p>
+            <a:r>
+              <a:rPr lang="zh-TW" altLang="en-US" dirty="0"/>
+              <a:t>成功登入</a:t>
+            </a:r>
+          </a:p>
+        </p:txBody>
+      </p:sp>
+    </p:spTree>
+    <p:extLst>
+      <p:ext uri="{BB962C8B-B14F-4D97-AF65-F5344CB8AC3E}">
+        <p14:creationId xmlns:p14="http://schemas.microsoft.com/office/powerpoint/2010/main" val="2842093696"/>
+      </p:ext>
+    </p:extLst>
+  </p:cSld>
+  <p:clrMapOvr>
+    <a:masterClrMapping/>
+  </p:clrMapOvr>
+</p:sld>
+</file>
+
+<file path=ppt/slides/slide2.xml><?xml version="1.0" encoding="utf-8"?>
+<p:sld xmlns:a="http://schemas.openxmlformats.org/drawingml/2006/main" xmlns:r="http://schemas.openxmlformats.org/officeDocument/2006/relationships" xmlns:p="http://schemas.openxmlformats.org/presentationml/2006/main">
+  <p:cSld>
+    <p:spTree>
+      <p:nvGrpSpPr>
+        <p:cNvPr id="1" name=""/>
+        <p:cNvGrpSpPr/>
+        <p:nvPr/>
+      </p:nvGrpSpPr>
+      <p:grpSpPr>
+        <a:xfrm>
+          <a:off x="0" y="0"/>
+          <a:ext cx="0" cy="0"/>
+          <a:chOff x="0" y="0"/>
+          <a:chExt cx="0" cy="0"/>
+        </a:xfrm>
+      </p:grpSpPr>
+      <p:sp>
+        <p:nvSpPr>
+          <p:cNvPr id="2" name="標題 1">
+            <a:extLst>
+              <a:ext uri="{FF2B5EF4-FFF2-40B4-BE49-F238E27FC236}">
+                <a16:creationId xmlns:a16="http://schemas.microsoft.com/office/drawing/2014/main" id="{4DDD207D-46E0-F6F6-740A-F1D279CB7088}"/>
+              </a:ext>
+            </a:extLst>
+          </p:cNvPr>
+          <p:cNvSpPr>
+            <a:spLocks noGrp="1"/>
+          </p:cNvSpPr>
+          <p:nvPr>
+            <p:ph type="title"/>
+          </p:nvPr>
+        </p:nvSpPr>
+        <p:spPr/>
+        <p:txBody>
+          <a:bodyPr/>
+          <a:lstStyle/>
+          <a:p>
+            <a:r>
+              <a:rPr lang="en-US" altLang="zh-TW" dirty="0">
+                <a:latin typeface="Fira Code" pitchFamily="1" charset="0"/>
+                <a:ea typeface="Fira Code" pitchFamily="1" charset="0"/>
+                <a:cs typeface="Fira Code" pitchFamily="1" charset="0"/>
+              </a:rPr>
+              <a:t>Demo </a:t>
+            </a:r>
+            <a:r>
+              <a:rPr lang="zh-TW" altLang="en-US" dirty="0">
+                <a:latin typeface="Fira Code" pitchFamily="1" charset="0"/>
+                <a:cs typeface="Fira Code" pitchFamily="1" charset="0"/>
+              </a:rPr>
+              <a:t>架構簡述</a:t>
+            </a:r>
+          </a:p>
+        </p:txBody>
+      </p:sp>
+      <p:graphicFrame>
+        <p:nvGraphicFramePr>
+          <p:cNvPr id="5" name="內容版面配置區 2">
+            <a:extLst>
+              <a:ext uri="{FF2B5EF4-FFF2-40B4-BE49-F238E27FC236}">
+                <a16:creationId xmlns:a16="http://schemas.microsoft.com/office/drawing/2014/main" id="{9E27B6A2-1180-1FC8-44FB-1B3EB6DCBF02}"/>
+              </a:ext>
+            </a:extLst>
+          </p:cNvPr>
+          <p:cNvGraphicFramePr>
+            <a:graphicFrameLocks noGrp="1"/>
+          </p:cNvGraphicFramePr>
+          <p:nvPr>
+            <p:ph idx="1"/>
+          </p:nvPr>
+        </p:nvGraphicFramePr>
+        <p:xfrm>
+          <a:off x="565150" y="2160016"/>
+          <a:ext cx="7335835" cy="3601212"/>
+        </p:xfrm>
+        <a:graphic>
+          <a:graphicData uri="http://schemas.openxmlformats.org/drawingml/2006/diagram">
+            <dgm:relIds xmlns:dgm="http://schemas.openxmlformats.org/drawingml/2006/diagram" xmlns:r="http://schemas.openxmlformats.org/officeDocument/2006/relationships" r:dm="rId2" r:lo="rId3" r:qs="rId4" r:cs="rId5"/>
+          </a:graphicData>
+        </a:graphic>
+      </p:graphicFrame>
+      <p:sp>
+        <p:nvSpPr>
+          <p:cNvPr id="3" name="文字方塊 2">
+            <a:extLst>
+              <a:ext uri="{FF2B5EF4-FFF2-40B4-BE49-F238E27FC236}">
+                <a16:creationId xmlns:a16="http://schemas.microsoft.com/office/drawing/2014/main" id="{E0E4B76C-FDEF-557C-83B9-BF1917CD781E}"/>
+              </a:ext>
+            </a:extLst>
+          </p:cNvPr>
+          <p:cNvSpPr txBox="1"/>
+          <p:nvPr/>
+        </p:nvSpPr>
+        <p:spPr>
+          <a:xfrm>
+            <a:off x="2876139" y="4841966"/>
+            <a:ext cx="5024846" cy="369332"/>
+          </a:xfrm>
+          <a:prstGeom prst="rect">
+            <a:avLst/>
+          </a:prstGeom>
+          <a:noFill/>
+        </p:spPr>
+        <p:txBody>
+          <a:bodyPr wrap="square" rtlCol="0">
+            <a:spAutoFit/>
+          </a:bodyPr>
+          <a:lstStyle/>
+          <a:p>
+            <a:r>
+              <a:rPr lang="en-US" altLang="zh-TW" dirty="0">
+                <a:solidFill>
+                  <a:srgbClr val="FF0000"/>
+                </a:solidFill>
+              </a:rPr>
+              <a:t>※</a:t>
+            </a:r>
+            <a:r>
+              <a:rPr lang="zh-TW" altLang="en-US" dirty="0">
+                <a:solidFill>
+                  <a:srgbClr val="FF0000"/>
+                </a:solidFill>
+              </a:rPr>
+              <a:t>尚未串接資料庫，使用者資料僅存在後端</a:t>
+            </a:r>
+          </a:p>
+        </p:txBody>
+      </p:sp>
+    </p:spTree>
+    <p:extLst>
+      <p:ext uri="{BB962C8B-B14F-4D97-AF65-F5344CB8AC3E}">
+        <p14:creationId xmlns:p14="http://schemas.microsoft.com/office/powerpoint/2010/main" val="633164858"/>
+      </p:ext>
+    </p:extLst>
+  </p:cSld>
+  <p:clrMapOvr>
+    <a:masterClrMapping/>
+  </p:clrMapOvr>
+</p:sld>
+</file>
+
+<file path=ppt/slides/slide3.xml><?xml version="1.0" encoding="utf-8"?>
+<p:sld xmlns:a="http://schemas.openxmlformats.org/drawingml/2006/main" xmlns:r="http://schemas.openxmlformats.org/officeDocument/2006/relationships" xmlns:p="http://schemas.openxmlformats.org/presentationml/2006/main">
+  <p:cSld>
+    <p:spTree>
+      <p:nvGrpSpPr>
+        <p:cNvPr id="1" name=""/>
+        <p:cNvGrpSpPr/>
+        <p:nvPr/>
+      </p:nvGrpSpPr>
+      <p:grpSpPr>
+        <a:xfrm>
+          <a:off x="0" y="0"/>
+          <a:ext cx="0" cy="0"/>
+          <a:chOff x="0" y="0"/>
+          <a:chExt cx="0" cy="0"/>
+        </a:xfrm>
+      </p:grpSpPr>
+      <p:sp>
+        <p:nvSpPr>
+          <p:cNvPr id="2" name="標題 1">
+            <a:extLst>
+              <a:ext uri="{FF2B5EF4-FFF2-40B4-BE49-F238E27FC236}">
+                <a16:creationId xmlns:a16="http://schemas.microsoft.com/office/drawing/2014/main" id="{DA93D216-982B-81FF-80B8-E8D993811653}"/>
+              </a:ext>
+            </a:extLst>
+          </p:cNvPr>
+          <p:cNvSpPr>
+            <a:spLocks noGrp="1"/>
+          </p:cNvSpPr>
+          <p:nvPr>
+            <p:ph type="title"/>
+          </p:nvPr>
+        </p:nvSpPr>
+        <p:spPr>
+          <a:xfrm>
+            <a:off x="565150" y="770890"/>
+            <a:ext cx="10240521" cy="1268984"/>
+          </a:xfrm>
+        </p:spPr>
+        <p:txBody>
+          <a:bodyPr>
+            <a:normAutofit/>
+          </a:bodyPr>
+          <a:lstStyle/>
+          <a:p>
+            <a:r>
+              <a:rPr lang="zh-TW" altLang="en-US" dirty="0"/>
+              <a:t>網頁驗證流程 </a:t>
+            </a:r>
+            <a:r>
+              <a:rPr lang="en-US" altLang="zh-TW" dirty="0"/>
+              <a:t>–</a:t>
+            </a:r>
+            <a:r>
+              <a:rPr lang="zh-TW" altLang="en-US" dirty="0"/>
+              <a:t> 註冊 </a:t>
+            </a:r>
+            <a:r>
+              <a:rPr lang="en-US" altLang="zh-TW" b="0" dirty="0">
+                <a:solidFill>
+                  <a:srgbClr val="CE9178"/>
+                </a:solidFill>
+                <a:effectLst/>
+                <a:latin typeface="Fira code" pitchFamily="1" charset="0"/>
+              </a:rPr>
+              <a:t>/register</a:t>
+            </a:r>
+            <a:endParaRPr lang="zh-TW" altLang="en-US" dirty="0"/>
+          </a:p>
+        </p:txBody>
+      </p:sp>
+      <p:sp>
+        <p:nvSpPr>
+          <p:cNvPr id="7" name="矩形 6">
+            <a:extLst>
+              <a:ext uri="{FF2B5EF4-FFF2-40B4-BE49-F238E27FC236}">
+                <a16:creationId xmlns:a16="http://schemas.microsoft.com/office/drawing/2014/main" id="{8227CAC6-BD1F-CFBF-C549-82BC31837819}"/>
+              </a:ext>
+            </a:extLst>
+          </p:cNvPr>
+          <p:cNvSpPr/>
+          <p:nvPr/>
+        </p:nvSpPr>
+        <p:spPr>
+          <a:xfrm>
+            <a:off x="3766219" y="1965350"/>
+            <a:ext cx="340011" cy="2701625"/>
+          </a:xfrm>
+          <a:prstGeom prst="rect">
+            <a:avLst/>
+          </a:prstGeom>
+        </p:spPr>
+        <p:style>
+          <a:lnRef idx="2">
+            <a:schemeClr val="dk1"/>
+          </a:lnRef>
+          <a:fillRef idx="1">
+            <a:schemeClr val="lt1"/>
+          </a:fillRef>
+          <a:effectRef idx="0">
+            <a:schemeClr val="dk1"/>
+          </a:effectRef>
+          <a:fontRef idx="minor">
+            <a:schemeClr val="dk1"/>
+          </a:fontRef>
+        </p:style>
+        <p:txBody>
+          <a:bodyPr rtlCol="0" anchor="ctr"/>
+          <a:lstStyle/>
+          <a:p>
+            <a:pPr algn="ctr"/>
+            <a:r>
+              <a:rPr lang="zh-TW" altLang="en-US" dirty="0"/>
+              <a:t>前端</a:t>
+            </a:r>
+          </a:p>
+        </p:txBody>
+      </p:sp>
+      <p:cxnSp>
+        <p:nvCxnSpPr>
+          <p:cNvPr id="11" name="直線單箭頭接點 10">
+            <a:extLst>
+              <a:ext uri="{FF2B5EF4-FFF2-40B4-BE49-F238E27FC236}">
+                <a16:creationId xmlns:a16="http://schemas.microsoft.com/office/drawing/2014/main" id="{897F46BA-70CA-0F4A-EBD9-D4EFDB962C04}"/>
+              </a:ext>
+            </a:extLst>
+          </p:cNvPr>
+          <p:cNvCxnSpPr>
+            <a:cxnSpLocks/>
+          </p:cNvCxnSpPr>
+          <p:nvPr/>
+        </p:nvCxnSpPr>
+        <p:spPr>
+          <a:xfrm>
+            <a:off x="2342382" y="2409206"/>
+            <a:ext cx="1323347" cy="1"/>
+          </a:xfrm>
+          <a:prstGeom prst="straightConnector1">
+            <a:avLst/>
+          </a:prstGeom>
+          <a:ln w="19050" cap="flat" cmpd="sng" algn="ctr">
+            <a:solidFill>
+              <a:schemeClr val="dk1"/>
+            </a:solidFill>
+            <a:prstDash val="solid"/>
+            <a:round/>
+            <a:headEnd type="none" w="med" len="med"/>
+            <a:tailEnd type="arrow" w="med" len="med"/>
+          </a:ln>
+        </p:spPr>
+        <p:style>
+          <a:lnRef idx="0">
+            <a:scrgbClr r="0" g="0" b="0"/>
+          </a:lnRef>
+          <a:fillRef idx="0">
+            <a:scrgbClr r="0" g="0" b="0"/>
+          </a:fillRef>
+          <a:effectRef idx="0">
+            <a:scrgbClr r="0" g="0" b="0"/>
+          </a:effectRef>
+          <a:fontRef idx="minor">
+            <a:schemeClr val="tx1"/>
+          </a:fontRef>
+        </p:style>
+      </p:cxnSp>
+      <p:sp>
+        <p:nvSpPr>
+          <p:cNvPr id="13" name="文字方塊 12">
+            <a:extLst>
+              <a:ext uri="{FF2B5EF4-FFF2-40B4-BE49-F238E27FC236}">
+                <a16:creationId xmlns:a16="http://schemas.microsoft.com/office/drawing/2014/main" id="{70ED5A8E-1E7B-7555-6B38-81FB669E4B71}"/>
+              </a:ext>
+            </a:extLst>
+          </p:cNvPr>
+          <p:cNvSpPr txBox="1"/>
+          <p:nvPr/>
+        </p:nvSpPr>
+        <p:spPr>
+          <a:xfrm>
+            <a:off x="2317001" y="2039874"/>
+            <a:ext cx="1284964" cy="369332"/>
+          </a:xfrm>
+          <a:prstGeom prst="rect">
+            <a:avLst/>
+          </a:prstGeom>
+          <a:noFill/>
+        </p:spPr>
+        <p:txBody>
+          <a:bodyPr wrap="square" rtlCol="0">
+            <a:spAutoFit/>
+          </a:bodyPr>
+          <a:lstStyle/>
+          <a:p>
+            <a:r>
+              <a:rPr lang="en-US" altLang="zh-TW" dirty="0"/>
+              <a:t>username</a:t>
+            </a:r>
+            <a:endParaRPr lang="zh-TW" altLang="en-US" dirty="0"/>
+          </a:p>
+        </p:txBody>
+      </p:sp>
+      <p:sp>
+        <p:nvSpPr>
+          <p:cNvPr id="14" name="橢圓 13">
+            <a:extLst>
+              <a:ext uri="{FF2B5EF4-FFF2-40B4-BE49-F238E27FC236}">
+                <a16:creationId xmlns:a16="http://schemas.microsoft.com/office/drawing/2014/main" id="{3A6B441E-E8D4-E360-E3FF-70D2E5F6844D}"/>
+              </a:ext>
+            </a:extLst>
+          </p:cNvPr>
+          <p:cNvSpPr/>
+          <p:nvPr/>
+        </p:nvSpPr>
+        <p:spPr>
+          <a:xfrm>
+            <a:off x="1386329" y="1972216"/>
+            <a:ext cx="748146" cy="887713"/>
+          </a:xfrm>
+          <a:prstGeom prst="ellipse">
+            <a:avLst/>
+          </a:prstGeom>
+        </p:spPr>
+        <p:style>
+          <a:lnRef idx="2">
+            <a:schemeClr val="dk1"/>
+          </a:lnRef>
+          <a:fillRef idx="1">
+            <a:schemeClr val="lt1"/>
+          </a:fillRef>
+          <a:effectRef idx="0">
+            <a:schemeClr val="dk1"/>
+          </a:effectRef>
+          <a:fontRef idx="minor">
+            <a:schemeClr val="dk1"/>
+          </a:fontRef>
+        </p:style>
+        <p:txBody>
+          <a:bodyPr rtlCol="0" anchor="ctr"/>
+          <a:lstStyle/>
+          <a:p>
+            <a:pPr algn="ctr"/>
+            <a:r>
+              <a:rPr lang="zh-TW" altLang="en-US" dirty="0"/>
+              <a:t>使用者</a:t>
+            </a:r>
+          </a:p>
+        </p:txBody>
+      </p:sp>
     </p:spTree>
     <p:extLst>
       <p:ext uri="{BB962C8B-B14F-4D97-AF65-F5344CB8AC3E}">
@@ -19198,9 +23401,16 @@
             <p:ph type="title"/>
           </p:nvPr>
         </p:nvSpPr>
-        <p:spPr/>
+        <p:spPr>
+          <a:xfrm>
+            <a:off x="565150" y="770890"/>
+            <a:ext cx="10240521" cy="1268984"/>
+          </a:xfrm>
+        </p:spPr>
         <p:txBody>
-          <a:bodyPr/>
+          <a:bodyPr>
+            <a:normAutofit/>
+          </a:bodyPr>
           <a:lstStyle/>
           <a:p>
             <a:r>
@@ -19209,12 +23419,23 @@
             </a:r>
             <a:r>
               <a:rPr lang="en-US" altLang="zh-TW" dirty="0"/>
-              <a:t>–</a:t>
+              <a:t>– </a:t>
             </a:r>
             <a:r>
               <a:rPr lang="zh-TW" altLang="en-US" dirty="0"/>
-              <a:t> 註冊</a:t>
-            </a:r>
+              <a:t>註冊 </a:t>
+            </a:r>
+            <a:r>
+              <a:rPr lang="en-US" altLang="zh-TW" b="0" dirty="0">
+                <a:solidFill>
+                  <a:srgbClr val="CE9178"/>
+                </a:solidFill>
+                <a:effectLst/>
+                <a:latin typeface="Fira code" pitchFamily="1" charset="0"/>
+              </a:rPr>
+              <a:t>/register</a:t>
+            </a:r>
+            <a:endParaRPr lang="zh-TW" altLang="en-US" dirty="0"/>
           </a:p>
         </p:txBody>
       </p:sp>
@@ -19583,9 +23804,16 @@
             <p:ph type="title"/>
           </p:nvPr>
         </p:nvSpPr>
-        <p:spPr/>
+        <p:spPr>
+          <a:xfrm>
+            <a:off x="565150" y="770890"/>
+            <a:ext cx="10240521" cy="1268984"/>
+          </a:xfrm>
+        </p:spPr>
         <p:txBody>
-          <a:bodyPr/>
+          <a:bodyPr>
+            <a:normAutofit/>
+          </a:bodyPr>
           <a:lstStyle/>
           <a:p>
             <a:r>
@@ -19594,12 +23822,23 @@
             </a:r>
             <a:r>
               <a:rPr lang="en-US" altLang="zh-TW" dirty="0"/>
-              <a:t>–</a:t>
+              <a:t>– </a:t>
             </a:r>
             <a:r>
               <a:rPr lang="zh-TW" altLang="en-US" dirty="0"/>
-              <a:t> 註冊</a:t>
-            </a:r>
+              <a:t>註冊 </a:t>
+            </a:r>
+            <a:r>
+              <a:rPr lang="en-US" altLang="zh-TW" b="0" dirty="0">
+                <a:solidFill>
+                  <a:srgbClr val="CE9178"/>
+                </a:solidFill>
+                <a:effectLst/>
+                <a:latin typeface="Fira code" pitchFamily="1" charset="0"/>
+              </a:rPr>
+              <a:t>/register</a:t>
+            </a:r>
+            <a:endParaRPr lang="zh-TW" altLang="en-US" dirty="0"/>
           </a:p>
         </p:txBody>
       </p:sp>
@@ -20863,9 +25102,16 @@
             <p:ph type="title"/>
           </p:nvPr>
         </p:nvSpPr>
-        <p:spPr/>
+        <p:spPr>
+          <a:xfrm>
+            <a:off x="565150" y="770890"/>
+            <a:ext cx="10240521" cy="1268984"/>
+          </a:xfrm>
+        </p:spPr>
         <p:txBody>
-          <a:bodyPr/>
+          <a:bodyPr>
+            <a:normAutofit/>
+          </a:bodyPr>
           <a:lstStyle/>
           <a:p>
             <a:r>
@@ -20880,6 +25126,17 @@
               <a:rPr lang="zh-TW" altLang="en-US" dirty="0"/>
               <a:t> 註冊</a:t>
             </a:r>
+            <a:r>
+              <a:rPr lang="en-US" altLang="zh-TW" b="0" dirty="0">
+                <a:solidFill>
+                  <a:srgbClr val="CE9178"/>
+                </a:solidFill>
+                <a:effectLst/>
+                <a:latin typeface="Fira code" pitchFamily="1" charset="0"/>
+              </a:rPr>
+              <a:t>/store-credential</a:t>
+            </a:r>
+            <a:endParaRPr lang="zh-TW" altLang="en-US" dirty="0"/>
           </a:p>
         </p:txBody>
       </p:sp>
@@ -21727,7 +25984,1417 @@
     </p:spTree>
     <p:extLst>
       <p:ext uri="{BB962C8B-B14F-4D97-AF65-F5344CB8AC3E}">
-        <p14:creationId xmlns:p14="http://schemas.microsoft.com/office/powerpoint/2010/main" val="3356040879"/>
+        <p14:creationId xmlns:p14="http://schemas.microsoft.com/office/powerpoint/2010/main" val="2063174237"/>
+      </p:ext>
+    </p:extLst>
+  </p:cSld>
+  <p:clrMapOvr>
+    <a:masterClrMapping/>
+  </p:clrMapOvr>
+</p:sld>
+</file>
+
+<file path=ppt/slides/slide8.xml><?xml version="1.0" encoding="utf-8"?>
+<p:sld xmlns:a="http://schemas.openxmlformats.org/drawingml/2006/main" xmlns:r="http://schemas.openxmlformats.org/officeDocument/2006/relationships" xmlns:p="http://schemas.openxmlformats.org/presentationml/2006/main">
+  <p:cSld>
+    <p:spTree>
+      <p:nvGrpSpPr>
+        <p:cNvPr id="1" name=""/>
+        <p:cNvGrpSpPr/>
+        <p:nvPr/>
+      </p:nvGrpSpPr>
+      <p:grpSpPr>
+        <a:xfrm>
+          <a:off x="0" y="0"/>
+          <a:ext cx="0" cy="0"/>
+          <a:chOff x="0" y="0"/>
+          <a:chExt cx="0" cy="0"/>
+        </a:xfrm>
+      </p:grpSpPr>
+      <p:sp>
+        <p:nvSpPr>
+          <p:cNvPr id="2" name="標題 1">
+            <a:extLst>
+              <a:ext uri="{FF2B5EF4-FFF2-40B4-BE49-F238E27FC236}">
+                <a16:creationId xmlns:a16="http://schemas.microsoft.com/office/drawing/2014/main" id="{DA93D216-982B-81FF-80B8-E8D993811653}"/>
+              </a:ext>
+            </a:extLst>
+          </p:cNvPr>
+          <p:cNvSpPr>
+            <a:spLocks noGrp="1"/>
+          </p:cNvSpPr>
+          <p:nvPr>
+            <p:ph type="title"/>
+          </p:nvPr>
+        </p:nvSpPr>
+        <p:spPr>
+          <a:xfrm>
+            <a:off x="565150" y="770890"/>
+            <a:ext cx="10240521" cy="1268984"/>
+          </a:xfrm>
+        </p:spPr>
+        <p:txBody>
+          <a:bodyPr>
+            <a:normAutofit/>
+          </a:bodyPr>
+          <a:lstStyle/>
+          <a:p>
+            <a:r>
+              <a:rPr lang="zh-TW" altLang="en-US" dirty="0"/>
+              <a:t>網頁驗證流程 </a:t>
+            </a:r>
+            <a:r>
+              <a:rPr lang="en-US" altLang="zh-TW" dirty="0"/>
+              <a:t>–</a:t>
+            </a:r>
+            <a:r>
+              <a:rPr lang="zh-TW" altLang="en-US" dirty="0"/>
+              <a:t> 註冊</a:t>
+            </a:r>
+            <a:r>
+              <a:rPr lang="en-US" altLang="zh-TW" b="0" dirty="0">
+                <a:solidFill>
+                  <a:srgbClr val="CE9178"/>
+                </a:solidFill>
+                <a:effectLst/>
+                <a:latin typeface="Fira code" pitchFamily="1" charset="0"/>
+              </a:rPr>
+              <a:t>/store-credential</a:t>
+            </a:r>
+            <a:endParaRPr lang="zh-TW" altLang="en-US" dirty="0"/>
+          </a:p>
+        </p:txBody>
+      </p:sp>
+      <p:sp>
+        <p:nvSpPr>
+          <p:cNvPr id="6" name="矩形 5">
+            <a:extLst>
+              <a:ext uri="{FF2B5EF4-FFF2-40B4-BE49-F238E27FC236}">
+                <a16:creationId xmlns:a16="http://schemas.microsoft.com/office/drawing/2014/main" id="{F74207E8-3458-1C88-03EB-F43ABC311208}"/>
+              </a:ext>
+            </a:extLst>
+          </p:cNvPr>
+          <p:cNvSpPr/>
+          <p:nvPr/>
+        </p:nvSpPr>
+        <p:spPr>
+          <a:xfrm>
+            <a:off x="1596655" y="3045709"/>
+            <a:ext cx="340011" cy="1191123"/>
+          </a:xfrm>
+          <a:prstGeom prst="rect">
+            <a:avLst/>
+          </a:prstGeom>
+        </p:spPr>
+        <p:style>
+          <a:lnRef idx="2">
+            <a:schemeClr val="dk1"/>
+          </a:lnRef>
+          <a:fillRef idx="1">
+            <a:schemeClr val="lt1"/>
+          </a:fillRef>
+          <a:effectRef idx="0">
+            <a:schemeClr val="dk1"/>
+          </a:effectRef>
+          <a:fontRef idx="minor">
+            <a:schemeClr val="dk1"/>
+          </a:fontRef>
+        </p:style>
+        <p:txBody>
+          <a:bodyPr rtlCol="0" anchor="ctr"/>
+          <a:lstStyle/>
+          <a:p>
+            <a:pPr algn="ctr"/>
+            <a:r>
+              <a:rPr lang="zh-TW" altLang="en-US" dirty="0"/>
+              <a:t>瀏覽器</a:t>
+            </a:r>
+          </a:p>
+        </p:txBody>
+      </p:sp>
+      <p:sp>
+        <p:nvSpPr>
+          <p:cNvPr id="7" name="矩形 6">
+            <a:extLst>
+              <a:ext uri="{FF2B5EF4-FFF2-40B4-BE49-F238E27FC236}">
+                <a16:creationId xmlns:a16="http://schemas.microsoft.com/office/drawing/2014/main" id="{8227CAC6-BD1F-CFBF-C549-82BC31837819}"/>
+              </a:ext>
+            </a:extLst>
+          </p:cNvPr>
+          <p:cNvSpPr/>
+          <p:nvPr/>
+        </p:nvSpPr>
+        <p:spPr>
+          <a:xfrm>
+            <a:off x="3766219" y="1965350"/>
+            <a:ext cx="340011" cy="2701625"/>
+          </a:xfrm>
+          <a:prstGeom prst="rect">
+            <a:avLst/>
+          </a:prstGeom>
+        </p:spPr>
+        <p:style>
+          <a:lnRef idx="2">
+            <a:schemeClr val="dk1"/>
+          </a:lnRef>
+          <a:fillRef idx="1">
+            <a:schemeClr val="lt1"/>
+          </a:fillRef>
+          <a:effectRef idx="0">
+            <a:schemeClr val="dk1"/>
+          </a:effectRef>
+          <a:fontRef idx="minor">
+            <a:schemeClr val="dk1"/>
+          </a:fontRef>
+        </p:style>
+        <p:txBody>
+          <a:bodyPr rtlCol="0" anchor="ctr"/>
+          <a:lstStyle/>
+          <a:p>
+            <a:pPr algn="ctr"/>
+            <a:r>
+              <a:rPr lang="zh-TW" altLang="en-US" dirty="0"/>
+              <a:t>前端</a:t>
+            </a:r>
+          </a:p>
+        </p:txBody>
+      </p:sp>
+      <p:sp>
+        <p:nvSpPr>
+          <p:cNvPr id="8" name="矩形 7">
+            <a:extLst>
+              <a:ext uri="{FF2B5EF4-FFF2-40B4-BE49-F238E27FC236}">
+                <a16:creationId xmlns:a16="http://schemas.microsoft.com/office/drawing/2014/main" id="{56AF1438-E8A1-25D1-F4BA-0D6DAF74CEF9}"/>
+              </a:ext>
+            </a:extLst>
+          </p:cNvPr>
+          <p:cNvSpPr/>
+          <p:nvPr/>
+        </p:nvSpPr>
+        <p:spPr>
+          <a:xfrm>
+            <a:off x="7563898" y="1965350"/>
+            <a:ext cx="340012" cy="2701636"/>
+          </a:xfrm>
+          <a:prstGeom prst="rect">
+            <a:avLst/>
+          </a:prstGeom>
+        </p:spPr>
+        <p:style>
+          <a:lnRef idx="2">
+            <a:schemeClr val="dk1"/>
+          </a:lnRef>
+          <a:fillRef idx="1">
+            <a:schemeClr val="lt1"/>
+          </a:fillRef>
+          <a:effectRef idx="0">
+            <a:schemeClr val="dk1"/>
+          </a:effectRef>
+          <a:fontRef idx="minor">
+            <a:schemeClr val="dk1"/>
+          </a:fontRef>
+        </p:style>
+        <p:txBody>
+          <a:bodyPr rtlCol="0" anchor="ctr"/>
+          <a:lstStyle/>
+          <a:p>
+            <a:pPr algn="ctr"/>
+            <a:r>
+              <a:rPr lang="zh-TW" altLang="en-US" dirty="0"/>
+              <a:t>後端</a:t>
+            </a:r>
+          </a:p>
+        </p:txBody>
+      </p:sp>
+      <p:cxnSp>
+        <p:nvCxnSpPr>
+          <p:cNvPr id="11" name="直線單箭頭接點 10">
+            <a:extLst>
+              <a:ext uri="{FF2B5EF4-FFF2-40B4-BE49-F238E27FC236}">
+                <a16:creationId xmlns:a16="http://schemas.microsoft.com/office/drawing/2014/main" id="{897F46BA-70CA-0F4A-EBD9-D4EFDB962C04}"/>
+              </a:ext>
+            </a:extLst>
+          </p:cNvPr>
+          <p:cNvCxnSpPr>
+            <a:cxnSpLocks/>
+          </p:cNvCxnSpPr>
+          <p:nvPr/>
+        </p:nvCxnSpPr>
+        <p:spPr>
+          <a:xfrm>
+            <a:off x="2342382" y="2409206"/>
+            <a:ext cx="1323347" cy="1"/>
+          </a:xfrm>
+          <a:prstGeom prst="straightConnector1">
+            <a:avLst/>
+          </a:prstGeom>
+          <a:ln w="19050" cap="flat" cmpd="sng" algn="ctr">
+            <a:solidFill>
+              <a:schemeClr val="dk1"/>
+            </a:solidFill>
+            <a:prstDash val="solid"/>
+            <a:round/>
+            <a:headEnd type="none" w="med" len="med"/>
+            <a:tailEnd type="arrow" w="med" len="med"/>
+          </a:ln>
+        </p:spPr>
+        <p:style>
+          <a:lnRef idx="0">
+            <a:scrgbClr r="0" g="0" b="0"/>
+          </a:lnRef>
+          <a:fillRef idx="0">
+            <a:scrgbClr r="0" g="0" b="0"/>
+          </a:fillRef>
+          <a:effectRef idx="0">
+            <a:scrgbClr r="0" g="0" b="0"/>
+          </a:effectRef>
+          <a:fontRef idx="minor">
+            <a:schemeClr val="tx1"/>
+          </a:fontRef>
+        </p:style>
+      </p:cxnSp>
+      <p:sp>
+        <p:nvSpPr>
+          <p:cNvPr id="13" name="文字方塊 12">
+            <a:extLst>
+              <a:ext uri="{FF2B5EF4-FFF2-40B4-BE49-F238E27FC236}">
+                <a16:creationId xmlns:a16="http://schemas.microsoft.com/office/drawing/2014/main" id="{70ED5A8E-1E7B-7555-6B38-81FB669E4B71}"/>
+              </a:ext>
+            </a:extLst>
+          </p:cNvPr>
+          <p:cNvSpPr txBox="1"/>
+          <p:nvPr/>
+        </p:nvSpPr>
+        <p:spPr>
+          <a:xfrm>
+            <a:off x="2317001" y="2039874"/>
+            <a:ext cx="1284964" cy="369332"/>
+          </a:xfrm>
+          <a:prstGeom prst="rect">
+            <a:avLst/>
+          </a:prstGeom>
+          <a:noFill/>
+        </p:spPr>
+        <p:txBody>
+          <a:bodyPr wrap="square" rtlCol="0">
+            <a:spAutoFit/>
+          </a:bodyPr>
+          <a:lstStyle/>
+          <a:p>
+            <a:r>
+              <a:rPr lang="en-US" altLang="zh-TW" dirty="0"/>
+              <a:t>username</a:t>
+            </a:r>
+            <a:endParaRPr lang="zh-TW" altLang="en-US" dirty="0"/>
+          </a:p>
+        </p:txBody>
+      </p:sp>
+      <p:sp>
+        <p:nvSpPr>
+          <p:cNvPr id="14" name="橢圓 13">
+            <a:extLst>
+              <a:ext uri="{FF2B5EF4-FFF2-40B4-BE49-F238E27FC236}">
+                <a16:creationId xmlns:a16="http://schemas.microsoft.com/office/drawing/2014/main" id="{3A6B441E-E8D4-E360-E3FF-70D2E5F6844D}"/>
+              </a:ext>
+            </a:extLst>
+          </p:cNvPr>
+          <p:cNvSpPr/>
+          <p:nvPr/>
+        </p:nvSpPr>
+        <p:spPr>
+          <a:xfrm>
+            <a:off x="1386329" y="1972216"/>
+            <a:ext cx="748146" cy="887713"/>
+          </a:xfrm>
+          <a:prstGeom prst="ellipse">
+            <a:avLst/>
+          </a:prstGeom>
+        </p:spPr>
+        <p:style>
+          <a:lnRef idx="2">
+            <a:schemeClr val="dk1"/>
+          </a:lnRef>
+          <a:fillRef idx="1">
+            <a:schemeClr val="lt1"/>
+          </a:fillRef>
+          <a:effectRef idx="0">
+            <a:schemeClr val="dk1"/>
+          </a:effectRef>
+          <a:fontRef idx="minor">
+            <a:schemeClr val="dk1"/>
+          </a:fontRef>
+        </p:style>
+        <p:txBody>
+          <a:bodyPr rtlCol="0" anchor="ctr"/>
+          <a:lstStyle/>
+          <a:p>
+            <a:pPr algn="ctr"/>
+            <a:r>
+              <a:rPr lang="zh-TW" altLang="en-US" dirty="0"/>
+              <a:t>使用者</a:t>
+            </a:r>
+          </a:p>
+        </p:txBody>
+      </p:sp>
+      <p:sp>
+        <p:nvSpPr>
+          <p:cNvPr id="15" name="文字方塊 14">
+            <a:extLst>
+              <a:ext uri="{FF2B5EF4-FFF2-40B4-BE49-F238E27FC236}">
+                <a16:creationId xmlns:a16="http://schemas.microsoft.com/office/drawing/2014/main" id="{63936D2B-CFEE-9B24-59B8-90E7BDCD3D85}"/>
+              </a:ext>
+            </a:extLst>
+          </p:cNvPr>
+          <p:cNvSpPr txBox="1"/>
+          <p:nvPr/>
+        </p:nvSpPr>
+        <p:spPr>
+          <a:xfrm>
+            <a:off x="4280189" y="1994748"/>
+            <a:ext cx="2951884" cy="369332"/>
+          </a:xfrm>
+          <a:prstGeom prst="rect">
+            <a:avLst/>
+          </a:prstGeom>
+          <a:noFill/>
+        </p:spPr>
+        <p:txBody>
+          <a:bodyPr wrap="square" rtlCol="0">
+            <a:spAutoFit/>
+          </a:bodyPr>
+          <a:lstStyle/>
+          <a:p>
+            <a:r>
+              <a:rPr lang="en-US" altLang="zh-TW" dirty="0"/>
+              <a:t>Post </a:t>
+            </a:r>
+            <a:r>
+              <a:rPr lang="en-US" altLang="zh-TW" dirty="0">
+                <a:solidFill>
+                  <a:srgbClr val="FF0000"/>
+                </a:solidFill>
+              </a:rPr>
+              <a:t>/register </a:t>
+            </a:r>
+            <a:r>
+              <a:rPr lang="en-US" altLang="zh-TW" dirty="0"/>
+              <a:t>{username}</a:t>
+            </a:r>
+            <a:endParaRPr lang="zh-TW" altLang="en-US" dirty="0"/>
+          </a:p>
+        </p:txBody>
+      </p:sp>
+      <p:cxnSp>
+        <p:nvCxnSpPr>
+          <p:cNvPr id="17" name="直線單箭頭接點 16">
+            <a:extLst>
+              <a:ext uri="{FF2B5EF4-FFF2-40B4-BE49-F238E27FC236}">
+                <a16:creationId xmlns:a16="http://schemas.microsoft.com/office/drawing/2014/main" id="{29EB607A-316C-F61E-CE68-8EABCEE17DE7}"/>
+              </a:ext>
+            </a:extLst>
+          </p:cNvPr>
+          <p:cNvCxnSpPr>
+            <a:cxnSpLocks/>
+          </p:cNvCxnSpPr>
+          <p:nvPr/>
+        </p:nvCxnSpPr>
+        <p:spPr>
+          <a:xfrm>
+            <a:off x="4326371" y="2409207"/>
+            <a:ext cx="2831811" cy="6866"/>
+          </a:xfrm>
+          <a:prstGeom prst="straightConnector1">
+            <a:avLst/>
+          </a:prstGeom>
+          <a:ln w="19050" cap="flat" cmpd="sng" algn="ctr">
+            <a:solidFill>
+              <a:schemeClr val="dk1"/>
+            </a:solidFill>
+            <a:prstDash val="solid"/>
+            <a:round/>
+            <a:headEnd type="none" w="med" len="med"/>
+            <a:tailEnd type="arrow" w="med" len="med"/>
+          </a:ln>
+        </p:spPr>
+        <p:style>
+          <a:lnRef idx="0">
+            <a:scrgbClr r="0" g="0" b="0"/>
+          </a:lnRef>
+          <a:fillRef idx="0">
+            <a:scrgbClr r="0" g="0" b="0"/>
+          </a:fillRef>
+          <a:effectRef idx="0">
+            <a:scrgbClr r="0" g="0" b="0"/>
+          </a:effectRef>
+          <a:fontRef idx="minor">
+            <a:schemeClr val="tx1"/>
+          </a:fontRef>
+        </p:style>
+      </p:cxnSp>
+      <p:cxnSp>
+        <p:nvCxnSpPr>
+          <p:cNvPr id="19" name="直線單箭頭接點 18">
+            <a:extLst>
+              <a:ext uri="{FF2B5EF4-FFF2-40B4-BE49-F238E27FC236}">
+                <a16:creationId xmlns:a16="http://schemas.microsoft.com/office/drawing/2014/main" id="{D2A2F7C8-4C2F-2CDC-3154-00F8F9971D2A}"/>
+              </a:ext>
+            </a:extLst>
+          </p:cNvPr>
+          <p:cNvCxnSpPr>
+            <a:cxnSpLocks/>
+          </p:cNvCxnSpPr>
+          <p:nvPr/>
+        </p:nvCxnSpPr>
+        <p:spPr>
+          <a:xfrm flipH="1">
+            <a:off x="4326371" y="3045709"/>
+            <a:ext cx="2757920" cy="0"/>
+          </a:xfrm>
+          <a:prstGeom prst="straightConnector1">
+            <a:avLst/>
+          </a:prstGeom>
+          <a:ln w="19050" cap="flat" cmpd="sng" algn="ctr">
+            <a:solidFill>
+              <a:schemeClr val="dk1"/>
+            </a:solidFill>
+            <a:prstDash val="solid"/>
+            <a:round/>
+            <a:headEnd type="none" w="med" len="med"/>
+            <a:tailEnd type="arrow" w="med" len="med"/>
+          </a:ln>
+        </p:spPr>
+        <p:style>
+          <a:lnRef idx="0">
+            <a:scrgbClr r="0" g="0" b="0"/>
+          </a:lnRef>
+          <a:fillRef idx="0">
+            <a:scrgbClr r="0" g="0" b="0"/>
+          </a:fillRef>
+          <a:effectRef idx="0">
+            <a:scrgbClr r="0" g="0" b="0"/>
+          </a:effectRef>
+          <a:fontRef idx="minor">
+            <a:schemeClr val="tx1"/>
+          </a:fontRef>
+        </p:style>
+      </p:cxnSp>
+      <p:sp>
+        <p:nvSpPr>
+          <p:cNvPr id="22" name="文字方塊 21">
+            <a:extLst>
+              <a:ext uri="{FF2B5EF4-FFF2-40B4-BE49-F238E27FC236}">
+                <a16:creationId xmlns:a16="http://schemas.microsoft.com/office/drawing/2014/main" id="{A5C21DC1-6848-1443-F317-51816D1424CF}"/>
+              </a:ext>
+            </a:extLst>
+          </p:cNvPr>
+          <p:cNvSpPr txBox="1"/>
+          <p:nvPr/>
+        </p:nvSpPr>
+        <p:spPr>
+          <a:xfrm>
+            <a:off x="4106230" y="2582072"/>
+            <a:ext cx="3543253" cy="369332"/>
+          </a:xfrm>
+          <a:prstGeom prst="rect">
+            <a:avLst/>
+          </a:prstGeom>
+          <a:noFill/>
+        </p:spPr>
+        <p:txBody>
+          <a:bodyPr wrap="square" rtlCol="0">
+            <a:spAutoFit/>
+          </a:bodyPr>
+          <a:lstStyle/>
+          <a:p>
+            <a:r>
+              <a:rPr lang="en-US" altLang="zh-TW" dirty="0"/>
+              <a:t>Return {challenge &amp; </a:t>
+            </a:r>
+            <a:r>
+              <a:rPr lang="en-US" altLang="zh-TW" dirty="0" err="1"/>
+              <a:t>WebAuthn</a:t>
+            </a:r>
+            <a:r>
+              <a:rPr lang="en-US" altLang="zh-TW" dirty="0"/>
+              <a:t>}</a:t>
+            </a:r>
+            <a:endParaRPr lang="zh-TW" altLang="en-US" dirty="0"/>
+          </a:p>
+        </p:txBody>
+      </p:sp>
+      <p:cxnSp>
+        <p:nvCxnSpPr>
+          <p:cNvPr id="3" name="直線單箭頭接點 2">
+            <a:extLst>
+              <a:ext uri="{FF2B5EF4-FFF2-40B4-BE49-F238E27FC236}">
+                <a16:creationId xmlns:a16="http://schemas.microsoft.com/office/drawing/2014/main" id="{4ECEE5A6-694F-B9B1-2CD2-E50A2E7599E5}"/>
+              </a:ext>
+            </a:extLst>
+          </p:cNvPr>
+          <p:cNvCxnSpPr>
+            <a:cxnSpLocks/>
+          </p:cNvCxnSpPr>
+          <p:nvPr/>
+        </p:nvCxnSpPr>
+        <p:spPr>
+          <a:xfrm flipH="1">
+            <a:off x="2023780" y="3316162"/>
+            <a:ext cx="1641949" cy="0"/>
+          </a:xfrm>
+          <a:prstGeom prst="straightConnector1">
+            <a:avLst/>
+          </a:prstGeom>
+          <a:ln w="19050" cap="flat" cmpd="sng" algn="ctr">
+            <a:solidFill>
+              <a:schemeClr val="dk1"/>
+            </a:solidFill>
+            <a:prstDash val="solid"/>
+            <a:round/>
+            <a:headEnd type="none" w="med" len="med"/>
+            <a:tailEnd type="arrow" w="med" len="med"/>
+          </a:ln>
+        </p:spPr>
+        <p:style>
+          <a:lnRef idx="0">
+            <a:scrgbClr r="0" g="0" b="0"/>
+          </a:lnRef>
+          <a:fillRef idx="0">
+            <a:scrgbClr r="0" g="0" b="0"/>
+          </a:fillRef>
+          <a:effectRef idx="0">
+            <a:scrgbClr r="0" g="0" b="0"/>
+          </a:effectRef>
+          <a:fontRef idx="minor">
+            <a:schemeClr val="tx1"/>
+          </a:fontRef>
+        </p:style>
+      </p:cxnSp>
+      <p:sp>
+        <p:nvSpPr>
+          <p:cNvPr id="9" name="文字方塊 8">
+            <a:extLst>
+              <a:ext uri="{FF2B5EF4-FFF2-40B4-BE49-F238E27FC236}">
+                <a16:creationId xmlns:a16="http://schemas.microsoft.com/office/drawing/2014/main" id="{B09AD9AF-448E-0BAB-155A-077AB324EBFE}"/>
+              </a:ext>
+            </a:extLst>
+          </p:cNvPr>
+          <p:cNvSpPr txBox="1"/>
+          <p:nvPr/>
+        </p:nvSpPr>
+        <p:spPr>
+          <a:xfrm>
+            <a:off x="2261114" y="2913510"/>
+            <a:ext cx="1284964" cy="369332"/>
+          </a:xfrm>
+          <a:prstGeom prst="rect">
+            <a:avLst/>
+          </a:prstGeom>
+          <a:noFill/>
+        </p:spPr>
+        <p:txBody>
+          <a:bodyPr wrap="square" rtlCol="0">
+            <a:spAutoFit/>
+          </a:bodyPr>
+          <a:lstStyle/>
+          <a:p>
+            <a:r>
+              <a:rPr lang="zh-TW" altLang="en-US" dirty="0"/>
+              <a:t>調用 </a:t>
+            </a:r>
+            <a:r>
+              <a:rPr lang="en-US" altLang="zh-TW" dirty="0"/>
+              <a:t>API</a:t>
+            </a:r>
+            <a:endParaRPr lang="zh-TW" altLang="en-US" dirty="0"/>
+          </a:p>
+        </p:txBody>
+      </p:sp>
+      <p:cxnSp>
+        <p:nvCxnSpPr>
+          <p:cNvPr id="16" name="直線單箭頭接點 15">
+            <a:extLst>
+              <a:ext uri="{FF2B5EF4-FFF2-40B4-BE49-F238E27FC236}">
+                <a16:creationId xmlns:a16="http://schemas.microsoft.com/office/drawing/2014/main" id="{E6B85DB3-E92E-B067-1FB0-735E6A92018D}"/>
+              </a:ext>
+            </a:extLst>
+          </p:cNvPr>
+          <p:cNvCxnSpPr>
+            <a:cxnSpLocks/>
+          </p:cNvCxnSpPr>
+          <p:nvPr/>
+        </p:nvCxnSpPr>
+        <p:spPr>
+          <a:xfrm>
+            <a:off x="2046737" y="3787147"/>
+            <a:ext cx="1658800" cy="0"/>
+          </a:xfrm>
+          <a:prstGeom prst="straightConnector1">
+            <a:avLst/>
+          </a:prstGeom>
+          <a:ln w="19050" cap="flat" cmpd="sng" algn="ctr">
+            <a:solidFill>
+              <a:schemeClr val="dk1"/>
+            </a:solidFill>
+            <a:prstDash val="solid"/>
+            <a:round/>
+            <a:headEnd type="none" w="med" len="med"/>
+            <a:tailEnd type="arrow" w="med" len="med"/>
+          </a:ln>
+        </p:spPr>
+        <p:style>
+          <a:lnRef idx="0">
+            <a:scrgbClr r="0" g="0" b="0"/>
+          </a:lnRef>
+          <a:fillRef idx="0">
+            <a:scrgbClr r="0" g="0" b="0"/>
+          </a:fillRef>
+          <a:effectRef idx="0">
+            <a:scrgbClr r="0" g="0" b="0"/>
+          </a:effectRef>
+          <a:fontRef idx="minor">
+            <a:schemeClr val="tx1"/>
+          </a:fontRef>
+        </p:style>
+      </p:cxnSp>
+      <p:sp>
+        <p:nvSpPr>
+          <p:cNvPr id="18" name="文字方塊 17">
+            <a:extLst>
+              <a:ext uri="{FF2B5EF4-FFF2-40B4-BE49-F238E27FC236}">
+                <a16:creationId xmlns:a16="http://schemas.microsoft.com/office/drawing/2014/main" id="{9D9EB68C-8871-4A17-8133-9B6914273DBF}"/>
+              </a:ext>
+            </a:extLst>
+          </p:cNvPr>
+          <p:cNvSpPr txBox="1"/>
+          <p:nvPr/>
+        </p:nvSpPr>
+        <p:spPr>
+          <a:xfrm>
+            <a:off x="2078182" y="3462056"/>
+            <a:ext cx="1732044" cy="325089"/>
+          </a:xfrm>
+          <a:prstGeom prst="rect">
+            <a:avLst/>
+          </a:prstGeom>
+          <a:noFill/>
+        </p:spPr>
+        <p:txBody>
+          <a:bodyPr wrap="square" rtlCol="0">
+            <a:spAutoFit/>
+          </a:bodyPr>
+          <a:lstStyle/>
+          <a:p>
+            <a:pPr>
+              <a:lnSpc>
+                <a:spcPts val="1650"/>
+              </a:lnSpc>
+            </a:pPr>
+            <a:r>
+              <a:rPr lang="en-US" altLang="zh-TW" b="0" dirty="0">
+                <a:solidFill>
+                  <a:srgbClr val="4FC1FF"/>
+                </a:solidFill>
+                <a:effectLst/>
+                <a:latin typeface="Fira code" pitchFamily="1" charset="0"/>
+              </a:rPr>
+              <a:t>credential</a:t>
+            </a:r>
+            <a:endParaRPr lang="en-US" altLang="zh-TW" b="0" dirty="0">
+              <a:solidFill>
+                <a:srgbClr val="CCCCCC"/>
+              </a:solidFill>
+              <a:effectLst/>
+              <a:latin typeface="Fira code" pitchFamily="1" charset="0"/>
+            </a:endParaRPr>
+          </a:p>
+        </p:txBody>
+      </p:sp>
+      <p:sp>
+        <p:nvSpPr>
+          <p:cNvPr id="23" name="文字方塊 22">
+            <a:extLst>
+              <a:ext uri="{FF2B5EF4-FFF2-40B4-BE49-F238E27FC236}">
+                <a16:creationId xmlns:a16="http://schemas.microsoft.com/office/drawing/2014/main" id="{9861815D-E619-7F1A-9F0E-5F4DC18968B2}"/>
+              </a:ext>
+            </a:extLst>
+          </p:cNvPr>
+          <p:cNvSpPr txBox="1"/>
+          <p:nvPr/>
+        </p:nvSpPr>
+        <p:spPr>
+          <a:xfrm>
+            <a:off x="4266829" y="3658031"/>
+            <a:ext cx="3637081" cy="646331"/>
+          </a:xfrm>
+          <a:prstGeom prst="rect">
+            <a:avLst/>
+          </a:prstGeom>
+          <a:noFill/>
+        </p:spPr>
+        <p:txBody>
+          <a:bodyPr wrap="square" rtlCol="0">
+            <a:spAutoFit/>
+          </a:bodyPr>
+          <a:lstStyle/>
+          <a:p>
+            <a:r>
+              <a:rPr lang="en-US" altLang="zh-TW" dirty="0"/>
+              <a:t>Post </a:t>
+            </a:r>
+            <a:r>
+              <a:rPr lang="en-US" altLang="zh-TW" dirty="0">
+                <a:solidFill>
+                  <a:srgbClr val="FF0000"/>
+                </a:solidFill>
+              </a:rPr>
+              <a:t>/</a:t>
+            </a:r>
+            <a:r>
+              <a:rPr lang="en-US" altLang="zh-TW" b="0" dirty="0">
+                <a:solidFill>
+                  <a:srgbClr val="FF0000"/>
+                </a:solidFill>
+                <a:effectLst/>
+                <a:latin typeface="Fira code" pitchFamily="1" charset="0"/>
+              </a:rPr>
+              <a:t>store-credential</a:t>
+            </a:r>
+          </a:p>
+          <a:p>
+            <a:endParaRPr lang="zh-TW" altLang="en-US" dirty="0"/>
+          </a:p>
+        </p:txBody>
+      </p:sp>
+      <p:cxnSp>
+        <p:nvCxnSpPr>
+          <p:cNvPr id="24" name="直線單箭頭接點 23">
+            <a:extLst>
+              <a:ext uri="{FF2B5EF4-FFF2-40B4-BE49-F238E27FC236}">
+                <a16:creationId xmlns:a16="http://schemas.microsoft.com/office/drawing/2014/main" id="{9937A7F5-FF55-15A8-0DBA-31B47E3903E2}"/>
+              </a:ext>
+            </a:extLst>
+          </p:cNvPr>
+          <p:cNvCxnSpPr>
+            <a:cxnSpLocks/>
+          </p:cNvCxnSpPr>
+          <p:nvPr/>
+        </p:nvCxnSpPr>
+        <p:spPr>
+          <a:xfrm>
+            <a:off x="4326371" y="4021800"/>
+            <a:ext cx="3020662" cy="0"/>
+          </a:xfrm>
+          <a:prstGeom prst="straightConnector1">
+            <a:avLst/>
+          </a:prstGeom>
+          <a:ln w="19050" cap="flat" cmpd="sng" algn="ctr">
+            <a:solidFill>
+              <a:schemeClr val="dk1"/>
+            </a:solidFill>
+            <a:prstDash val="solid"/>
+            <a:round/>
+            <a:headEnd type="none" w="med" len="med"/>
+            <a:tailEnd type="arrow" w="med" len="med"/>
+          </a:ln>
+        </p:spPr>
+        <p:style>
+          <a:lnRef idx="0">
+            <a:scrgbClr r="0" g="0" b="0"/>
+          </a:lnRef>
+          <a:fillRef idx="0">
+            <a:scrgbClr r="0" g="0" b="0"/>
+          </a:fillRef>
+          <a:effectRef idx="0">
+            <a:scrgbClr r="0" g="0" b="0"/>
+          </a:effectRef>
+          <a:fontRef idx="minor">
+            <a:schemeClr val="tx1"/>
+          </a:fontRef>
+        </p:style>
+      </p:cxnSp>
+      <p:sp>
+        <p:nvSpPr>
+          <p:cNvPr id="29" name="矩形 28">
+            <a:extLst>
+              <a:ext uri="{FF2B5EF4-FFF2-40B4-BE49-F238E27FC236}">
+                <a16:creationId xmlns:a16="http://schemas.microsoft.com/office/drawing/2014/main" id="{A5E5DEEA-DC72-25AE-6F35-14531CF21846}"/>
+              </a:ext>
+            </a:extLst>
+          </p:cNvPr>
+          <p:cNvSpPr/>
+          <p:nvPr/>
+        </p:nvSpPr>
+        <p:spPr>
+          <a:xfrm>
+            <a:off x="7903910" y="2416073"/>
+            <a:ext cx="2145254" cy="629636"/>
+          </a:xfrm>
+          <a:prstGeom prst="rect">
+            <a:avLst/>
+          </a:prstGeom>
+        </p:spPr>
+        <p:style>
+          <a:lnRef idx="2">
+            <a:schemeClr val="accent6"/>
+          </a:lnRef>
+          <a:fillRef idx="1">
+            <a:schemeClr val="lt1"/>
+          </a:fillRef>
+          <a:effectRef idx="0">
+            <a:schemeClr val="accent6"/>
+          </a:effectRef>
+          <a:fontRef idx="minor">
+            <a:schemeClr val="dk1"/>
+          </a:fontRef>
+        </p:style>
+        <p:txBody>
+          <a:bodyPr rtlCol="0" anchor="ctr"/>
+          <a:lstStyle/>
+          <a:p>
+            <a:pPr algn="ctr"/>
+            <a:r>
+              <a:rPr lang="zh-TW" altLang="en-US" dirty="0"/>
+              <a:t>判斷新舊使用者</a:t>
+            </a:r>
+          </a:p>
+        </p:txBody>
+      </p:sp>
+      <p:sp>
+        <p:nvSpPr>
+          <p:cNvPr id="31" name="矩形 30">
+            <a:extLst>
+              <a:ext uri="{FF2B5EF4-FFF2-40B4-BE49-F238E27FC236}">
+                <a16:creationId xmlns:a16="http://schemas.microsoft.com/office/drawing/2014/main" id="{C6281194-CFF6-4CF1-9EA9-53A48BC98850}"/>
+              </a:ext>
+            </a:extLst>
+          </p:cNvPr>
+          <p:cNvSpPr/>
+          <p:nvPr/>
+        </p:nvSpPr>
+        <p:spPr>
+          <a:xfrm>
+            <a:off x="7903910" y="4021800"/>
+            <a:ext cx="2145254" cy="629636"/>
+          </a:xfrm>
+          <a:prstGeom prst="rect">
+            <a:avLst/>
+          </a:prstGeom>
+        </p:spPr>
+        <p:style>
+          <a:lnRef idx="2">
+            <a:schemeClr val="accent6"/>
+          </a:lnRef>
+          <a:fillRef idx="1">
+            <a:schemeClr val="lt1"/>
+          </a:fillRef>
+          <a:effectRef idx="0">
+            <a:schemeClr val="accent6"/>
+          </a:effectRef>
+          <a:fontRef idx="minor">
+            <a:schemeClr val="dk1"/>
+          </a:fontRef>
+        </p:style>
+        <p:txBody>
+          <a:bodyPr rtlCol="0" anchor="ctr"/>
+          <a:lstStyle/>
+          <a:p>
+            <a:pPr algn="ctr"/>
+            <a:r>
+              <a:rPr lang="zh-TW" altLang="en-US" dirty="0"/>
+              <a:t>儲存使用者資料</a:t>
+            </a:r>
+          </a:p>
+        </p:txBody>
+      </p:sp>
+      <p:cxnSp>
+        <p:nvCxnSpPr>
+          <p:cNvPr id="4" name="直線單箭頭接點 3">
+            <a:extLst>
+              <a:ext uri="{FF2B5EF4-FFF2-40B4-BE49-F238E27FC236}">
+                <a16:creationId xmlns:a16="http://schemas.microsoft.com/office/drawing/2014/main" id="{796A8D07-C798-A8B7-E554-3E9AC5F66A18}"/>
+              </a:ext>
+            </a:extLst>
+          </p:cNvPr>
+          <p:cNvCxnSpPr>
+            <a:cxnSpLocks/>
+          </p:cNvCxnSpPr>
+          <p:nvPr/>
+        </p:nvCxnSpPr>
+        <p:spPr>
+          <a:xfrm flipH="1">
+            <a:off x="4400262" y="4623019"/>
+            <a:ext cx="2757920" cy="0"/>
+          </a:xfrm>
+          <a:prstGeom prst="straightConnector1">
+            <a:avLst/>
+          </a:prstGeom>
+          <a:ln w="19050" cap="flat" cmpd="sng" algn="ctr">
+            <a:solidFill>
+              <a:schemeClr val="dk1"/>
+            </a:solidFill>
+            <a:prstDash val="solid"/>
+            <a:round/>
+            <a:headEnd type="none" w="med" len="med"/>
+            <a:tailEnd type="arrow" w="med" len="med"/>
+          </a:ln>
+        </p:spPr>
+        <p:style>
+          <a:lnRef idx="0">
+            <a:scrgbClr r="0" g="0" b="0"/>
+          </a:lnRef>
+          <a:fillRef idx="0">
+            <a:scrgbClr r="0" g="0" b="0"/>
+          </a:fillRef>
+          <a:effectRef idx="0">
+            <a:scrgbClr r="0" g="0" b="0"/>
+          </a:effectRef>
+          <a:fontRef idx="minor">
+            <a:schemeClr val="tx1"/>
+          </a:fontRef>
+        </p:style>
+      </p:cxnSp>
+      <p:sp>
+        <p:nvSpPr>
+          <p:cNvPr id="5" name="文字方塊 4">
+            <a:extLst>
+              <a:ext uri="{FF2B5EF4-FFF2-40B4-BE49-F238E27FC236}">
+                <a16:creationId xmlns:a16="http://schemas.microsoft.com/office/drawing/2014/main" id="{9618B4C5-DB2D-D4AE-3625-4C76ABB0342D}"/>
+              </a:ext>
+            </a:extLst>
+          </p:cNvPr>
+          <p:cNvSpPr txBox="1"/>
+          <p:nvPr/>
+        </p:nvSpPr>
+        <p:spPr>
+          <a:xfrm>
+            <a:off x="5103800" y="4200904"/>
+            <a:ext cx="1140246" cy="369332"/>
+          </a:xfrm>
+          <a:prstGeom prst="rect">
+            <a:avLst/>
+          </a:prstGeom>
+          <a:noFill/>
+        </p:spPr>
+        <p:txBody>
+          <a:bodyPr wrap="square" rtlCol="0">
+            <a:spAutoFit/>
+          </a:bodyPr>
+          <a:lstStyle/>
+          <a:p>
+            <a:r>
+              <a:rPr lang="zh-TW" altLang="en-US" dirty="0"/>
+              <a:t>成功註冊</a:t>
+            </a:r>
+          </a:p>
+        </p:txBody>
+      </p:sp>
+    </p:spTree>
+    <p:extLst>
+      <p:ext uri="{BB962C8B-B14F-4D97-AF65-F5344CB8AC3E}">
+        <p14:creationId xmlns:p14="http://schemas.microsoft.com/office/powerpoint/2010/main" val="1611436625"/>
+      </p:ext>
+    </p:extLst>
+  </p:cSld>
+  <p:clrMapOvr>
+    <a:masterClrMapping/>
+  </p:clrMapOvr>
+</p:sld>
+</file>
+
+<file path=ppt/slides/slide9.xml><?xml version="1.0" encoding="utf-8"?>
+<p:sld xmlns:a="http://schemas.openxmlformats.org/drawingml/2006/main" xmlns:r="http://schemas.openxmlformats.org/officeDocument/2006/relationships" xmlns:p="http://schemas.openxmlformats.org/presentationml/2006/main">
+  <p:cSld>
+    <p:spTree>
+      <p:nvGrpSpPr>
+        <p:cNvPr id="1" name=""/>
+        <p:cNvGrpSpPr/>
+        <p:nvPr/>
+      </p:nvGrpSpPr>
+      <p:grpSpPr>
+        <a:xfrm>
+          <a:off x="0" y="0"/>
+          <a:ext cx="0" cy="0"/>
+          <a:chOff x="0" y="0"/>
+          <a:chExt cx="0" cy="0"/>
+        </a:xfrm>
+      </p:grpSpPr>
+      <p:sp>
+        <p:nvSpPr>
+          <p:cNvPr id="2" name="標題 1">
+            <a:extLst>
+              <a:ext uri="{FF2B5EF4-FFF2-40B4-BE49-F238E27FC236}">
+                <a16:creationId xmlns:a16="http://schemas.microsoft.com/office/drawing/2014/main" id="{DA93D216-982B-81FF-80B8-E8D993811653}"/>
+              </a:ext>
+            </a:extLst>
+          </p:cNvPr>
+          <p:cNvSpPr>
+            <a:spLocks noGrp="1"/>
+          </p:cNvSpPr>
+          <p:nvPr>
+            <p:ph type="title"/>
+          </p:nvPr>
+        </p:nvSpPr>
+        <p:spPr>
+          <a:xfrm>
+            <a:off x="565150" y="770890"/>
+            <a:ext cx="10240521" cy="1268984"/>
+          </a:xfrm>
+        </p:spPr>
+        <p:txBody>
+          <a:bodyPr>
+            <a:normAutofit/>
+          </a:bodyPr>
+          <a:lstStyle/>
+          <a:p>
+            <a:r>
+              <a:rPr lang="zh-TW" altLang="en-US" dirty="0"/>
+              <a:t>網頁驗證流程 </a:t>
+            </a:r>
+            <a:r>
+              <a:rPr lang="en-US" altLang="zh-TW" dirty="0"/>
+              <a:t>–</a:t>
+            </a:r>
+            <a:r>
+              <a:rPr lang="zh-TW" altLang="en-US" dirty="0"/>
+              <a:t> 登入</a:t>
+            </a:r>
+            <a:r>
+              <a:rPr lang="en-US" altLang="zh-TW" b="0" dirty="0">
+                <a:solidFill>
+                  <a:srgbClr val="CE9178"/>
+                </a:solidFill>
+                <a:effectLst/>
+                <a:latin typeface="Fira code" pitchFamily="1" charset="0"/>
+              </a:rPr>
+              <a:t>/verify-register</a:t>
+            </a:r>
+            <a:endParaRPr lang="zh-TW" altLang="en-US" dirty="0"/>
+          </a:p>
+        </p:txBody>
+      </p:sp>
+      <p:sp>
+        <p:nvSpPr>
+          <p:cNvPr id="7" name="矩形 6">
+            <a:extLst>
+              <a:ext uri="{FF2B5EF4-FFF2-40B4-BE49-F238E27FC236}">
+                <a16:creationId xmlns:a16="http://schemas.microsoft.com/office/drawing/2014/main" id="{8227CAC6-BD1F-CFBF-C549-82BC31837819}"/>
+              </a:ext>
+            </a:extLst>
+          </p:cNvPr>
+          <p:cNvSpPr/>
+          <p:nvPr/>
+        </p:nvSpPr>
+        <p:spPr>
+          <a:xfrm>
+            <a:off x="3766219" y="1965350"/>
+            <a:ext cx="340011" cy="2701625"/>
+          </a:xfrm>
+          <a:prstGeom prst="rect">
+            <a:avLst/>
+          </a:prstGeom>
+        </p:spPr>
+        <p:style>
+          <a:lnRef idx="2">
+            <a:schemeClr val="dk1"/>
+          </a:lnRef>
+          <a:fillRef idx="1">
+            <a:schemeClr val="lt1"/>
+          </a:fillRef>
+          <a:effectRef idx="0">
+            <a:schemeClr val="dk1"/>
+          </a:effectRef>
+          <a:fontRef idx="minor">
+            <a:schemeClr val="dk1"/>
+          </a:fontRef>
+        </p:style>
+        <p:txBody>
+          <a:bodyPr rtlCol="0" anchor="ctr"/>
+          <a:lstStyle/>
+          <a:p>
+            <a:pPr algn="ctr"/>
+            <a:r>
+              <a:rPr lang="zh-TW" altLang="en-US" dirty="0"/>
+              <a:t>前端</a:t>
+            </a:r>
+          </a:p>
+        </p:txBody>
+      </p:sp>
+      <p:sp>
+        <p:nvSpPr>
+          <p:cNvPr id="8" name="矩形 7">
+            <a:extLst>
+              <a:ext uri="{FF2B5EF4-FFF2-40B4-BE49-F238E27FC236}">
+                <a16:creationId xmlns:a16="http://schemas.microsoft.com/office/drawing/2014/main" id="{56AF1438-E8A1-25D1-F4BA-0D6DAF74CEF9}"/>
+              </a:ext>
+            </a:extLst>
+          </p:cNvPr>
+          <p:cNvSpPr/>
+          <p:nvPr/>
+        </p:nvSpPr>
+        <p:spPr>
+          <a:xfrm>
+            <a:off x="8282164" y="1965350"/>
+            <a:ext cx="340012" cy="2701636"/>
+          </a:xfrm>
+          <a:prstGeom prst="rect">
+            <a:avLst/>
+          </a:prstGeom>
+        </p:spPr>
+        <p:style>
+          <a:lnRef idx="2">
+            <a:schemeClr val="dk1"/>
+          </a:lnRef>
+          <a:fillRef idx="1">
+            <a:schemeClr val="lt1"/>
+          </a:fillRef>
+          <a:effectRef idx="0">
+            <a:schemeClr val="dk1"/>
+          </a:effectRef>
+          <a:fontRef idx="minor">
+            <a:schemeClr val="dk1"/>
+          </a:fontRef>
+        </p:style>
+        <p:txBody>
+          <a:bodyPr rtlCol="0" anchor="ctr"/>
+          <a:lstStyle/>
+          <a:p>
+            <a:pPr algn="ctr"/>
+            <a:r>
+              <a:rPr lang="zh-TW" altLang="en-US" dirty="0"/>
+              <a:t>後端</a:t>
+            </a:r>
+          </a:p>
+        </p:txBody>
+      </p:sp>
+      <p:cxnSp>
+        <p:nvCxnSpPr>
+          <p:cNvPr id="11" name="直線單箭頭接點 10">
+            <a:extLst>
+              <a:ext uri="{FF2B5EF4-FFF2-40B4-BE49-F238E27FC236}">
+                <a16:creationId xmlns:a16="http://schemas.microsoft.com/office/drawing/2014/main" id="{897F46BA-70CA-0F4A-EBD9-D4EFDB962C04}"/>
+              </a:ext>
+            </a:extLst>
+          </p:cNvPr>
+          <p:cNvCxnSpPr>
+            <a:cxnSpLocks/>
+          </p:cNvCxnSpPr>
+          <p:nvPr/>
+        </p:nvCxnSpPr>
+        <p:spPr>
+          <a:xfrm>
+            <a:off x="2342382" y="2409206"/>
+            <a:ext cx="1323347" cy="1"/>
+          </a:xfrm>
+          <a:prstGeom prst="straightConnector1">
+            <a:avLst/>
+          </a:prstGeom>
+          <a:ln w="19050" cap="flat" cmpd="sng" algn="ctr">
+            <a:solidFill>
+              <a:schemeClr val="dk1"/>
+            </a:solidFill>
+            <a:prstDash val="solid"/>
+            <a:round/>
+            <a:headEnd type="none" w="med" len="med"/>
+            <a:tailEnd type="arrow" w="med" len="med"/>
+          </a:ln>
+        </p:spPr>
+        <p:style>
+          <a:lnRef idx="0">
+            <a:scrgbClr r="0" g="0" b="0"/>
+          </a:lnRef>
+          <a:fillRef idx="0">
+            <a:scrgbClr r="0" g="0" b="0"/>
+          </a:fillRef>
+          <a:effectRef idx="0">
+            <a:scrgbClr r="0" g="0" b="0"/>
+          </a:effectRef>
+          <a:fontRef idx="minor">
+            <a:schemeClr val="tx1"/>
+          </a:fontRef>
+        </p:style>
+      </p:cxnSp>
+      <p:sp>
+        <p:nvSpPr>
+          <p:cNvPr id="13" name="文字方塊 12">
+            <a:extLst>
+              <a:ext uri="{FF2B5EF4-FFF2-40B4-BE49-F238E27FC236}">
+                <a16:creationId xmlns:a16="http://schemas.microsoft.com/office/drawing/2014/main" id="{70ED5A8E-1E7B-7555-6B38-81FB669E4B71}"/>
+              </a:ext>
+            </a:extLst>
+          </p:cNvPr>
+          <p:cNvSpPr txBox="1"/>
+          <p:nvPr/>
+        </p:nvSpPr>
+        <p:spPr>
+          <a:xfrm>
+            <a:off x="2317001" y="2039874"/>
+            <a:ext cx="1284964" cy="369332"/>
+          </a:xfrm>
+          <a:prstGeom prst="rect">
+            <a:avLst/>
+          </a:prstGeom>
+          <a:noFill/>
+        </p:spPr>
+        <p:txBody>
+          <a:bodyPr wrap="square" rtlCol="0">
+            <a:spAutoFit/>
+          </a:bodyPr>
+          <a:lstStyle/>
+          <a:p>
+            <a:r>
+              <a:rPr lang="en-US" altLang="zh-TW" dirty="0"/>
+              <a:t>username</a:t>
+            </a:r>
+            <a:endParaRPr lang="zh-TW" altLang="en-US" dirty="0"/>
+          </a:p>
+        </p:txBody>
+      </p:sp>
+      <p:sp>
+        <p:nvSpPr>
+          <p:cNvPr id="14" name="橢圓 13">
+            <a:extLst>
+              <a:ext uri="{FF2B5EF4-FFF2-40B4-BE49-F238E27FC236}">
+                <a16:creationId xmlns:a16="http://schemas.microsoft.com/office/drawing/2014/main" id="{3A6B441E-E8D4-E360-E3FF-70D2E5F6844D}"/>
+              </a:ext>
+            </a:extLst>
+          </p:cNvPr>
+          <p:cNvSpPr/>
+          <p:nvPr/>
+        </p:nvSpPr>
+        <p:spPr>
+          <a:xfrm>
+            <a:off x="1386329" y="1972216"/>
+            <a:ext cx="748146" cy="887713"/>
+          </a:xfrm>
+          <a:prstGeom prst="ellipse">
+            <a:avLst/>
+          </a:prstGeom>
+        </p:spPr>
+        <p:style>
+          <a:lnRef idx="2">
+            <a:schemeClr val="dk1"/>
+          </a:lnRef>
+          <a:fillRef idx="1">
+            <a:schemeClr val="lt1"/>
+          </a:fillRef>
+          <a:effectRef idx="0">
+            <a:schemeClr val="dk1"/>
+          </a:effectRef>
+          <a:fontRef idx="minor">
+            <a:schemeClr val="dk1"/>
+          </a:fontRef>
+        </p:style>
+        <p:txBody>
+          <a:bodyPr rtlCol="0" anchor="ctr"/>
+          <a:lstStyle/>
+          <a:p>
+            <a:pPr algn="ctr"/>
+            <a:r>
+              <a:rPr lang="zh-TW" altLang="en-US" dirty="0"/>
+              <a:t>使用者</a:t>
+            </a:r>
+          </a:p>
+        </p:txBody>
+      </p:sp>
+      <p:sp>
+        <p:nvSpPr>
+          <p:cNvPr id="15" name="文字方塊 14">
+            <a:extLst>
+              <a:ext uri="{FF2B5EF4-FFF2-40B4-BE49-F238E27FC236}">
+                <a16:creationId xmlns:a16="http://schemas.microsoft.com/office/drawing/2014/main" id="{63936D2B-CFEE-9B24-59B8-90E7BDCD3D85}"/>
+              </a:ext>
+            </a:extLst>
+          </p:cNvPr>
+          <p:cNvSpPr txBox="1"/>
+          <p:nvPr/>
+        </p:nvSpPr>
+        <p:spPr>
+          <a:xfrm>
+            <a:off x="4413389" y="2054403"/>
+            <a:ext cx="3914578" cy="369332"/>
+          </a:xfrm>
+          <a:prstGeom prst="rect">
+            <a:avLst/>
+          </a:prstGeom>
+          <a:noFill/>
+        </p:spPr>
+        <p:txBody>
+          <a:bodyPr wrap="square" rtlCol="0">
+            <a:spAutoFit/>
+          </a:bodyPr>
+          <a:lstStyle/>
+          <a:p>
+            <a:r>
+              <a:rPr lang="en-US" altLang="zh-TW" dirty="0"/>
+              <a:t>Post </a:t>
+            </a:r>
+            <a:r>
+              <a:rPr lang="en-US" altLang="zh-TW" dirty="0">
+                <a:solidFill>
+                  <a:srgbClr val="FF0000"/>
+                </a:solidFill>
+              </a:rPr>
+              <a:t>/verify-register </a:t>
+            </a:r>
+            <a:r>
+              <a:rPr lang="en-US" altLang="zh-TW" dirty="0"/>
+              <a:t>{username}</a:t>
+            </a:r>
+            <a:endParaRPr lang="zh-TW" altLang="en-US" dirty="0"/>
+          </a:p>
+        </p:txBody>
+      </p:sp>
+      <p:cxnSp>
+        <p:nvCxnSpPr>
+          <p:cNvPr id="17" name="直線單箭頭接點 16">
+            <a:extLst>
+              <a:ext uri="{FF2B5EF4-FFF2-40B4-BE49-F238E27FC236}">
+                <a16:creationId xmlns:a16="http://schemas.microsoft.com/office/drawing/2014/main" id="{29EB607A-316C-F61E-CE68-8EABCEE17DE7}"/>
+              </a:ext>
+            </a:extLst>
+          </p:cNvPr>
+          <p:cNvCxnSpPr>
+            <a:cxnSpLocks/>
+          </p:cNvCxnSpPr>
+          <p:nvPr/>
+        </p:nvCxnSpPr>
+        <p:spPr>
+          <a:xfrm>
+            <a:off x="4326371" y="2409207"/>
+            <a:ext cx="3759401" cy="0"/>
+          </a:xfrm>
+          <a:prstGeom prst="straightConnector1">
+            <a:avLst/>
+          </a:prstGeom>
+          <a:ln w="19050" cap="flat" cmpd="sng" algn="ctr">
+            <a:solidFill>
+              <a:schemeClr val="dk1"/>
+            </a:solidFill>
+            <a:prstDash val="solid"/>
+            <a:round/>
+            <a:headEnd type="none" w="med" len="med"/>
+            <a:tailEnd type="arrow" w="med" len="med"/>
+          </a:ln>
+        </p:spPr>
+        <p:style>
+          <a:lnRef idx="0">
+            <a:scrgbClr r="0" g="0" b="0"/>
+          </a:lnRef>
+          <a:fillRef idx="0">
+            <a:scrgbClr r="0" g="0" b="0"/>
+          </a:fillRef>
+          <a:effectRef idx="0">
+            <a:scrgbClr r="0" g="0" b="0"/>
+          </a:effectRef>
+          <a:fontRef idx="minor">
+            <a:schemeClr val="tx1"/>
+          </a:fontRef>
+        </p:style>
+      </p:cxnSp>
+    </p:spTree>
+    <p:extLst>
+      <p:ext uri="{BB962C8B-B14F-4D97-AF65-F5344CB8AC3E}">
+        <p14:creationId xmlns:p14="http://schemas.microsoft.com/office/powerpoint/2010/main" val="181388125"/>
       </p:ext>
     </p:extLst>
   </p:cSld>
